--- a/docs/NormIA.pptx
+++ b/docs/NormIA.pptx
@@ -4322,13 +4322,97 @@
       </p:sp>
       <p:sp>
         <p:nvSpPr>
-          <p:cNvPr id="10" name="Rounded Rectangle 9"/>
+          <p:cNvPr id="10" name="TextBox 9"/>
+          <p:cNvSpPr txBox="1"/>
+          <p:nvPr/>
+        </p:nvSpPr>
+        <p:spPr>
+          <a:xfrm>
+            <a:off x="566928" y="1798320"/>
+            <a:ext cx="10607040" cy="731520"/>
+          </a:xfrm>
+          <a:prstGeom prst="rect">
+            <a:avLst/>
+          </a:prstGeom>
+          <a:noFill/>
+        </p:spPr>
+        <p:txBody>
+          <a:bodyPr wrap="square" lIns="0" rIns="0" tIns="0" bIns="0">
+            <a:spAutoFit/>
+          </a:bodyPr>
+          <a:lstStyle/>
+          <a:p>
+            <a:pPr>
+              <a:lnSpc>
+                <a:spcPct val="135000"/>
+              </a:lnSpc>
+            </a:pPr>
+            <a:r>
+              <a:rPr sz="1050" b="1">
+                <a:solidFill>
+                  <a:srgbClr val="15191A"/>
+                </a:solidFill>
+                <a:latin typeface="Helvetica Neue"/>
+              </a:rPr>
+              <a:t>Fuente:</a:t>
+            </a:r>
+            <a:r>
+              <a:rPr sz="1050" b="0">
+                <a:solidFill>
+                  <a:srgbClr val="5D6663"/>
+                </a:solidFill>
+                <a:latin typeface="Helvetica Neue"/>
+              </a:rPr>
+              <a:t> el SGC real de una empresa de servicios, en PDFs controlados.   </a:t>
+            </a:r>
+            <a:r>
+              <a:rPr sz="1050" b="1">
+                <a:solidFill>
+                  <a:srgbClr val="15191A"/>
+                </a:solidFill>
+                <a:latin typeface="Helvetica Neue"/>
+              </a:rPr>
+              <a:t>Tipo:</a:t>
+            </a:r>
+            <a:r>
+              <a:rPr sz="1050" b="0">
+                <a:solidFill>
+                  <a:srgbClr val="5D6663"/>
+                </a:solidFill>
+                <a:latin typeface="Helvetica Neue"/>
+              </a:rPr>
+              <a:t> manuales, políticas, procedimientos, instructivos y formatos, en 11 áreas.   </a:t>
+            </a:r>
+            <a:r>
+              <a:rPr sz="1050" b="1">
+                <a:solidFill>
+                  <a:srgbClr val="15191A"/>
+                </a:solidFill>
+                <a:latin typeface="Helvetica Neue"/>
+              </a:rPr>
+              <a:t>Volumen:</a:t>
+            </a:r>
+            <a:r>
+              <a:rPr sz="1050" b="0">
+                <a:solidFill>
+                  <a:srgbClr val="5D6663"/>
+                </a:solidFill>
+                <a:latin typeface="Helvetica Neue"/>
+              </a:rPr>
+              <a:t> 132 documentos → 1043 cláusulas → 730 entradas de FAQ.</a:t>
+            </a:r>
+          </a:p>
+        </p:txBody>
+      </p:sp>
+      <p:sp>
+        <p:nvSpPr>
+          <p:cNvPr id="11" name="Rounded Rectangle 10"/>
           <p:cNvSpPr/>
           <p:nvPr/>
         </p:nvSpPr>
         <p:spPr>
           <a:xfrm>
-            <a:off x="566928" y="1944624"/>
+            <a:off x="566928" y="2549271"/>
             <a:ext cx="960120" cy="256032"/>
           </a:xfrm>
           <a:prstGeom prst="roundRect">
@@ -4381,13 +4465,13 @@
       </p:sp>
       <p:sp>
         <p:nvSpPr>
-          <p:cNvPr id="11" name="TextBox 10"/>
-          <p:cNvSpPr txBox="1"/>
-          <p:nvPr/>
-        </p:nvSpPr>
-        <p:spPr>
-          <a:xfrm>
-            <a:off x="749808" y="2346960"/>
+          <p:cNvPr id="12" name="TextBox 11"/>
+          <p:cNvSpPr txBox="1"/>
+          <p:nvPr/>
+        </p:nvSpPr>
+        <p:spPr>
+          <a:xfrm>
+            <a:off x="749808" y="2951607"/>
             <a:ext cx="5080863" cy="457200"/>
           </a:xfrm>
           <a:prstGeom prst="rect">
@@ -4438,13 +4522,13 @@
       </p:sp>
       <p:sp>
         <p:nvSpPr>
-          <p:cNvPr id="12" name="TextBox 11"/>
-          <p:cNvSpPr txBox="1"/>
-          <p:nvPr/>
-        </p:nvSpPr>
-        <p:spPr>
-          <a:xfrm>
-            <a:off x="749808" y="2795016"/>
+          <p:cNvPr id="13" name="TextBox 12"/>
+          <p:cNvSpPr txBox="1"/>
+          <p:nvPr/>
+        </p:nvSpPr>
+        <p:spPr>
+          <a:xfrm>
+            <a:off x="749808" y="3399663"/>
             <a:ext cx="5080863" cy="457200"/>
           </a:xfrm>
           <a:prstGeom prst="rect">
@@ -4486,13 +4570,13 @@
       </p:sp>
       <p:sp>
         <p:nvSpPr>
-          <p:cNvPr id="13" name="TextBox 12"/>
-          <p:cNvSpPr txBox="1"/>
-          <p:nvPr/>
-        </p:nvSpPr>
-        <p:spPr>
-          <a:xfrm>
-            <a:off x="749808" y="3243072"/>
+          <p:cNvPr id="14" name="TextBox 13"/>
+          <p:cNvSpPr txBox="1"/>
+          <p:nvPr/>
+        </p:nvSpPr>
+        <p:spPr>
+          <a:xfrm>
+            <a:off x="749808" y="3847719"/>
             <a:ext cx="5080863" cy="457200"/>
           </a:xfrm>
           <a:prstGeom prst="rect">
@@ -4570,61 +4654,13 @@
       </p:sp>
       <p:sp>
         <p:nvSpPr>
-          <p:cNvPr id="14" name="TextBox 13"/>
-          <p:cNvSpPr txBox="1"/>
-          <p:nvPr/>
-        </p:nvSpPr>
-        <p:spPr>
-          <a:xfrm>
-            <a:off x="749808" y="3517392"/>
-            <a:ext cx="5080863" cy="457200"/>
-          </a:xfrm>
-          <a:prstGeom prst="rect">
-            <a:avLst/>
-          </a:prstGeom>
-          <a:noFill/>
-        </p:spPr>
-        <p:txBody>
-          <a:bodyPr wrap="square" lIns="0" rIns="0" tIns="0" bIns="0">
-            <a:spAutoFit/>
-          </a:bodyPr>
-          <a:lstStyle/>
-          <a:p>
-            <a:pPr>
-              <a:lnSpc>
-                <a:spcPct val="130000"/>
-              </a:lnSpc>
-            </a:pPr>
-            <a:r>
-              <a:rPr sz="1050" b="1">
-                <a:solidFill>
-                  <a:srgbClr val="1D5C3C"/>
-                </a:solidFill>
-                <a:latin typeface="Helvetica Neue"/>
-              </a:rPr>
-              <a:t>— </a:t>
-            </a:r>
-            <a:r>
-              <a:rPr sz="1050" b="0">
-                <a:solidFill>
-                  <a:srgbClr val="15191A"/>
-                </a:solidFill>
-                <a:latin typeface="Helvetica Neue"/>
-              </a:rPr>
-              <a:t>Descarte de índices y membretes repetidos.</a:t>
-            </a:r>
-          </a:p>
-        </p:txBody>
-      </p:sp>
-      <p:sp>
-        <p:nvSpPr>
           <p:cNvPr id="15" name="TextBox 14"/>
           <p:cNvSpPr txBox="1"/>
           <p:nvPr/>
         </p:nvSpPr>
         <p:spPr>
           <a:xfrm>
-            <a:off x="749808" y="3791712"/>
+            <a:off x="749808" y="4122039"/>
             <a:ext cx="5080863" cy="457200"/>
           </a:xfrm>
           <a:prstGeom prst="rect">
@@ -4690,7 +4726,7 @@
         </p:nvSpPr>
         <p:spPr>
           <a:xfrm>
-            <a:off x="6287871" y="1944624"/>
+            <a:off x="6287871" y="2549271"/>
             <a:ext cx="960120" cy="256032"/>
           </a:xfrm>
           <a:prstGeom prst="roundRect">
@@ -4749,7 +4785,7 @@
         </p:nvSpPr>
         <p:spPr>
           <a:xfrm>
-            <a:off x="6470751" y="2346960"/>
+            <a:off x="6470751" y="2951607"/>
             <a:ext cx="5080863" cy="457200"/>
           </a:xfrm>
           <a:prstGeom prst="rect">
@@ -4815,7 +4851,7 @@
         </p:nvSpPr>
         <p:spPr>
           <a:xfrm>
-            <a:off x="6470751" y="2795016"/>
+            <a:off x="6470751" y="3399663"/>
             <a:ext cx="5080863" cy="457200"/>
           </a:xfrm>
           <a:prstGeom prst="rect">
@@ -4881,7 +4917,7 @@
         </p:nvSpPr>
         <p:spPr>
           <a:xfrm>
-            <a:off x="6470751" y="3243072"/>
+            <a:off x="6470751" y="3847719"/>
             <a:ext cx="5080863" cy="457200"/>
           </a:xfrm>
           <a:prstGeom prst="rect">
@@ -4947,7 +4983,7 @@
         </p:nvSpPr>
         <p:spPr>
           <a:xfrm>
-            <a:off x="6470751" y="3691128"/>
+            <a:off x="6470751" y="4295775"/>
             <a:ext cx="5080863" cy="457200"/>
           </a:xfrm>
           <a:prstGeom prst="rect">
@@ -5013,7 +5049,7 @@
         </p:nvSpPr>
         <p:spPr>
           <a:xfrm>
-            <a:off x="566928" y="4395216"/>
+            <a:off x="566928" y="4999863"/>
             <a:ext cx="10058400" cy="731520"/>
           </a:xfrm>
           <a:prstGeom prst="rect">
@@ -13041,7 +13077,7 @@
         <p:spPr>
           <a:xfrm>
             <a:off x="566928" y="1889760"/>
-            <a:ext cx="1554480" cy="201168"/>
+            <a:ext cx="1691640" cy="201168"/>
           </a:xfrm>
           <a:prstGeom prst="rect">
             <a:avLst/>
@@ -13079,8 +13115,8 @@
         </p:nvSpPr>
         <p:spPr>
           <a:xfrm>
-            <a:off x="2121408" y="1889760"/>
-            <a:ext cx="3200400" cy="201168"/>
+            <a:off x="2258568" y="1889760"/>
+            <a:ext cx="3154680" cy="201168"/>
           </a:xfrm>
           <a:prstGeom prst="rect">
             <a:avLst/>
@@ -13118,8 +13154,8 @@
         </p:nvSpPr>
         <p:spPr>
           <a:xfrm>
-            <a:off x="5321808" y="1889760"/>
-            <a:ext cx="6309360" cy="201168"/>
+            <a:off x="5413248" y="1889760"/>
+            <a:ext cx="6217920" cy="201168"/>
           </a:xfrm>
           <a:prstGeom prst="rect">
             <a:avLst/>
@@ -13202,7 +13238,7 @@
         <p:spPr>
           <a:xfrm>
             <a:off x="566928" y="2273808"/>
-            <a:ext cx="1389888" cy="402336"/>
+            <a:ext cx="1527048" cy="457200"/>
           </a:xfrm>
           <a:prstGeom prst="rect">
             <a:avLst/>
@@ -13227,7 +13263,7 @@
                 </a:solidFill>
                 <a:latin typeface="Helvetica Neue"/>
               </a:rPr>
-              <a:t>Modelo</a:t>
+              <a:t>Framework de IA</a:t>
             </a:r>
           </a:p>
         </p:txBody>
@@ -13240,8 +13276,8 @@
         </p:nvSpPr>
         <p:spPr>
           <a:xfrm>
-            <a:off x="2121408" y="2273808"/>
-            <a:ext cx="3035808" cy="402336"/>
+            <a:off x="2258568" y="2273808"/>
+            <a:ext cx="2990088" cy="457200"/>
           </a:xfrm>
           <a:prstGeom prst="rect">
             <a:avLst/>
@@ -13260,13 +13296,52 @@
               </a:lnSpc>
             </a:pPr>
             <a:r>
-              <a:rPr sz="950" b="0">
+              <a:rPr sz="1050" b="0">
                 <a:solidFill>
                   <a:srgbClr val="15191A"/>
                 </a:solidFill>
-                <a:latin typeface="Courier New"/>
-              </a:rPr>
-              <a:t>qwen3.8:27b-mlx</a:t>
+                <a:latin typeface="Helvetica Neue"/>
+              </a:rPr>
+              <a:t>RAG propio · FastAPI · Python 3.12</a:t>
+            </a:r>
+          </a:p>
+        </p:txBody>
+      </p:sp>
+      <p:sp>
+        <p:nvSpPr>
+          <p:cNvPr id="17" name="TextBox 16"/>
+          <p:cNvSpPr txBox="1"/>
+          <p:nvPr/>
+        </p:nvSpPr>
+        <p:spPr>
+          <a:xfrm>
+            <a:off x="5413248" y="2273808"/>
+            <a:ext cx="6053328" cy="457200"/>
+          </a:xfrm>
+          <a:prstGeom prst="rect">
+            <a:avLst/>
+          </a:prstGeom>
+          <a:noFill/>
+        </p:spPr>
+        <p:txBody>
+          <a:bodyPr wrap="square" lIns="0" rIns="0" tIns="0" bIns="0">
+            <a:spAutoFit/>
+          </a:bodyPr>
+          <a:lstStyle/>
+          <a:p>
+            <a:pPr>
+              <a:lnSpc>
+                <a:spcPct val="124000"/>
+              </a:lnSpc>
+            </a:pPr>
+            <a:r>
+              <a:rPr sz="1050" b="1">
+                <a:solidFill>
+                  <a:srgbClr val="15191A"/>
+                </a:solidFill>
+                <a:latin typeface="Helvetica Neue"/>
+              </a:rPr>
+              <a:t>Sin LangChain ni LlamaIndex.</a:t>
             </a:r>
             <a:r>
               <a:rPr sz="1050" b="0">
@@ -13275,46 +13350,7 @@
                 </a:solidFill>
                 <a:latin typeface="Helvetica Neue"/>
               </a:rPr>
-              <a:t> vía Ollama</a:t>
-            </a:r>
-          </a:p>
-        </p:txBody>
-      </p:sp>
-      <p:sp>
-        <p:nvSpPr>
-          <p:cNvPr id="17" name="TextBox 16"/>
-          <p:cNvSpPr txBox="1"/>
-          <p:nvPr/>
-        </p:nvSpPr>
-        <p:spPr>
-          <a:xfrm>
-            <a:off x="5321808" y="2273808"/>
-            <a:ext cx="6144768" cy="402336"/>
-          </a:xfrm>
-          <a:prstGeom prst="rect">
-            <a:avLst/>
-          </a:prstGeom>
-          <a:noFill/>
-        </p:spPr>
-        <p:txBody>
-          <a:bodyPr wrap="square" lIns="0" rIns="0" tIns="0" bIns="0">
-            <a:spAutoFit/>
-          </a:bodyPr>
-          <a:lstStyle/>
-          <a:p>
-            <a:pPr>
-              <a:lnSpc>
-                <a:spcPct val="124000"/>
-              </a:lnSpc>
-            </a:pPr>
-            <a:r>
-              <a:rPr sz="1050" b="0">
-                <a:solidFill>
-                  <a:srgbClr val="15191A"/>
-                </a:solidFill>
-                <a:latin typeface="Helvetica Neue"/>
-              </a:rPr>
-              <a:t>Elegido por medición: acertó cláusula, sección, herramienta y escalación en el banco de pruebas.</a:t>
+              <a:t> Cada paso —troceado, umbral, guardrails— es código legible y testeable; un framework habría escondido justo la parte que aporta el valor. 29 módulos, 177 tests.</a:t>
             </a:r>
           </a:p>
         </p:txBody>
@@ -13327,7 +13363,7 @@
         </p:nvSpPr>
         <p:spPr>
           <a:xfrm>
-            <a:off x="566928" y="2621280"/>
+            <a:off x="566928" y="2676144"/>
             <a:ext cx="11057839" cy="8890"/>
           </a:xfrm>
           <a:prstGeom prst="rect">
@@ -13371,8 +13407,8 @@
         </p:nvSpPr>
         <p:spPr>
           <a:xfrm>
-            <a:off x="566928" y="2749296"/>
-            <a:ext cx="1389888" cy="402336"/>
+            <a:off x="566928" y="2804160"/>
+            <a:ext cx="1527048" cy="457200"/>
           </a:xfrm>
           <a:prstGeom prst="rect">
             <a:avLst/>
@@ -13397,7 +13433,7 @@
                 </a:solidFill>
                 <a:latin typeface="Helvetica Neue"/>
               </a:rPr>
-              <a:t>Embeddings</a:t>
+              <a:t>Modelo</a:t>
             </a:r>
           </a:p>
         </p:txBody>
@@ -13410,8 +13446,8 @@
         </p:nvSpPr>
         <p:spPr>
           <a:xfrm>
-            <a:off x="2121408" y="2749296"/>
-            <a:ext cx="3035808" cy="402336"/>
+            <a:off x="2258568" y="2804160"/>
+            <a:ext cx="2990088" cy="457200"/>
           </a:xfrm>
           <a:prstGeom prst="rect">
             <a:avLst/>
@@ -13436,7 +13472,7 @@
                 </a:solidFill>
                 <a:latin typeface="Courier New"/>
               </a:rPr>
-              <a:t>BAAI/bge-m3</a:t>
+              <a:t>qwen3.8:27b-mlx</a:t>
             </a:r>
             <a:r>
               <a:rPr sz="1050" b="0">
@@ -13445,7 +13481,7 @@
                 </a:solidFill>
                 <a:latin typeface="Helvetica Neue"/>
               </a:rPr>
-              <a:t> · 1024 dim.</a:t>
+              <a:t> vía Ollama</a:t>
             </a:r>
           </a:p>
         </p:txBody>
@@ -13458,8 +13494,8 @@
         </p:nvSpPr>
         <p:spPr>
           <a:xfrm>
-            <a:off x="5321808" y="2749296"/>
-            <a:ext cx="6144768" cy="402336"/>
+            <a:off x="5413248" y="2804160"/>
+            <a:ext cx="6053328" cy="457200"/>
           </a:xfrm>
           <a:prstGeom prst="rect">
             <a:avLst/>
@@ -13484,7 +13520,7 @@
                 </a:solidFill>
                 <a:latin typeface="Helvetica Neue"/>
               </a:rPr>
-              <a:t>Multilingüe y fuerte en español técnico.</a:t>
+              <a:t>Elegido por medición: acertó cláusula, sección, herramienta y escalación en el banco de pruebas.</a:t>
             </a:r>
           </a:p>
         </p:txBody>
@@ -13497,7 +13533,7 @@
         </p:nvSpPr>
         <p:spPr>
           <a:xfrm>
-            <a:off x="566928" y="3096768"/>
+            <a:off x="566928" y="3206496"/>
             <a:ext cx="11057839" cy="8890"/>
           </a:xfrm>
           <a:prstGeom prst="rect">
@@ -13541,8 +13577,8 @@
         </p:nvSpPr>
         <p:spPr>
           <a:xfrm>
-            <a:off x="566928" y="3224784"/>
-            <a:ext cx="1389888" cy="402336"/>
+            <a:off x="566928" y="3334512"/>
+            <a:ext cx="1527048" cy="457200"/>
           </a:xfrm>
           <a:prstGeom prst="rect">
             <a:avLst/>
@@ -13567,7 +13603,7 @@
                 </a:solidFill>
                 <a:latin typeface="Helvetica Neue"/>
               </a:rPr>
-              <a:t>Base de datos</a:t>
+              <a:t>Embeddings</a:t>
             </a:r>
           </a:p>
         </p:txBody>
@@ -13580,8 +13616,8 @@
         </p:nvSpPr>
         <p:spPr>
           <a:xfrm>
-            <a:off x="2121408" y="3224784"/>
-            <a:ext cx="3035808" cy="402336"/>
+            <a:off x="2258568" y="3334512"/>
+            <a:ext cx="2990088" cy="457200"/>
           </a:xfrm>
           <a:prstGeom prst="rect">
             <a:avLst/>
@@ -13600,13 +13636,22 @@
               </a:lnSpc>
             </a:pPr>
             <a:r>
+              <a:rPr sz="950" b="0">
+                <a:solidFill>
+                  <a:srgbClr val="15191A"/>
+                </a:solidFill>
+                <a:latin typeface="Courier New"/>
+              </a:rPr>
+              <a:t>BAAI/bge-m3</a:t>
+            </a:r>
+            <a:r>
               <a:rPr sz="1050" b="0">
                 <a:solidFill>
                   <a:srgbClr val="15191A"/>
                 </a:solidFill>
                 <a:latin typeface="Helvetica Neue"/>
               </a:rPr>
-              <a:t>PostgreSQL 16 · pgvector · unaccent</a:t>
+              <a:t> · 1024 dim.</a:t>
             </a:r>
           </a:p>
         </p:txBody>
@@ -13619,8 +13664,8 @@
         </p:nvSpPr>
         <p:spPr>
           <a:xfrm>
-            <a:off x="5321808" y="3224784"/>
-            <a:ext cx="6144768" cy="402336"/>
+            <a:off x="5413248" y="3334512"/>
+            <a:ext cx="6053328" cy="457200"/>
           </a:xfrm>
           <a:prstGeom prst="rect">
             <a:avLst/>
@@ -13645,25 +13690,7 @@
                 </a:solidFill>
                 <a:latin typeface="Helvetica Neue"/>
               </a:rPr>
-              <a:t>Índice </a:t>
-            </a:r>
-            <a:r>
-              <a:rPr sz="1050" b="1">
-                <a:solidFill>
-                  <a:srgbClr val="15191A"/>
-                </a:solidFill>
-                <a:latin typeface="Helvetica Neue"/>
-              </a:rPr>
-              <a:t>HNSW</a:t>
-            </a:r>
-            <a:r>
-              <a:rPr sz="1050" b="0">
-                <a:solidFill>
-                  <a:srgbClr val="15191A"/>
-                </a:solidFill>
-                <a:latin typeface="Helvetica Neue"/>
-              </a:rPr>
-              <a:t>, no ivfflat: ivfflat entrena centroides sobre los datos ya cargados, y el índice se crea con la tabla vacía.</a:t>
+              <a:t>Multilingüe y fuerte en español técnico.</a:t>
             </a:r>
           </a:p>
         </p:txBody>
@@ -13676,7 +13703,7 @@
         </p:nvSpPr>
         <p:spPr>
           <a:xfrm>
-            <a:off x="566928" y="3572256"/>
+            <a:off x="566928" y="3736848"/>
             <a:ext cx="11057839" cy="8890"/>
           </a:xfrm>
           <a:prstGeom prst="rect">
@@ -13720,8 +13747,8 @@
         </p:nvSpPr>
         <p:spPr>
           <a:xfrm>
-            <a:off x="566928" y="3700272"/>
-            <a:ext cx="1389888" cy="402336"/>
+            <a:off x="566928" y="3864864"/>
+            <a:ext cx="1527048" cy="457200"/>
           </a:xfrm>
           <a:prstGeom prst="rect">
             <a:avLst/>
@@ -13746,7 +13773,7 @@
                 </a:solidFill>
                 <a:latin typeface="Helvetica Neue"/>
               </a:rPr>
-              <a:t>API</a:t>
+              <a:t>Base de datos</a:t>
             </a:r>
           </a:p>
         </p:txBody>
@@ -13759,8 +13786,8 @@
         </p:nvSpPr>
         <p:spPr>
           <a:xfrm>
-            <a:off x="2121408" y="3700272"/>
-            <a:ext cx="3035808" cy="402336"/>
+            <a:off x="2258568" y="3864864"/>
+            <a:ext cx="2990088" cy="457200"/>
           </a:xfrm>
           <a:prstGeom prst="rect">
             <a:avLst/>
@@ -13785,7 +13812,7 @@
                 </a:solidFill>
                 <a:latin typeface="Helvetica Neue"/>
               </a:rPr>
-              <a:t>FastAPI · Python 3.12</a:t>
+              <a:t>PostgreSQL 16 · pgvector · unaccent</a:t>
             </a:r>
           </a:p>
         </p:txBody>
@@ -13798,8 +13825,8 @@
         </p:nvSpPr>
         <p:spPr>
           <a:xfrm>
-            <a:off x="5321808" y="3700272"/>
-            <a:ext cx="6144768" cy="402336"/>
+            <a:off x="5413248" y="3864864"/>
+            <a:ext cx="6053328" cy="457200"/>
           </a:xfrm>
           <a:prstGeom prst="rect">
             <a:avLst/>
@@ -13824,7 +13851,25 @@
                 </a:solidFill>
                 <a:latin typeface="Helvetica Neue"/>
               </a:rPr>
-              <a:t>29 módulos con responsabilidades separadas y 177 tests.</a:t>
+              <a:t>Índice </a:t>
+            </a:r>
+            <a:r>
+              <a:rPr sz="1050" b="1">
+                <a:solidFill>
+                  <a:srgbClr val="15191A"/>
+                </a:solidFill>
+                <a:latin typeface="Helvetica Neue"/>
+              </a:rPr>
+              <a:t>HNSW</a:t>
+            </a:r>
+            <a:r>
+              <a:rPr sz="1050" b="0">
+                <a:solidFill>
+                  <a:srgbClr val="15191A"/>
+                </a:solidFill>
+                <a:latin typeface="Helvetica Neue"/>
+              </a:rPr>
+              <a:t>, no ivfflat: ivfflat entrena centroides sobre los datos ya cargados, y el índice se crea con la tabla vacía.</a:t>
             </a:r>
           </a:p>
         </p:txBody>
@@ -13837,7 +13882,7 @@
         </p:nvSpPr>
         <p:spPr>
           <a:xfrm>
-            <a:off x="566928" y="4047744"/>
+            <a:off x="566928" y="4267200"/>
             <a:ext cx="11057839" cy="8890"/>
           </a:xfrm>
           <a:prstGeom prst="rect">
@@ -13881,8 +13926,8 @@
         </p:nvSpPr>
         <p:spPr>
           <a:xfrm>
-            <a:off x="566928" y="4175760"/>
-            <a:ext cx="1389888" cy="402336"/>
+            <a:off x="566928" y="4395216"/>
+            <a:ext cx="1527048" cy="457200"/>
           </a:xfrm>
           <a:prstGeom prst="rect">
             <a:avLst/>
@@ -13907,7 +13952,7 @@
                 </a:solidFill>
                 <a:latin typeface="Helvetica Neue"/>
               </a:rPr>
-              <a:t>Canal</a:t>
+              <a:t>Mensajería</a:t>
             </a:r>
           </a:p>
         </p:txBody>
@@ -13920,8 +13965,8 @@
         </p:nvSpPr>
         <p:spPr>
           <a:xfrm>
-            <a:off x="2121408" y="4175760"/>
-            <a:ext cx="3035808" cy="402336"/>
+            <a:off x="2258568" y="4395216"/>
+            <a:ext cx="2990088" cy="457200"/>
           </a:xfrm>
           <a:prstGeom prst="rect">
             <a:avLst/>
@@ -13946,7 +13991,7 @@
                 </a:solidFill>
                 <a:latin typeface="Helvetica Neue"/>
               </a:rPr>
-              <a:t>Web Component · Shadow DOM</a:t>
+              <a:t>Widget web · Web Component + Shadow DOM</a:t>
             </a:r>
           </a:p>
         </p:txBody>
@@ -13959,8 +14004,8 @@
         </p:nvSpPr>
         <p:spPr>
           <a:xfrm>
-            <a:off x="5321808" y="4175760"/>
-            <a:ext cx="6144768" cy="402336"/>
+            <a:off x="5413248" y="4395216"/>
+            <a:ext cx="6053328" cy="457200"/>
           </a:xfrm>
           <a:prstGeom prst="rect">
             <a:avLst/>
@@ -13985,7 +14030,7 @@
                 </a:solidFill>
                 <a:latin typeface="Helvetica Neue"/>
               </a:rPr>
-              <a:t>Una etiqueta y un &lt;script&gt;. Los estilos del sitio anfitrión no lo tocan.</a:t>
+              <a:t>Una etiqueta y un &lt;script&gt;; los estilos del anfitrión no lo tocan. WhatsApp queda para Fase 2.</a:t>
             </a:r>
           </a:p>
         </p:txBody>
@@ -13998,7 +14043,7 @@
         </p:nvSpPr>
         <p:spPr>
           <a:xfrm>
-            <a:off x="566928" y="4523232"/>
+            <a:off x="566928" y="4797552"/>
             <a:ext cx="11057839" cy="8890"/>
           </a:xfrm>
           <a:prstGeom prst="rect">
@@ -14042,8 +14087,8 @@
         </p:nvSpPr>
         <p:spPr>
           <a:xfrm>
-            <a:off x="566928" y="4651248"/>
-            <a:ext cx="1389888" cy="402336"/>
+            <a:off x="566928" y="4925568"/>
+            <a:ext cx="1527048" cy="457200"/>
           </a:xfrm>
           <a:prstGeom prst="rect">
             <a:avLst/>
@@ -14068,7 +14113,7 @@
                 </a:solidFill>
                 <a:latin typeface="Helvetica Neue"/>
               </a:rPr>
-              <a:t>Entorno</a:t>
+              <a:t>Despliegue</a:t>
             </a:r>
           </a:p>
         </p:txBody>
@@ -14081,8 +14126,8 @@
         </p:nvSpPr>
         <p:spPr>
           <a:xfrm>
-            <a:off x="2121408" y="4651248"/>
-            <a:ext cx="3035808" cy="402336"/>
+            <a:off x="2258568" y="4925568"/>
+            <a:ext cx="2990088" cy="457200"/>
           </a:xfrm>
           <a:prstGeom prst="rect">
             <a:avLst/>
@@ -14101,14 +14146,44 @@
               </a:lnSpc>
             </a:pPr>
             <a:r>
-              <a:rPr sz="950" b="0">
+              <a:rPr sz="1050" b="0">
                 <a:solidFill>
                   <a:srgbClr val="15191A"/>
                 </a:solidFill>
-                <a:latin typeface="Courier New"/>
-              </a:rPr>
-              <a:t>uv</a:t>
-            </a:r>
+                <a:latin typeface="Helvetica Neue"/>
+              </a:rPr>
+              <a:t>Docker Compose · uv</a:t>
+            </a:r>
+          </a:p>
+        </p:txBody>
+      </p:sp>
+      <p:sp>
+        <p:nvSpPr>
+          <p:cNvPr id="37" name="TextBox 36"/>
+          <p:cNvSpPr txBox="1"/>
+          <p:nvPr/>
+        </p:nvSpPr>
+        <p:spPr>
+          <a:xfrm>
+            <a:off x="5413248" y="4925568"/>
+            <a:ext cx="6053328" cy="457200"/>
+          </a:xfrm>
+          <a:prstGeom prst="rect">
+            <a:avLst/>
+          </a:prstGeom>
+          <a:noFill/>
+        </p:spPr>
+        <p:txBody>
+          <a:bodyPr wrap="square" lIns="0" rIns="0" tIns="0" bIns="0">
+            <a:spAutoFit/>
+          </a:bodyPr>
+          <a:lstStyle/>
+          <a:p>
+            <a:pPr>
+              <a:lnSpc>
+                <a:spcPct val="124000"/>
+              </a:lnSpc>
+            </a:pPr>
             <a:r>
               <a:rPr sz="1050" b="0">
                 <a:solidFill>
@@ -14116,46 +14191,7 @@
                 </a:solidFill>
                 <a:latin typeface="Helvetica Neue"/>
               </a:rPr>
-              <a:t> · Docker Compose</a:t>
-            </a:r>
-          </a:p>
-        </p:txBody>
-      </p:sp>
-      <p:sp>
-        <p:nvSpPr>
-          <p:cNvPr id="37" name="TextBox 36"/>
-          <p:cNvSpPr txBox="1"/>
-          <p:nvPr/>
-        </p:nvSpPr>
-        <p:spPr>
-          <a:xfrm>
-            <a:off x="5321808" y="4651248"/>
-            <a:ext cx="6144768" cy="402336"/>
-          </a:xfrm>
-          <a:prstGeom prst="rect">
-            <a:avLst/>
-          </a:prstGeom>
-          <a:noFill/>
-        </p:spPr>
-        <p:txBody>
-          <a:bodyPr wrap="square" lIns="0" rIns="0" tIns="0" bIns="0">
-            <a:spAutoFit/>
-          </a:bodyPr>
-          <a:lstStyle/>
-          <a:p>
-            <a:pPr>
-              <a:lnSpc>
-                <a:spcPct val="124000"/>
-              </a:lnSpc>
-            </a:pPr>
-            <a:r>
-              <a:rPr sz="1050" b="0">
-                <a:solidFill>
-                  <a:srgbClr val="15191A"/>
-                </a:solidFill>
-                <a:latin typeface="Helvetica Neue"/>
-              </a:rPr>
-              <a:t>Clonar, instalar, configurar .env, ejecutar.</a:t>
+              <a:t>Local, sin nube: el corpus es documentación interna. Clonar, instalar, configurar .env, ejecutar.</a:t>
             </a:r>
           </a:p>
         </p:txBody>
@@ -14168,7 +14204,7 @@
         </p:nvSpPr>
         <p:spPr>
           <a:xfrm>
-            <a:off x="566928" y="4998720"/>
+            <a:off x="566928" y="5327904"/>
             <a:ext cx="11057839" cy="8890"/>
           </a:xfrm>
           <a:prstGeom prst="rect">

--- a/docs/NormIA.pptx
+++ b/docs/NormIA.pptx
@@ -4563,7 +4563,7 @@
                 </a:solidFill>
                 <a:latin typeface="Helvetica Neue"/>
               </a:rPr>
-              <a:t>Tablas extraídas preservando celda↔columna. Sin esto daba el «tiempo de solución» por el «de respuesta».</a:t>
+              <a:t>Las tablas se leen respetando qué valor va con qué columna. Sin eso daba el «tiempo de solución» por el «de respuesta».</a:t>
             </a:r>
           </a:p>
         </p:txBody>
@@ -4952,7 +4952,7 @@
                 </a:solidFill>
                 <a:latin typeface="Helvetica Neue"/>
               </a:rPr>
-              <a:t>Validación </a:t>
+              <a:t>La revisión es con </a:t>
             </a:r>
             <a:r>
               <a:rPr sz="1050" b="1">
@@ -4961,7 +4961,7 @@
                 </a:solidFill>
                 <a:latin typeface="Helvetica Neue"/>
               </a:rPr>
-              <a:t>determinista</a:t>
+              <a:t>reglas fijas</a:t>
             </a:r>
             <a:r>
               <a:rPr sz="1050" b="0">
@@ -4970,7 +4970,7 @@
                 </a:solidFill>
                 <a:latin typeface="Helvetica Neue"/>
               </a:rPr>
-              <a:t>, no juez LLM: un juez comparte los sesgos del generador.</a:t>
+              <a:t>, no pidiéndole a otra IA que juzgue: heredaría los mismos errores.</a:t>
             </a:r>
           </a:p>
         </p:txBody>
@@ -5018,7 +5018,7 @@
                 </a:solidFill>
                 <a:latin typeface="Helvetica Neue"/>
               </a:rPr>
-              <a:t>El FAQ es </a:t>
+              <a:t>Las preguntas frecuentes ayudan a </a:t>
             </a:r>
             <a:r>
               <a:rPr sz="1050" b="1">
@@ -5027,7 +5027,7 @@
                 </a:solidFill>
                 <a:latin typeface="Helvetica Neue"/>
               </a:rPr>
-              <a:t>fuente de recuperación, no caché</a:t>
+              <a:t>encontrar</a:t>
             </a:r>
             <a:r>
               <a:rPr sz="1050" b="0">
@@ -5036,7 +5036,7 @@
                 </a:solidFill>
                 <a:latin typeface="Helvetica Neue"/>
               </a:rPr>
-              <a:t>: la respuesta siempre pasa por los guardrails.</a:t>
+              <a:t> la cláusula, pero nunca sustituyen la respuesta.</a:t>
             </a:r>
           </a:p>
         </p:txBody>
@@ -6219,7 +6219,7 @@
                 </a:solidFill>
                 <a:latin typeface="Helvetica Neue"/>
               </a:rPr>
-              <a:t>Timeout 120 s con 2 reintentos. Ahora: 45 s sin reintento y cortacircuitos.</a:t>
+              <a:t>Antes insistía cuando el modelo se colgaba. Ahora corta a los 45 s y deja de intentarlo si falla tres veces.</a:t>
             </a:r>
           </a:p>
         </p:txBody>
@@ -9287,7 +9287,7 @@
                 </a:solidFill>
                 <a:latin typeface="Helvetica Neue"/>
               </a:rPr>
-              <a:t>Un SGC ya está escrito en cláusulas numeradas, con código y versión en el membrete. La unidad de sentido viene delimitada de fábrica.</a:t>
+              <a:t>Un SGC ya está escrito en cláusulas numeradas, con código y versión en el membrete. El documento ya viene partido en piezas con sentido propio.</a:t>
             </a:r>
           </a:p>
         </p:txBody>
@@ -11107,7 +11107,7 @@
                 </a:solidFill>
                 <a:latin typeface="Helvetica Neue"/>
               </a:rPr>
-              <a:t>Umbral semántico</a:t>
+              <a:t>¿Se parece lo suficiente?</a:t>
             </a:r>
             <a:r>
               <a:rPr sz="950" b="0">
@@ -11117,7 +11117,7 @@
                 <a:latin typeface="Helvetica Neue"/>
               </a:rPr>
               <a:t>
-Distancia 0.49 + margen relativo</a:t>
+Hay un mínimo de parecido; por debajo, no responde</a:t>
             </a:r>
           </a:p>
         </p:txBody>
@@ -11156,25 +11156,7 @@
                 </a:solidFill>
                 <a:latin typeface="Helvetica Neue"/>
               </a:rPr>
-              <a:t>Sin él, </a:t>
-            </a:r>
-            <a:r>
-              <a:rPr sz="950" b="0">
-                <a:solidFill>
-                  <a:srgbClr val="15191A"/>
-                </a:solidFill>
-                <a:latin typeface="Courier New"/>
-              </a:rPr>
-              <a:t>ORDER BY distancia LIMIT k</a:t>
-            </a:r>
-            <a:r>
-              <a:rPr sz="1050" b="0">
-                <a:solidFill>
-                  <a:srgbClr val="15191A"/>
-                </a:solidFill>
-                <a:latin typeface="Helvetica Neue"/>
-              </a:rPr>
-              <a:t> siempre devuelve algo, por irrelevante que sea.</a:t>
+              <a:t>Sin esta comprobación la búsqueda devuelve siempre lo más parecido que encuentre, aunque no tenga nada que ver.</a:t>
             </a:r>
           </a:p>
         </p:txBody>
@@ -11296,7 +11278,7 @@
                 </a:solidFill>
                 <a:latin typeface="Helvetica Neue"/>
               </a:rPr>
-              <a:t>Versión citada</a:t>
+              <a:t>¿Es la versión vigente?</a:t>
             </a:r>
             <a:r>
               <a:rPr sz="950" b="0">
@@ -11306,7 +11288,7 @@
                 <a:latin typeface="Helvetica Neue"/>
               </a:rPr>
               <a:t>
-Se corrige contra la versión real</a:t>
+Se contrasta con la versión real del documento</a:t>
             </a:r>
           </a:p>
         </p:txBody>
@@ -11345,7 +11327,7 @@
                 </a:solidFill>
                 <a:latin typeface="Helvetica Neue"/>
               </a:rPr>
-              <a:t>Escribió </a:t>
+              <a:t>Dijo que la política iba por la </a:t>
             </a:r>
             <a:r>
               <a:rPr sz="1000" b="1">
@@ -11354,7 +11336,7 @@
                 </a:solidFill>
                 <a:latin typeface="Courier New"/>
               </a:rPr>
-              <a:t>STI-PO-01 v1</a:t>
+              <a:t>v1</a:t>
             </a:r>
             <a:r>
               <a:rPr sz="1050" b="0">
@@ -11363,7 +11345,7 @@
                 </a:solidFill>
                 <a:latin typeface="Helvetica Neue"/>
               </a:rPr>
-              <a:t> estando en v2, contradiciendo el pie que él mismo generaba.</a:t>
+              <a:t> cuando va por la v2, contradiciendo el pie que él mismo escribía.</a:t>
             </a:r>
           </a:p>
         </p:txBody>
@@ -11485,7 +11467,7 @@
                 </a:solidFill>
                 <a:latin typeface="Helvetica Neue"/>
               </a:rPr>
-              <a:t>Código citado</a:t>
+              <a:t>¿Existe el documento que cita?</a:t>
             </a:r>
             <a:r>
               <a:rPr sz="950" b="0">
@@ -11495,7 +11477,7 @@
                 <a:latin typeface="Helvetica Neue"/>
               </a:rPr>
               <a:t>
-Verificación documento a documento</a:t>
+Se comprueba uno por uno contra la lista real</a:t>
             </a:r>
           </a:p>
         </p:txBody>
@@ -11534,25 +11516,7 @@
                 </a:solidFill>
                 <a:latin typeface="Helvetica Neue"/>
               </a:rPr>
-              <a:t>Citó </a:t>
-            </a:r>
-            <a:r>
-              <a:rPr sz="1000" b="1">
-                <a:solidFill>
-                  <a:srgbClr val="9E2B21"/>
-                </a:solidFill>
-                <a:latin typeface="Courier New"/>
-              </a:rPr>
-              <a:t>PROC-CAL-04</a:t>
-            </a:r>
-            <a:r>
-              <a:rPr sz="1050" b="0">
-                <a:solidFill>
-                  <a:srgbClr val="15191A"/>
-                </a:solidFill>
-                <a:latin typeface="Helvetica Neue"/>
-              </a:rPr>
-              <a:t>, que no existe: venía del ejemplo de formato del propio prompt.</a:t>
+              <a:t>Citó un procedimiento que no existe. Se lo había copiado al ejemplo de formato de sus propias instrucciones.</a:t>
             </a:r>
           </a:p>
         </p:txBody>
@@ -11674,7 +11638,7 @@
                 </a:solidFill>
                 <a:latin typeface="Helvetica Neue"/>
               </a:rPr>
-              <a:t>Fundamentación</a:t>
+              <a:t>¿Tiene en qué apoyarse?</a:t>
             </a:r>
             <a:r>
               <a:rPr sz="950" b="0">
@@ -11684,7 +11648,7 @@
                 <a:latin typeface="Helvetica Neue"/>
               </a:rPr>
               <a:t>
-Bloqueante: descarta y escala</a:t>
+Si no, descarta la respuesta y avisa a Calidad</a:t>
             </a:r>
           </a:p>
         </p:txBody>
@@ -12673,7 +12637,7 @@
                 </a:solidFill>
                 <a:latin typeface="Helvetica Neue"/>
               </a:rPr>
-              <a:t>La pregunta se vectoriza y se buscan </a:t>
+              <a:t>La pregunta se compara </a:t>
             </a:r>
             <a:r>
               <a:rPr sz="1000" b="1">
@@ -12682,7 +12646,7 @@
                 </a:solidFill>
                 <a:latin typeface="Helvetica Neue"/>
               </a:rPr>
-              <a:t>en paralelo</a:t>
+              <a:t>a la vez</a:t>
             </a:r>
             <a:r>
               <a:rPr sz="1000" b="0">
@@ -12691,7 +12655,7 @@
                 </a:solidFill>
                 <a:latin typeface="Helvetica Neue"/>
               </a:rPr>
-              <a:t> el FAQ y las cláusulas vigentes. Después, cuatro puntos de control: en cualquiera de ellos la respuesta se descarta y la consulta pasa a la cola de Calidad.</a:t>
+              <a:t> con las preguntas frecuentes y con las cláusulas vigentes. Después, cuatro puntos de control: en cualquiera de ellos la respuesta se descarta y la consulta pasa a la cola de Calidad.</a:t>
             </a:r>
           </a:p>
         </p:txBody>
@@ -13603,7 +13567,7 @@
                 </a:solidFill>
                 <a:latin typeface="Helvetica Neue"/>
               </a:rPr>
-              <a:t>Embeddings</a:t>
+              <a:t>Comprensión del texto</a:t>
             </a:r>
           </a:p>
         </p:txBody>
@@ -13644,15 +13608,6 @@
               </a:rPr>
               <a:t>BAAI/bge-m3</a:t>
             </a:r>
-            <a:r>
-              <a:rPr sz="1050" b="0">
-                <a:solidFill>
-                  <a:srgbClr val="15191A"/>
-                </a:solidFill>
-                <a:latin typeface="Helvetica Neue"/>
-              </a:rPr>
-              <a:t> · 1024 dim.</a:t>
-            </a:r>
           </a:p>
         </p:txBody>
       </p:sp>
@@ -13690,7 +13645,7 @@
                 </a:solidFill>
                 <a:latin typeface="Helvetica Neue"/>
               </a:rPr>
-              <a:t>Multilingüe y fuerte en español técnico.</a:t>
+              <a:t>Convierte cada cláusula en una huella numérica de su significado: es lo que permite buscar por sentido y no por palabras exactas.</a:t>
             </a:r>
           </a:p>
         </p:txBody>
@@ -13851,25 +13806,7 @@
                 </a:solidFill>
                 <a:latin typeface="Helvetica Neue"/>
               </a:rPr>
-              <a:t>Índice </a:t>
-            </a:r>
-            <a:r>
-              <a:rPr sz="1050" b="1">
-                <a:solidFill>
-                  <a:srgbClr val="15191A"/>
-                </a:solidFill>
-                <a:latin typeface="Helvetica Neue"/>
-              </a:rPr>
-              <a:t>HNSW</a:t>
-            </a:r>
-            <a:r>
-              <a:rPr sz="1050" b="0">
-                <a:solidFill>
-                  <a:srgbClr val="15191A"/>
-                </a:solidFill>
-                <a:latin typeface="Helvetica Neue"/>
-              </a:rPr>
-              <a:t>, no ivfflat: ivfflat entrena centroides sobre los datos ya cargados, y el índice se crea con la tabla vacía.</a:t>
+              <a:t>Guarda documentos, conversaciones y la traza de auditoría, y busca por significado. También ignora los acentos: sin eso, «auditoria» no encontraba «auditoría».</a:t>
             </a:r>
           </a:p>
         </p:txBody>

--- a/docs/NormIA.pptx
+++ b/docs/NormIA.pptx
@@ -9081,7 +9081,7 @@
                 </a:solidFill>
                 <a:latin typeface="Helvetica Neue"/>
               </a:rPr>
-              <a:t>Un corpus que ya venía hecho para esto</a:t>
+              <a:t>Por qué este problema y no otro</a:t>
             </a:r>
           </a:p>
         </p:txBody>
@@ -12886,7 +12886,7 @@
                 </a:solidFill>
                 <a:latin typeface="Helvetica Neue"/>
               </a:rPr>
-              <a:t>STACK TECNOLÓGICO</a:t>
+              <a:t>HERRAMIENTAS Y DESPLIEGUE</a:t>
             </a:r>
           </a:p>
         </p:txBody>
@@ -12964,7 +12964,7 @@
                 </a:solidFill>
                 <a:latin typeface="Helvetica Neue"/>
               </a:rPr>
-              <a:t>STACK</a:t>
+              <a:t>CON QUÉ ESTÁ HECHO</a:t>
             </a:r>
           </a:p>
         </p:txBody>
@@ -13314,7 +13314,7 @@
                 </a:solidFill>
                 <a:latin typeface="Helvetica Neue"/>
               </a:rPr>
-              <a:t> Cada paso —troceado, umbral, guardrails— es código legible y testeable; un framework habría escondido justo la parte que aporta el valor. 29 módulos, 177 tests.</a:t>
+              <a:t> Cada paso —troceado, umbral, guardrails— es código legible y comprobable; un framework habría escondido justo la parte que aporta el valor. 29 módulos, 177 tests.</a:t>
             </a:r>
           </a:p>
         </p:txBody>
@@ -14128,7 +14128,7 @@
                 </a:solidFill>
                 <a:latin typeface="Helvetica Neue"/>
               </a:rPr>
-              <a:t>Local, sin nube: el corpus es documentación interna. Clonar, instalar, configurar .env, ejecutar.</a:t>
+              <a:t>Local, sin nube: los documentos son internos. Clonar, instalar, configurar .env, ejecutar.</a:t>
             </a:r>
           </a:p>
         </p:txBody>

--- a/docs/NormIA.pptx
+++ b/docs/NormIA.pptx
@@ -6100,7 +6100,7 @@
                 </a:solidFill>
                 <a:latin typeface="Helvetica Neue"/>
               </a:rPr>
-              <a:t>Desde 18,0 s. La máxima bajó de 33,3 s a 20,0 s.</a:t>
+              <a:t>Un 38 % más rápida que la primera versión, que estaba en 18,0 s. La máxima bajó de 33,3 s a 20,0 s.</a:t>
             </a:r>
           </a:p>
         </p:txBody>
@@ -6187,7 +6187,7 @@
                 </a:solidFill>
                 <a:latin typeface="Courier New"/>
               </a:rPr>
-              <a:t>12 min</a:t>
+              <a:t>45 s</a:t>
             </a:r>
           </a:p>
           <a:p>
@@ -6203,7 +6203,7 @@
                 </a:solidFill>
                 <a:latin typeface="Helvetica Neue"/>
               </a:rPr>
-              <a:t>lo que costaba un cuelgue</a:t>
+              <a:t>techo por consulta</a:t>
             </a:r>
           </a:p>
           <a:p>
@@ -6219,7 +6219,7 @@
                 </a:solidFill>
                 <a:latin typeface="Helvetica Neue"/>
               </a:rPr>
-              <a:t>Antes insistía cuando el modelo se colgaba. Ahora corta a los 45 s y deja de intentarlo si falla tres veces.</a:t>
+              <a:t>Garantizado. Antes, un cuelgue del modelo hacía esperar hasta 12 minutos, porque reintentaba en vez de rendirse.</a:t>
             </a:r>
           </a:p>
         </p:txBody>
@@ -6306,7 +6306,7 @@
                 </a:solidFill>
                 <a:latin typeface="Courier New"/>
               </a:rPr>
-              <a:t>177</a:t>
+              <a:t>195</a:t>
             </a:r>
           </a:p>
           <a:p>
@@ -6338,7 +6338,7 @@
                 </a:solidFill>
                 <a:latin typeface="Helvetica Neue"/>
               </a:rPr>
-              <a:t>Los del guardrail son la tesis: si pasan a rojo, NormIA deja de ser auditable.</a:t>
+              <a:t>Los de los guardrails son la tesis: si pasan a rojo, NormIA deja de ser auditable.</a:t>
             </a:r>
           </a:p>
         </p:txBody>
@@ -6425,7 +6425,7 @@
                 </a:solidFill>
                 <a:latin typeface="Helvetica Neue"/>
               </a:rPr>
-              <a:t>Lo que queda fuera de Fase 1</a:t>
+              <a:t>Seis hallazgos reportados</a:t>
             </a:r>
           </a:p>
           <a:p>
@@ -6441,7 +6441,7 @@
                 </a:solidFill>
                 <a:latin typeface="Helvetica Neue"/>
               </a:rPr>
-              <a:t>WhatsApp, multi-tenant real y despliegue. El alcance se acotó para que lo entregado funcione de verdad.</a:t>
+              <a:t>Inconsistencias reales del SGC que el sistema detectó al ingerirlo, y que nadie había visto. Fue el primer valor entregado, antes de responder una sola pregunta.</a:t>
             </a:r>
           </a:p>
         </p:txBody>

--- a/docs/NormIA.pptx
+++ b/docs/NormIA.pptx
@@ -12166,8 +12166,8 @@
         </p:blipFill>
         <p:spPr>
           <a:xfrm>
-            <a:off x="3608242" y="1389888"/>
-            <a:ext cx="4975210" cy="4160520"/>
+            <a:off x="3261370" y="1389888"/>
+            <a:ext cx="5668954" cy="4160520"/>
           </a:xfrm>
           <a:prstGeom prst="rect">
             <a:avLst/>
@@ -12540,7 +12540,7 @@
         <p:spPr>
           <a:xfrm>
             <a:off x="566928" y="1728216"/>
-            <a:ext cx="11057839" cy="2347844"/>
+            <a:ext cx="11057839" cy="2438944"/>
           </a:xfrm>
           <a:prstGeom prst="roundRect">
             <a:avLst>
@@ -12596,7 +12596,7 @@
         <p:spPr>
           <a:xfrm>
             <a:off x="795528" y="1929384"/>
-            <a:ext cx="10600639" cy="1689476"/>
+            <a:ext cx="10600639" cy="1780576"/>
           </a:xfrm>
           <a:prstGeom prst="rect">
             <a:avLst/>
@@ -12611,7 +12611,7 @@
         </p:nvSpPr>
         <p:spPr>
           <a:xfrm>
-            <a:off x="822960" y="3728588"/>
+            <a:off x="822960" y="3819688"/>
             <a:ext cx="10545775" cy="310896"/>
           </a:xfrm>
           <a:prstGeom prst="rect">

--- a/docs/NormIA.pptx
+++ b/docs/NormIA.pptx
@@ -17,6 +17,7 @@
     <p:sldId id="265" r:id="rId16"/>
     <p:sldId id="266" r:id="rId17"/>
     <p:sldId id="267" r:id="rId18"/>
+    <p:sldId id="268" r:id="rId19"/>
   </p:sldIdLst>
   <p:sldSz cx="12191695" cy="6858000" type="screen4x3"/>
   <p:notesSz cx="6858000" cy="9144000"/>
@@ -3346,7 +3347,7 @@
                 </a:solidFill>
                 <a:latin typeface="Courier New"/>
               </a:rPr>
-              <a:t>01 / 12</a:t>
+              <a:t>01 / 13</a:t>
             </a:r>
           </a:p>
         </p:txBody>
@@ -4071,7 +4072,7 @@
                 </a:solidFill>
                 <a:latin typeface="Helvetica Neue"/>
               </a:rPr>
-              <a:t>DATOS</a:t>
+              <a:t>HERRAMIENTAS</a:t>
             </a:r>
           </a:p>
         </p:txBody>
@@ -4198,7 +4199,7 @@
                 </a:solidFill>
                 <a:latin typeface="Helvetica Neue"/>
               </a:rPr>
-              <a:t>FUENTE · TIPO · VOLUMEN · LIMPIEZA · VALIDACIÓN</a:t>
+              <a:t>HERRAMIENTAS Y DESPLIEGUE</a:t>
             </a:r>
           </a:p>
         </p:txBody>
@@ -4237,7 +4238,7 @@
                 </a:solidFill>
                 <a:latin typeface="Courier New"/>
               </a:rPr>
-              <a:t>10 / 12</a:t>
+              <a:t>10 / 13</a:t>
             </a:r>
           </a:p>
         </p:txBody>
@@ -4250,7 +4251,7 @@
         </p:nvSpPr>
         <p:spPr>
           <a:xfrm>
-            <a:off x="566928" y="822960"/>
+            <a:off x="566928" y="841248"/>
             <a:ext cx="5486400" cy="219456"/>
           </a:xfrm>
           <a:prstGeom prst="rect">
@@ -4276,7 +4277,7 @@
                 </a:solidFill>
                 <a:latin typeface="Helvetica Neue"/>
               </a:rPr>
-              <a:t>DATOS</a:t>
+              <a:t>CON QUÉ ESTÁ HECHO</a:t>
             </a:r>
           </a:p>
         </p:txBody>
@@ -4289,7 +4290,7 @@
         </p:nvSpPr>
         <p:spPr>
           <a:xfrm>
-            <a:off x="566928" y="1133856"/>
+            <a:off x="566928" y="1152144"/>
             <a:ext cx="10241280" cy="914400"/>
           </a:xfrm>
           <a:prstGeom prst="rect">
@@ -4315,7 +4316,7 @@
                 </a:solidFill>
                 <a:latin typeface="Helvetica Neue"/>
               </a:rPr>
-              <a:t>De 132 PDFs a 1043 cláusulas consultables</a:t>
+              <a:t>Todo local, todo reproducible</a:t>
             </a:r>
           </a:p>
         </p:txBody>
@@ -4328,103 +4329,158 @@
         </p:nvSpPr>
         <p:spPr>
           <a:xfrm>
-            <a:off x="566928" y="1798320"/>
-            <a:ext cx="10607040" cy="731520"/>
-          </a:xfrm>
-          <a:prstGeom prst="rect">
-            <a:avLst/>
-          </a:prstGeom>
-          <a:noFill/>
-        </p:spPr>
-        <p:txBody>
-          <a:bodyPr wrap="square" lIns="0" rIns="0" tIns="0" bIns="0">
-            <a:spAutoFit/>
-          </a:bodyPr>
-          <a:lstStyle/>
-          <a:p>
-            <a:pPr>
-              <a:lnSpc>
-                <a:spcPct val="135000"/>
-              </a:lnSpc>
-            </a:pPr>
-            <a:r>
-              <a:rPr sz="1050" b="1">
-                <a:solidFill>
-                  <a:srgbClr val="15191A"/>
-                </a:solidFill>
-                <a:latin typeface="Helvetica Neue"/>
-              </a:rPr>
-              <a:t>Fuente:</a:t>
-            </a:r>
-            <a:r>
-              <a:rPr sz="1050" b="0">
+            <a:off x="566928" y="1889760"/>
+            <a:ext cx="11057839" cy="201168"/>
+          </a:xfrm>
+          <a:prstGeom prst="rect">
+            <a:avLst/>
+          </a:prstGeom>
+          <a:noFill/>
+        </p:spPr>
+        <p:txBody>
+          <a:bodyPr wrap="square" lIns="0" rIns="0" tIns="0" bIns="0">
+            <a:spAutoFit/>
+          </a:bodyPr>
+          <a:lstStyle/>
+          <a:p/>
+        </p:txBody>
+      </p:sp>
+      <p:sp>
+        <p:nvSpPr>
+          <p:cNvPr id="11" name="TextBox 10"/>
+          <p:cNvSpPr txBox="1"/>
+          <p:nvPr/>
+        </p:nvSpPr>
+        <p:spPr>
+          <a:xfrm>
+            <a:off x="566928" y="1889760"/>
+            <a:ext cx="1691640" cy="201168"/>
+          </a:xfrm>
+          <a:prstGeom prst="rect">
+            <a:avLst/>
+          </a:prstGeom>
+          <a:noFill/>
+        </p:spPr>
+        <p:txBody>
+          <a:bodyPr wrap="square" lIns="0" rIns="0" tIns="0" bIns="0">
+            <a:spAutoFit/>
+          </a:bodyPr>
+          <a:lstStyle/>
+          <a:p>
+            <a:pPr>
+              <a:lnSpc>
+                <a:spcPct val="128000"/>
+              </a:lnSpc>
+            </a:pPr>
+            <a:r>
+              <a:rPr sz="850" b="1" spc="130">
                 <a:solidFill>
                   <a:srgbClr val="5D6663"/>
                 </a:solidFill>
                 <a:latin typeface="Helvetica Neue"/>
               </a:rPr>
-              <a:t> el SGC real de una empresa de servicios, en PDFs controlados.   </a:t>
-            </a:r>
-            <a:r>
-              <a:rPr sz="1050" b="1">
-                <a:solidFill>
-                  <a:srgbClr val="15191A"/>
-                </a:solidFill>
-                <a:latin typeface="Helvetica Neue"/>
-              </a:rPr>
-              <a:t>Tipo:</a:t>
-            </a:r>
-            <a:r>
-              <a:rPr sz="1050" b="0">
+              <a:t>CAPA</a:t>
+            </a:r>
+          </a:p>
+        </p:txBody>
+      </p:sp>
+      <p:sp>
+        <p:nvSpPr>
+          <p:cNvPr id="12" name="TextBox 11"/>
+          <p:cNvSpPr txBox="1"/>
+          <p:nvPr/>
+        </p:nvSpPr>
+        <p:spPr>
+          <a:xfrm>
+            <a:off x="2258568" y="1889760"/>
+            <a:ext cx="3154680" cy="201168"/>
+          </a:xfrm>
+          <a:prstGeom prst="rect">
+            <a:avLst/>
+          </a:prstGeom>
+          <a:noFill/>
+        </p:spPr>
+        <p:txBody>
+          <a:bodyPr wrap="square" lIns="0" rIns="0" tIns="0" bIns="0">
+            <a:spAutoFit/>
+          </a:bodyPr>
+          <a:lstStyle/>
+          <a:p>
+            <a:pPr>
+              <a:lnSpc>
+                <a:spcPct val="128000"/>
+              </a:lnSpc>
+            </a:pPr>
+            <a:r>
+              <a:rPr sz="850" b="1" spc="130">
                 <a:solidFill>
                   <a:srgbClr val="5D6663"/>
                 </a:solidFill>
                 <a:latin typeface="Helvetica Neue"/>
               </a:rPr>
-              <a:t> manuales, políticas, procedimientos, instructivos y formatos, en 11 áreas.   </a:t>
-            </a:r>
-            <a:r>
-              <a:rPr sz="1050" b="1">
-                <a:solidFill>
-                  <a:srgbClr val="15191A"/>
-                </a:solidFill>
-                <a:latin typeface="Helvetica Neue"/>
-              </a:rPr>
-              <a:t>Volumen:</a:t>
-            </a:r>
-            <a:r>
-              <a:rPr sz="1050" b="0">
+              <a:t>ELECCIÓN</a:t>
+            </a:r>
+          </a:p>
+        </p:txBody>
+      </p:sp>
+      <p:sp>
+        <p:nvSpPr>
+          <p:cNvPr id="13" name="TextBox 12"/>
+          <p:cNvSpPr txBox="1"/>
+          <p:nvPr/>
+        </p:nvSpPr>
+        <p:spPr>
+          <a:xfrm>
+            <a:off x="5413248" y="1889760"/>
+            <a:ext cx="6217920" cy="201168"/>
+          </a:xfrm>
+          <a:prstGeom prst="rect">
+            <a:avLst/>
+          </a:prstGeom>
+          <a:noFill/>
+        </p:spPr>
+        <p:txBody>
+          <a:bodyPr wrap="square" lIns="0" rIns="0" tIns="0" bIns="0">
+            <a:spAutoFit/>
+          </a:bodyPr>
+          <a:lstStyle/>
+          <a:p>
+            <a:pPr>
+              <a:lnSpc>
+                <a:spcPct val="128000"/>
+              </a:lnSpc>
+            </a:pPr>
+            <a:r>
+              <a:rPr sz="850" b="1" spc="130">
                 <a:solidFill>
                   <a:srgbClr val="5D6663"/>
                 </a:solidFill>
                 <a:latin typeface="Helvetica Neue"/>
               </a:rPr>
-              <a:t> 132 documentos → 1043 cláusulas → 730 entradas de FAQ.</a:t>
-            </a:r>
-          </a:p>
-        </p:txBody>
-      </p:sp>
-      <p:sp>
-        <p:nvSpPr>
-          <p:cNvPr id="11" name="Rounded Rectangle 10"/>
+              <a:t>POR QUÉ ESA</a:t>
+            </a:r>
+          </a:p>
+        </p:txBody>
+      </p:sp>
+      <p:sp>
+        <p:nvSpPr>
+          <p:cNvPr id="14" name="Rectangle 13"/>
           <p:cNvSpPr/>
           <p:nvPr/>
         </p:nvSpPr>
         <p:spPr>
           <a:xfrm>
-            <a:off x="566928" y="2549271"/>
-            <a:ext cx="960120" cy="256032"/>
-          </a:xfrm>
-          <a:prstGeom prst="roundRect">
+            <a:off x="566928" y="2127504"/>
+            <a:ext cx="11057839" cy="16510"/>
+          </a:xfrm>
+          <a:prstGeom prst="rect">
             <a:avLst/>
           </a:prstGeom>
           <a:solidFill>
-            <a:srgbClr val="E3EEE8"/>
+            <a:srgbClr val="B6BFB8"/>
           </a:solidFill>
-          <a:ln w="9525">
-            <a:solidFill>
-              <a:srgbClr val="1D5C3C"/>
-            </a:solidFill>
+          <a:ln>
+            <a:noFill/>
           </a:ln>
           <a:effectLst/>
         </p:spPr>
@@ -4443,70 +4499,126 @@
           </a:fontRef>
         </p:style>
         <p:txBody>
-          <a:bodyPr rtlCol="0" anchor="ctr" lIns="0" rIns="0"/>
-          <a:lstStyle/>
-          <a:p>
-            <a:pPr algn="ctr">
-              <a:lnSpc>
-                <a:spcPct val="128000"/>
-              </a:lnSpc>
-            </a:pPr>
-            <a:r>
-              <a:rPr sz="900" b="1" spc="130">
-                <a:solidFill>
-                  <a:srgbClr val="1D5C3C"/>
-                </a:solidFill>
-                <a:latin typeface="Helvetica Neue"/>
-              </a:rPr>
-              <a:t>LIMPIEZA</a:t>
-            </a:r>
-          </a:p>
-        </p:txBody>
-      </p:sp>
-      <p:sp>
-        <p:nvSpPr>
-          <p:cNvPr id="12" name="TextBox 11"/>
-          <p:cNvSpPr txBox="1"/>
-          <p:nvPr/>
-        </p:nvSpPr>
-        <p:spPr>
-          <a:xfrm>
-            <a:off x="749808" y="2951607"/>
-            <a:ext cx="5080863" cy="457200"/>
-          </a:xfrm>
-          <a:prstGeom prst="rect">
-            <a:avLst/>
-          </a:prstGeom>
-          <a:noFill/>
-        </p:spPr>
-        <p:txBody>
-          <a:bodyPr wrap="square" lIns="0" rIns="0" tIns="0" bIns="0">
-            <a:spAutoFit/>
-          </a:bodyPr>
-          <a:lstStyle/>
-          <a:p>
-            <a:pPr>
-              <a:lnSpc>
-                <a:spcPct val="130000"/>
+          <a:bodyPr rtlCol="0" anchor="ctr"/>
+          <a:lstStyle/>
+          <a:p>
+            <a:pPr algn="ctr"/>
+          </a:p>
+        </p:txBody>
+      </p:sp>
+      <p:sp>
+        <p:nvSpPr>
+          <p:cNvPr id="15" name="TextBox 14"/>
+          <p:cNvSpPr txBox="1"/>
+          <p:nvPr/>
+        </p:nvSpPr>
+        <p:spPr>
+          <a:xfrm>
+            <a:off x="566928" y="2273808"/>
+            <a:ext cx="1527048" cy="457200"/>
+          </a:xfrm>
+          <a:prstGeom prst="rect">
+            <a:avLst/>
+          </a:prstGeom>
+          <a:noFill/>
+        </p:spPr>
+        <p:txBody>
+          <a:bodyPr wrap="square" lIns="0" rIns="0" tIns="0" bIns="0">
+            <a:spAutoFit/>
+          </a:bodyPr>
+          <a:lstStyle/>
+          <a:p>
+            <a:pPr>
+              <a:lnSpc>
+                <a:spcPct val="124000"/>
+              </a:lnSpc>
+            </a:pPr>
+            <a:r>
+              <a:rPr sz="1050" b="0">
+                <a:solidFill>
+                  <a:srgbClr val="15191A"/>
+                </a:solidFill>
+                <a:latin typeface="Helvetica Neue"/>
+              </a:rPr>
+              <a:t>Framework de IA</a:t>
+            </a:r>
+          </a:p>
+        </p:txBody>
+      </p:sp>
+      <p:sp>
+        <p:nvSpPr>
+          <p:cNvPr id="16" name="TextBox 15"/>
+          <p:cNvSpPr txBox="1"/>
+          <p:nvPr/>
+        </p:nvSpPr>
+        <p:spPr>
+          <a:xfrm>
+            <a:off x="2258568" y="2273808"/>
+            <a:ext cx="2990088" cy="457200"/>
+          </a:xfrm>
+          <a:prstGeom prst="rect">
+            <a:avLst/>
+          </a:prstGeom>
+          <a:noFill/>
+        </p:spPr>
+        <p:txBody>
+          <a:bodyPr wrap="square" lIns="0" rIns="0" tIns="0" bIns="0">
+            <a:spAutoFit/>
+          </a:bodyPr>
+          <a:lstStyle/>
+          <a:p>
+            <a:pPr>
+              <a:lnSpc>
+                <a:spcPct val="124000"/>
+              </a:lnSpc>
+            </a:pPr>
+            <a:r>
+              <a:rPr sz="1050" b="0">
+                <a:solidFill>
+                  <a:srgbClr val="15191A"/>
+                </a:solidFill>
+                <a:latin typeface="Helvetica Neue"/>
+              </a:rPr>
+              <a:t>RAG propio · FastAPI · Python 3.12</a:t>
+            </a:r>
+          </a:p>
+        </p:txBody>
+      </p:sp>
+      <p:sp>
+        <p:nvSpPr>
+          <p:cNvPr id="17" name="TextBox 16"/>
+          <p:cNvSpPr txBox="1"/>
+          <p:nvPr/>
+        </p:nvSpPr>
+        <p:spPr>
+          <a:xfrm>
+            <a:off x="5413248" y="2273808"/>
+            <a:ext cx="6053328" cy="457200"/>
+          </a:xfrm>
+          <a:prstGeom prst="rect">
+            <a:avLst/>
+          </a:prstGeom>
+          <a:noFill/>
+        </p:spPr>
+        <p:txBody>
+          <a:bodyPr wrap="square" lIns="0" rIns="0" tIns="0" bIns="0">
+            <a:spAutoFit/>
+          </a:bodyPr>
+          <a:lstStyle/>
+          <a:p>
+            <a:pPr>
+              <a:lnSpc>
+                <a:spcPct val="124000"/>
               </a:lnSpc>
             </a:pPr>
             <a:r>
               <a:rPr sz="1050" b="1">
                 <a:solidFill>
-                  <a:srgbClr val="1D5C3C"/>
-                </a:solidFill>
-                <a:latin typeface="Helvetica Neue"/>
-              </a:rPr>
-              <a:t>— </a:t>
-            </a:r>
-            <a:r>
-              <a:rPr sz="1050" b="1">
-                <a:solidFill>
                   <a:srgbClr val="15191A"/>
                 </a:solidFill>
                 <a:latin typeface="Helvetica Neue"/>
               </a:rPr>
-              <a:t>Troceado por cláusula</a:t>
+              <a:t>Sin LangChain ni LlamaIndex.</a:t>
             </a:r>
             <a:r>
               <a:rPr sz="1050" b="0">
@@ -4515,230 +4627,30 @@
                 </a:solidFill>
                 <a:latin typeface="Helvetica Neue"/>
               </a:rPr>
-              <a:t>, no por tamaño fijo: la unidad de sentido es la cláusula.</a:t>
-            </a:r>
-          </a:p>
-        </p:txBody>
-      </p:sp>
-      <p:sp>
-        <p:nvSpPr>
-          <p:cNvPr id="13" name="TextBox 12"/>
-          <p:cNvSpPr txBox="1"/>
-          <p:nvPr/>
-        </p:nvSpPr>
-        <p:spPr>
-          <a:xfrm>
-            <a:off x="749808" y="3399663"/>
-            <a:ext cx="5080863" cy="457200"/>
-          </a:xfrm>
-          <a:prstGeom prst="rect">
-            <a:avLst/>
-          </a:prstGeom>
-          <a:noFill/>
-        </p:spPr>
-        <p:txBody>
-          <a:bodyPr wrap="square" lIns="0" rIns="0" tIns="0" bIns="0">
-            <a:spAutoFit/>
-          </a:bodyPr>
-          <a:lstStyle/>
-          <a:p>
-            <a:pPr>
-              <a:lnSpc>
-                <a:spcPct val="130000"/>
-              </a:lnSpc>
-            </a:pPr>
-            <a:r>
-              <a:rPr sz="1050" b="1">
-                <a:solidFill>
-                  <a:srgbClr val="1D5C3C"/>
-                </a:solidFill>
-                <a:latin typeface="Helvetica Neue"/>
-              </a:rPr>
-              <a:t>— </a:t>
-            </a:r>
-            <a:r>
-              <a:rPr sz="1050" b="0">
-                <a:solidFill>
-                  <a:srgbClr val="15191A"/>
-                </a:solidFill>
-                <a:latin typeface="Helvetica Neue"/>
-              </a:rPr>
-              <a:t>Las tablas se leen respetando qué valor va con qué columna. Sin eso daba el «tiempo de solución» por el «de respuesta».</a:t>
-            </a:r>
-          </a:p>
-        </p:txBody>
-      </p:sp>
-      <p:sp>
-        <p:nvSpPr>
-          <p:cNvPr id="14" name="TextBox 13"/>
-          <p:cNvSpPr txBox="1"/>
-          <p:nvPr/>
-        </p:nvSpPr>
-        <p:spPr>
-          <a:xfrm>
-            <a:off x="749808" y="3847719"/>
-            <a:ext cx="5080863" cy="457200"/>
-          </a:xfrm>
-          <a:prstGeom prst="rect">
-            <a:avLst/>
-          </a:prstGeom>
-          <a:noFill/>
-        </p:spPr>
-        <p:txBody>
-          <a:bodyPr wrap="square" lIns="0" rIns="0" tIns="0" bIns="0">
-            <a:spAutoFit/>
-          </a:bodyPr>
-          <a:lstStyle/>
-          <a:p>
-            <a:pPr>
-              <a:lnSpc>
-                <a:spcPct val="130000"/>
-              </a:lnSpc>
-            </a:pPr>
-            <a:r>
-              <a:rPr sz="1050" b="1">
-                <a:solidFill>
-                  <a:srgbClr val="1D5C3C"/>
-                </a:solidFill>
-                <a:latin typeface="Helvetica Neue"/>
-              </a:rPr>
-              <a:t>— </a:t>
-            </a:r>
-            <a:r>
-              <a:rPr sz="1050" b="0">
-                <a:solidFill>
-                  <a:srgbClr val="15191A"/>
-                </a:solidFill>
-                <a:latin typeface="Helvetica Neue"/>
-              </a:rPr>
-              <a:t>Reparación de saltos del PDF: </a:t>
-            </a:r>
-            <a:r>
-              <a:rPr sz="1050" b="0">
-                <a:solidFill>
-                  <a:srgbClr val="15191A"/>
-                </a:solidFill>
-                <a:latin typeface="Courier New"/>
-              </a:rPr>
-              <a:t>CAL-FO- 09</a:t>
-            </a:r>
-            <a:r>
-              <a:rPr sz="1050" b="0">
-                <a:solidFill>
-                  <a:srgbClr val="15191A"/>
-                </a:solidFill>
-                <a:latin typeface="Helvetica Neue"/>
-              </a:rPr>
-              <a:t> → </a:t>
-            </a:r>
-            <a:r>
-              <a:rPr sz="1050" b="0">
-                <a:solidFill>
-                  <a:srgbClr val="15191A"/>
-                </a:solidFill>
-                <a:latin typeface="Courier New"/>
-              </a:rPr>
-              <a:t>CAL-FO-09</a:t>
-            </a:r>
-            <a:r>
-              <a:rPr sz="1050" b="0">
-                <a:solidFill>
-                  <a:srgbClr val="15191A"/>
-                </a:solidFill>
-                <a:latin typeface="Helvetica Neue"/>
-              </a:rPr>
-              <a:t>.</a:t>
-            </a:r>
-          </a:p>
-        </p:txBody>
-      </p:sp>
-      <p:sp>
-        <p:nvSpPr>
-          <p:cNvPr id="15" name="TextBox 14"/>
-          <p:cNvSpPr txBox="1"/>
-          <p:nvPr/>
-        </p:nvSpPr>
-        <p:spPr>
-          <a:xfrm>
-            <a:off x="749808" y="4122039"/>
-            <a:ext cx="5080863" cy="457200"/>
-          </a:xfrm>
-          <a:prstGeom prst="rect">
-            <a:avLst/>
-          </a:prstGeom>
-          <a:noFill/>
-        </p:spPr>
-        <p:txBody>
-          <a:bodyPr wrap="square" lIns="0" rIns="0" tIns="0" bIns="0">
-            <a:spAutoFit/>
-          </a:bodyPr>
-          <a:lstStyle/>
-          <a:p>
-            <a:pPr>
-              <a:lnSpc>
-                <a:spcPct val="130000"/>
-              </a:lnSpc>
-            </a:pPr>
-            <a:r>
-              <a:rPr sz="1050" b="1">
-                <a:solidFill>
-                  <a:srgbClr val="1D5C3C"/>
-                </a:solidFill>
-                <a:latin typeface="Helvetica Neue"/>
-              </a:rPr>
-              <a:t>— </a:t>
-            </a:r>
-            <a:r>
-              <a:rPr sz="1050" b="0">
-                <a:solidFill>
-                  <a:srgbClr val="15191A"/>
-                </a:solidFill>
-                <a:latin typeface="Helvetica Neue"/>
-              </a:rPr>
-              <a:t>Aviso cuando una cláusula </a:t>
-            </a:r>
-            <a:r>
-              <a:rPr sz="1050" b="1">
-                <a:solidFill>
-                  <a:srgbClr val="15191A"/>
-                </a:solidFill>
-                <a:latin typeface="Helvetica Neue"/>
-              </a:rPr>
-              <a:t>anuncia sin entregar</a:t>
-            </a:r>
-            <a:r>
-              <a:rPr sz="1050" b="0">
-                <a:solidFill>
-                  <a:srgbClr val="15191A"/>
-                </a:solidFill>
-                <a:latin typeface="Helvetica Neue"/>
-              </a:rPr>
-              <a:t>: el contenido está en una imagen.</a:t>
-            </a:r>
-          </a:p>
-        </p:txBody>
-      </p:sp>
-      <p:sp>
-        <p:nvSpPr>
-          <p:cNvPr id="16" name="Rounded Rectangle 15"/>
+              <a:t> Cada paso —troceado, umbral, guardrails— es código legible y comprobable; un framework habría escondido justo la parte que aporta el valor. 29 módulos, 177 tests.</a:t>
+            </a:r>
+          </a:p>
+        </p:txBody>
+      </p:sp>
+      <p:sp>
+        <p:nvSpPr>
+          <p:cNvPr id="18" name="Rectangle 17"/>
           <p:cNvSpPr/>
           <p:nvPr/>
         </p:nvSpPr>
         <p:spPr>
           <a:xfrm>
-            <a:off x="6287871" y="2549271"/>
-            <a:ext cx="960120" cy="256032"/>
-          </a:xfrm>
-          <a:prstGeom prst="roundRect">
+            <a:off x="566928" y="2676144"/>
+            <a:ext cx="11057839" cy="8890"/>
+          </a:xfrm>
+          <a:prstGeom prst="rect">
             <a:avLst/>
           </a:prstGeom>
           <a:solidFill>
-            <a:srgbClr val="E3EEE8"/>
+            <a:srgbClr val="C5CDC7"/>
           </a:solidFill>
-          <a:ln w="9525">
-            <a:solidFill>
-              <a:srgbClr val="1D5C3C"/>
-            </a:solidFill>
+          <a:ln>
+            <a:noFill/>
           </a:ln>
           <a:effectLst/>
         </p:spPr>
@@ -4757,62 +4669,40 @@
           </a:fontRef>
         </p:style>
         <p:txBody>
-          <a:bodyPr rtlCol="0" anchor="ctr" lIns="0" rIns="0"/>
-          <a:lstStyle/>
-          <a:p>
-            <a:pPr algn="ctr">
-              <a:lnSpc>
-                <a:spcPct val="128000"/>
-              </a:lnSpc>
-            </a:pPr>
-            <a:r>
-              <a:rPr sz="900" b="1" spc="130">
-                <a:solidFill>
-                  <a:srgbClr val="1D5C3C"/>
-                </a:solidFill>
-                <a:latin typeface="Helvetica Neue"/>
-              </a:rPr>
-              <a:t>VALIDACIÓN</a:t>
-            </a:r>
-          </a:p>
-        </p:txBody>
-      </p:sp>
-      <p:sp>
-        <p:nvSpPr>
-          <p:cNvPr id="17" name="TextBox 16"/>
-          <p:cNvSpPr txBox="1"/>
-          <p:nvPr/>
-        </p:nvSpPr>
-        <p:spPr>
-          <a:xfrm>
-            <a:off x="6470751" y="2951607"/>
-            <a:ext cx="5080863" cy="457200"/>
-          </a:xfrm>
-          <a:prstGeom prst="rect">
-            <a:avLst/>
-          </a:prstGeom>
-          <a:noFill/>
-        </p:spPr>
-        <p:txBody>
-          <a:bodyPr wrap="square" lIns="0" rIns="0" tIns="0" bIns="0">
-            <a:spAutoFit/>
-          </a:bodyPr>
-          <a:lstStyle/>
-          <a:p>
-            <a:pPr>
-              <a:lnSpc>
-                <a:spcPct val="130000"/>
-              </a:lnSpc>
-            </a:pPr>
-            <a:r>
-              <a:rPr sz="1050" b="1">
-                <a:solidFill>
-                  <a:srgbClr val="1D5C3C"/>
-                </a:solidFill>
-                <a:latin typeface="Helvetica Neue"/>
-              </a:rPr>
-              <a:t>— </a:t>
-            </a:r>
+          <a:bodyPr rtlCol="0" anchor="ctr"/>
+          <a:lstStyle/>
+          <a:p>
+            <a:pPr algn="ctr"/>
+          </a:p>
+        </p:txBody>
+      </p:sp>
+      <p:sp>
+        <p:nvSpPr>
+          <p:cNvPr id="19" name="TextBox 18"/>
+          <p:cNvSpPr txBox="1"/>
+          <p:nvPr/>
+        </p:nvSpPr>
+        <p:spPr>
+          <a:xfrm>
+            <a:off x="566928" y="2804160"/>
+            <a:ext cx="1527048" cy="457200"/>
+          </a:xfrm>
+          <a:prstGeom prst="rect">
+            <a:avLst/>
+          </a:prstGeom>
+          <a:noFill/>
+        </p:spPr>
+        <p:txBody>
+          <a:bodyPr wrap="square" lIns="0" rIns="0" tIns="0" bIns="0">
+            <a:spAutoFit/>
+          </a:bodyPr>
+          <a:lstStyle/>
+          <a:p>
+            <a:pPr>
+              <a:lnSpc>
+                <a:spcPct val="124000"/>
+              </a:lnSpc>
+            </a:pPr>
             <a:r>
               <a:rPr sz="1050" b="0">
                 <a:solidFill>
@@ -4820,16 +4710,46 @@
                 </a:solidFill>
                 <a:latin typeface="Helvetica Neue"/>
               </a:rPr>
-              <a:t>Cada PDF contrastado contra la </a:t>
-            </a:r>
-            <a:r>
-              <a:rPr sz="1050" b="1">
+              <a:t>Modelo</a:t>
+            </a:r>
+          </a:p>
+        </p:txBody>
+      </p:sp>
+      <p:sp>
+        <p:nvSpPr>
+          <p:cNvPr id="20" name="TextBox 19"/>
+          <p:cNvSpPr txBox="1"/>
+          <p:nvPr/>
+        </p:nvSpPr>
+        <p:spPr>
+          <a:xfrm>
+            <a:off x="2258568" y="2804160"/>
+            <a:ext cx="2990088" cy="457200"/>
+          </a:xfrm>
+          <a:prstGeom prst="rect">
+            <a:avLst/>
+          </a:prstGeom>
+          <a:noFill/>
+        </p:spPr>
+        <p:txBody>
+          <a:bodyPr wrap="square" lIns="0" rIns="0" tIns="0" bIns="0">
+            <a:spAutoFit/>
+          </a:bodyPr>
+          <a:lstStyle/>
+          <a:p>
+            <a:pPr>
+              <a:lnSpc>
+                <a:spcPct val="124000"/>
+              </a:lnSpc>
+            </a:pPr>
+            <a:r>
+              <a:rPr sz="950" b="0">
                 <a:solidFill>
                   <a:srgbClr val="15191A"/>
                 </a:solidFill>
-                <a:latin typeface="Helvetica Neue"/>
-              </a:rPr>
-              <a:t>Lista Maestra</a:t>
+                <a:latin typeface="Courier New"/>
+              </a:rPr>
+              <a:t>qwen3.8:27b-mlx</a:t>
             </a:r>
             <a:r>
               <a:rPr sz="1050" b="0">
@@ -4838,47 +4758,38 @@
                 </a:solidFill>
                 <a:latin typeface="Helvetica Neue"/>
               </a:rPr>
-              <a:t>: de ahí salieron los seis hallazgos.</a:t>
-            </a:r>
-          </a:p>
-        </p:txBody>
-      </p:sp>
-      <p:sp>
-        <p:nvSpPr>
-          <p:cNvPr id="18" name="TextBox 17"/>
-          <p:cNvSpPr txBox="1"/>
-          <p:nvPr/>
-        </p:nvSpPr>
-        <p:spPr>
-          <a:xfrm>
-            <a:off x="6470751" y="3399663"/>
-            <a:ext cx="5080863" cy="457200"/>
-          </a:xfrm>
-          <a:prstGeom prst="rect">
-            <a:avLst/>
-          </a:prstGeom>
-          <a:noFill/>
-        </p:spPr>
-        <p:txBody>
-          <a:bodyPr wrap="square" lIns="0" rIns="0" tIns="0" bIns="0">
-            <a:spAutoFit/>
-          </a:bodyPr>
-          <a:lstStyle/>
-          <a:p>
-            <a:pPr>
-              <a:lnSpc>
-                <a:spcPct val="130000"/>
-              </a:lnSpc>
-            </a:pPr>
-            <a:r>
-              <a:rPr sz="1050" b="1">
-                <a:solidFill>
-                  <a:srgbClr val="1D5C3C"/>
-                </a:solidFill>
-                <a:latin typeface="Helvetica Neue"/>
-              </a:rPr>
-              <a:t>— </a:t>
-            </a:r>
+              <a:t> vía Ollama</a:t>
+            </a:r>
+          </a:p>
+        </p:txBody>
+      </p:sp>
+      <p:sp>
+        <p:nvSpPr>
+          <p:cNvPr id="21" name="TextBox 20"/>
+          <p:cNvSpPr txBox="1"/>
+          <p:nvPr/>
+        </p:nvSpPr>
+        <p:spPr>
+          <a:xfrm>
+            <a:off x="5413248" y="2804160"/>
+            <a:ext cx="6053328" cy="457200"/>
+          </a:xfrm>
+          <a:prstGeom prst="rect">
+            <a:avLst/>
+          </a:prstGeom>
+          <a:noFill/>
+        </p:spPr>
+        <p:txBody>
+          <a:bodyPr wrap="square" lIns="0" rIns="0" tIns="0" bIns="0">
+            <a:spAutoFit/>
+          </a:bodyPr>
+          <a:lstStyle/>
+          <a:p>
+            <a:pPr>
+              <a:lnSpc>
+                <a:spcPct val="124000"/>
+              </a:lnSpc>
+            </a:pPr>
             <a:r>
               <a:rPr sz="1050" b="0">
                 <a:solidFill>
@@ -4886,17 +4797,160 @@
                 </a:solidFill>
                 <a:latin typeface="Helvetica Neue"/>
               </a:rPr>
-              <a:t>FAQ desde las cláusulas: 489 procesadas → </a:t>
-            </a:r>
-            <a:r>
-              <a:rPr sz="1050" b="1">
+              <a:t>Elegido por medición: acertó cláusula, sección, herramienta y escalación en el banco de pruebas.</a:t>
+            </a:r>
+          </a:p>
+        </p:txBody>
+      </p:sp>
+      <p:sp>
+        <p:nvSpPr>
+          <p:cNvPr id="22" name="Rectangle 21"/>
+          <p:cNvSpPr/>
+          <p:nvPr/>
+        </p:nvSpPr>
+        <p:spPr>
+          <a:xfrm>
+            <a:off x="566928" y="3206496"/>
+            <a:ext cx="11057839" cy="8890"/>
+          </a:xfrm>
+          <a:prstGeom prst="rect">
+            <a:avLst/>
+          </a:prstGeom>
+          <a:solidFill>
+            <a:srgbClr val="C5CDC7"/>
+          </a:solidFill>
+          <a:ln>
+            <a:noFill/>
+          </a:ln>
+          <a:effectLst/>
+        </p:spPr>
+        <p:style>
+          <a:lnRef idx="1">
+            <a:schemeClr val="accent1"/>
+          </a:lnRef>
+          <a:fillRef idx="3">
+            <a:schemeClr val="accent1"/>
+          </a:fillRef>
+          <a:effectRef idx="2">
+            <a:schemeClr val="accent1"/>
+          </a:effectRef>
+          <a:fontRef idx="minor">
+            <a:schemeClr val="lt1"/>
+          </a:fontRef>
+        </p:style>
+        <p:txBody>
+          <a:bodyPr rtlCol="0" anchor="ctr"/>
+          <a:lstStyle/>
+          <a:p>
+            <a:pPr algn="ctr"/>
+          </a:p>
+        </p:txBody>
+      </p:sp>
+      <p:sp>
+        <p:nvSpPr>
+          <p:cNvPr id="23" name="TextBox 22"/>
+          <p:cNvSpPr txBox="1"/>
+          <p:nvPr/>
+        </p:nvSpPr>
+        <p:spPr>
+          <a:xfrm>
+            <a:off x="566928" y="3334512"/>
+            <a:ext cx="1527048" cy="457200"/>
+          </a:xfrm>
+          <a:prstGeom prst="rect">
+            <a:avLst/>
+          </a:prstGeom>
+          <a:noFill/>
+        </p:spPr>
+        <p:txBody>
+          <a:bodyPr wrap="square" lIns="0" rIns="0" tIns="0" bIns="0">
+            <a:spAutoFit/>
+          </a:bodyPr>
+          <a:lstStyle/>
+          <a:p>
+            <a:pPr>
+              <a:lnSpc>
+                <a:spcPct val="124000"/>
+              </a:lnSpc>
+            </a:pPr>
+            <a:r>
+              <a:rPr sz="1050" b="0">
                 <a:solidFill>
                   <a:srgbClr val="15191A"/>
                 </a:solidFill>
                 <a:latin typeface="Helvetica Neue"/>
               </a:rPr>
-              <a:t>730 entradas</a:t>
-            </a:r>
+              <a:t>Comprensión del texto</a:t>
+            </a:r>
+          </a:p>
+        </p:txBody>
+      </p:sp>
+      <p:sp>
+        <p:nvSpPr>
+          <p:cNvPr id="24" name="TextBox 23"/>
+          <p:cNvSpPr txBox="1"/>
+          <p:nvPr/>
+        </p:nvSpPr>
+        <p:spPr>
+          <a:xfrm>
+            <a:off x="2258568" y="3334512"/>
+            <a:ext cx="2990088" cy="457200"/>
+          </a:xfrm>
+          <a:prstGeom prst="rect">
+            <a:avLst/>
+          </a:prstGeom>
+          <a:noFill/>
+        </p:spPr>
+        <p:txBody>
+          <a:bodyPr wrap="square" lIns="0" rIns="0" tIns="0" bIns="0">
+            <a:spAutoFit/>
+          </a:bodyPr>
+          <a:lstStyle/>
+          <a:p>
+            <a:pPr>
+              <a:lnSpc>
+                <a:spcPct val="124000"/>
+              </a:lnSpc>
+            </a:pPr>
+            <a:r>
+              <a:rPr sz="950" b="0">
+                <a:solidFill>
+                  <a:srgbClr val="15191A"/>
+                </a:solidFill>
+                <a:latin typeface="Courier New"/>
+              </a:rPr>
+              <a:t>BAAI/bge-m3</a:t>
+            </a:r>
+          </a:p>
+        </p:txBody>
+      </p:sp>
+      <p:sp>
+        <p:nvSpPr>
+          <p:cNvPr id="25" name="TextBox 24"/>
+          <p:cNvSpPr txBox="1"/>
+          <p:nvPr/>
+        </p:nvSpPr>
+        <p:spPr>
+          <a:xfrm>
+            <a:off x="5413248" y="3334512"/>
+            <a:ext cx="6053328" cy="457200"/>
+          </a:xfrm>
+          <a:prstGeom prst="rect">
+            <a:avLst/>
+          </a:prstGeom>
+          <a:noFill/>
+        </p:spPr>
+        <p:txBody>
+          <a:bodyPr wrap="square" lIns="0" rIns="0" tIns="0" bIns="0">
+            <a:spAutoFit/>
+          </a:bodyPr>
+          <a:lstStyle/>
+          <a:p>
+            <a:pPr>
+              <a:lnSpc>
+                <a:spcPct val="124000"/>
+              </a:lnSpc>
+            </a:pPr>
             <a:r>
               <a:rPr sz="1050" b="0">
                 <a:solidFill>
@@ -4904,47 +4958,82 @@
                 </a:solidFill>
                 <a:latin typeface="Helvetica Neue"/>
               </a:rPr>
-              <a:t>, 14 descartadas y 9 duplicadas.</a:t>
-            </a:r>
-          </a:p>
-        </p:txBody>
-      </p:sp>
-      <p:sp>
-        <p:nvSpPr>
-          <p:cNvPr id="19" name="TextBox 18"/>
-          <p:cNvSpPr txBox="1"/>
-          <p:nvPr/>
-        </p:nvSpPr>
-        <p:spPr>
-          <a:xfrm>
-            <a:off x="6470751" y="3847719"/>
-            <a:ext cx="5080863" cy="457200"/>
-          </a:xfrm>
-          <a:prstGeom prst="rect">
-            <a:avLst/>
-          </a:prstGeom>
-          <a:noFill/>
-        </p:spPr>
-        <p:txBody>
-          <a:bodyPr wrap="square" lIns="0" rIns="0" tIns="0" bIns="0">
-            <a:spAutoFit/>
-          </a:bodyPr>
-          <a:lstStyle/>
-          <a:p>
-            <a:pPr>
-              <a:lnSpc>
-                <a:spcPct val="130000"/>
-              </a:lnSpc>
-            </a:pPr>
-            <a:r>
-              <a:rPr sz="1050" b="1">
-                <a:solidFill>
-                  <a:srgbClr val="1D5C3C"/>
-                </a:solidFill>
-                <a:latin typeface="Helvetica Neue"/>
-              </a:rPr>
-              <a:t>— </a:t>
-            </a:r>
+              <a:t>Convierte cada cláusula en una huella numérica de su significado: es lo que permite buscar por sentido y no por palabras exactas.</a:t>
+            </a:r>
+          </a:p>
+        </p:txBody>
+      </p:sp>
+      <p:sp>
+        <p:nvSpPr>
+          <p:cNvPr id="26" name="Rectangle 25"/>
+          <p:cNvSpPr/>
+          <p:nvPr/>
+        </p:nvSpPr>
+        <p:spPr>
+          <a:xfrm>
+            <a:off x="566928" y="3736848"/>
+            <a:ext cx="11057839" cy="8890"/>
+          </a:xfrm>
+          <a:prstGeom prst="rect">
+            <a:avLst/>
+          </a:prstGeom>
+          <a:solidFill>
+            <a:srgbClr val="C5CDC7"/>
+          </a:solidFill>
+          <a:ln>
+            <a:noFill/>
+          </a:ln>
+          <a:effectLst/>
+        </p:spPr>
+        <p:style>
+          <a:lnRef idx="1">
+            <a:schemeClr val="accent1"/>
+          </a:lnRef>
+          <a:fillRef idx="3">
+            <a:schemeClr val="accent1"/>
+          </a:fillRef>
+          <a:effectRef idx="2">
+            <a:schemeClr val="accent1"/>
+          </a:effectRef>
+          <a:fontRef idx="minor">
+            <a:schemeClr val="lt1"/>
+          </a:fontRef>
+        </p:style>
+        <p:txBody>
+          <a:bodyPr rtlCol="0" anchor="ctr"/>
+          <a:lstStyle/>
+          <a:p>
+            <a:pPr algn="ctr"/>
+          </a:p>
+        </p:txBody>
+      </p:sp>
+      <p:sp>
+        <p:nvSpPr>
+          <p:cNvPr id="27" name="TextBox 26"/>
+          <p:cNvSpPr txBox="1"/>
+          <p:nvPr/>
+        </p:nvSpPr>
+        <p:spPr>
+          <a:xfrm>
+            <a:off x="566928" y="3864864"/>
+            <a:ext cx="1527048" cy="457200"/>
+          </a:xfrm>
+          <a:prstGeom prst="rect">
+            <a:avLst/>
+          </a:prstGeom>
+          <a:noFill/>
+        </p:spPr>
+        <p:txBody>
+          <a:bodyPr wrap="square" lIns="0" rIns="0" tIns="0" bIns="0">
+            <a:spAutoFit/>
+          </a:bodyPr>
+          <a:lstStyle/>
+          <a:p>
+            <a:pPr>
+              <a:lnSpc>
+                <a:spcPct val="124000"/>
+              </a:lnSpc>
+            </a:pPr>
             <a:r>
               <a:rPr sz="1050" b="0">
                 <a:solidFill>
@@ -4952,17 +5041,77 @@
                 </a:solidFill>
                 <a:latin typeface="Helvetica Neue"/>
               </a:rPr>
-              <a:t>La revisión es con </a:t>
-            </a:r>
-            <a:r>
-              <a:rPr sz="1050" b="1">
+              <a:t>Base de datos</a:t>
+            </a:r>
+          </a:p>
+        </p:txBody>
+      </p:sp>
+      <p:sp>
+        <p:nvSpPr>
+          <p:cNvPr id="28" name="TextBox 27"/>
+          <p:cNvSpPr txBox="1"/>
+          <p:nvPr/>
+        </p:nvSpPr>
+        <p:spPr>
+          <a:xfrm>
+            <a:off x="2258568" y="3864864"/>
+            <a:ext cx="2990088" cy="457200"/>
+          </a:xfrm>
+          <a:prstGeom prst="rect">
+            <a:avLst/>
+          </a:prstGeom>
+          <a:noFill/>
+        </p:spPr>
+        <p:txBody>
+          <a:bodyPr wrap="square" lIns="0" rIns="0" tIns="0" bIns="0">
+            <a:spAutoFit/>
+          </a:bodyPr>
+          <a:lstStyle/>
+          <a:p>
+            <a:pPr>
+              <a:lnSpc>
+                <a:spcPct val="124000"/>
+              </a:lnSpc>
+            </a:pPr>
+            <a:r>
+              <a:rPr sz="1050" b="0">
                 <a:solidFill>
                   <a:srgbClr val="15191A"/>
                 </a:solidFill>
                 <a:latin typeface="Helvetica Neue"/>
               </a:rPr>
-              <a:t>reglas fijas</a:t>
-            </a:r>
+              <a:t>PostgreSQL 16 · pgvector · unaccent</a:t>
+            </a:r>
+          </a:p>
+        </p:txBody>
+      </p:sp>
+      <p:sp>
+        <p:nvSpPr>
+          <p:cNvPr id="29" name="TextBox 28"/>
+          <p:cNvSpPr txBox="1"/>
+          <p:nvPr/>
+        </p:nvSpPr>
+        <p:spPr>
+          <a:xfrm>
+            <a:off x="5413248" y="3864864"/>
+            <a:ext cx="6053328" cy="457200"/>
+          </a:xfrm>
+          <a:prstGeom prst="rect">
+            <a:avLst/>
+          </a:prstGeom>
+          <a:noFill/>
+        </p:spPr>
+        <p:txBody>
+          <a:bodyPr wrap="square" lIns="0" rIns="0" tIns="0" bIns="0">
+            <a:spAutoFit/>
+          </a:bodyPr>
+          <a:lstStyle/>
+          <a:p>
+            <a:pPr>
+              <a:lnSpc>
+                <a:spcPct val="124000"/>
+              </a:lnSpc>
+            </a:pPr>
             <a:r>
               <a:rPr sz="1050" b="0">
                 <a:solidFill>
@@ -4970,47 +5119,82 @@
                 </a:solidFill>
                 <a:latin typeface="Helvetica Neue"/>
               </a:rPr>
-              <a:t>, no pidiéndole a otra IA que juzgue: heredaría los mismos errores.</a:t>
-            </a:r>
-          </a:p>
-        </p:txBody>
-      </p:sp>
-      <p:sp>
-        <p:nvSpPr>
-          <p:cNvPr id="20" name="TextBox 19"/>
-          <p:cNvSpPr txBox="1"/>
-          <p:nvPr/>
-        </p:nvSpPr>
-        <p:spPr>
-          <a:xfrm>
-            <a:off x="6470751" y="4295775"/>
-            <a:ext cx="5080863" cy="457200"/>
-          </a:xfrm>
-          <a:prstGeom prst="rect">
-            <a:avLst/>
-          </a:prstGeom>
-          <a:noFill/>
-        </p:spPr>
-        <p:txBody>
-          <a:bodyPr wrap="square" lIns="0" rIns="0" tIns="0" bIns="0">
-            <a:spAutoFit/>
-          </a:bodyPr>
-          <a:lstStyle/>
-          <a:p>
-            <a:pPr>
-              <a:lnSpc>
-                <a:spcPct val="130000"/>
-              </a:lnSpc>
-            </a:pPr>
-            <a:r>
-              <a:rPr sz="1050" b="1">
-                <a:solidFill>
-                  <a:srgbClr val="1D5C3C"/>
-                </a:solidFill>
-                <a:latin typeface="Helvetica Neue"/>
-              </a:rPr>
-              <a:t>— </a:t>
-            </a:r>
+              <a:t>Guarda documentos, conversaciones y la traza de auditoría, y busca por significado. También ignora los acentos: sin eso, «auditoria» no encontraba «auditoría».</a:t>
+            </a:r>
+          </a:p>
+        </p:txBody>
+      </p:sp>
+      <p:sp>
+        <p:nvSpPr>
+          <p:cNvPr id="30" name="Rectangle 29"/>
+          <p:cNvSpPr/>
+          <p:nvPr/>
+        </p:nvSpPr>
+        <p:spPr>
+          <a:xfrm>
+            <a:off x="566928" y="4267200"/>
+            <a:ext cx="11057839" cy="8890"/>
+          </a:xfrm>
+          <a:prstGeom prst="rect">
+            <a:avLst/>
+          </a:prstGeom>
+          <a:solidFill>
+            <a:srgbClr val="C5CDC7"/>
+          </a:solidFill>
+          <a:ln>
+            <a:noFill/>
+          </a:ln>
+          <a:effectLst/>
+        </p:spPr>
+        <p:style>
+          <a:lnRef idx="1">
+            <a:schemeClr val="accent1"/>
+          </a:lnRef>
+          <a:fillRef idx="3">
+            <a:schemeClr val="accent1"/>
+          </a:fillRef>
+          <a:effectRef idx="2">
+            <a:schemeClr val="accent1"/>
+          </a:effectRef>
+          <a:fontRef idx="minor">
+            <a:schemeClr val="lt1"/>
+          </a:fontRef>
+        </p:style>
+        <p:txBody>
+          <a:bodyPr rtlCol="0" anchor="ctr"/>
+          <a:lstStyle/>
+          <a:p>
+            <a:pPr algn="ctr"/>
+          </a:p>
+        </p:txBody>
+      </p:sp>
+      <p:sp>
+        <p:nvSpPr>
+          <p:cNvPr id="31" name="TextBox 30"/>
+          <p:cNvSpPr txBox="1"/>
+          <p:nvPr/>
+        </p:nvSpPr>
+        <p:spPr>
+          <a:xfrm>
+            <a:off x="566928" y="4395216"/>
+            <a:ext cx="1527048" cy="457200"/>
+          </a:xfrm>
+          <a:prstGeom prst="rect">
+            <a:avLst/>
+          </a:prstGeom>
+          <a:noFill/>
+        </p:spPr>
+        <p:txBody>
+          <a:bodyPr wrap="square" lIns="0" rIns="0" tIns="0" bIns="0">
+            <a:spAutoFit/>
+          </a:bodyPr>
+          <a:lstStyle/>
+          <a:p>
+            <a:pPr>
+              <a:lnSpc>
+                <a:spcPct val="124000"/>
+              </a:lnSpc>
+            </a:pPr>
             <a:r>
               <a:rPr sz="1050" b="0">
                 <a:solidFill>
@@ -5018,17 +5202,77 @@
                 </a:solidFill>
                 <a:latin typeface="Helvetica Neue"/>
               </a:rPr>
-              <a:t>Las preguntas frecuentes ayudan a </a:t>
-            </a:r>
-            <a:r>
-              <a:rPr sz="1050" b="1">
+              <a:t>Mensajería</a:t>
+            </a:r>
+          </a:p>
+        </p:txBody>
+      </p:sp>
+      <p:sp>
+        <p:nvSpPr>
+          <p:cNvPr id="32" name="TextBox 31"/>
+          <p:cNvSpPr txBox="1"/>
+          <p:nvPr/>
+        </p:nvSpPr>
+        <p:spPr>
+          <a:xfrm>
+            <a:off x="2258568" y="4395216"/>
+            <a:ext cx="2990088" cy="457200"/>
+          </a:xfrm>
+          <a:prstGeom prst="rect">
+            <a:avLst/>
+          </a:prstGeom>
+          <a:noFill/>
+        </p:spPr>
+        <p:txBody>
+          <a:bodyPr wrap="square" lIns="0" rIns="0" tIns="0" bIns="0">
+            <a:spAutoFit/>
+          </a:bodyPr>
+          <a:lstStyle/>
+          <a:p>
+            <a:pPr>
+              <a:lnSpc>
+                <a:spcPct val="124000"/>
+              </a:lnSpc>
+            </a:pPr>
+            <a:r>
+              <a:rPr sz="1050" b="0">
                 <a:solidFill>
                   <a:srgbClr val="15191A"/>
                 </a:solidFill>
                 <a:latin typeface="Helvetica Neue"/>
               </a:rPr>
-              <a:t>encontrar</a:t>
-            </a:r>
+              <a:t>Widget web · Web Component + Shadow DOM</a:t>
+            </a:r>
+          </a:p>
+        </p:txBody>
+      </p:sp>
+      <p:sp>
+        <p:nvSpPr>
+          <p:cNvPr id="33" name="TextBox 32"/>
+          <p:cNvSpPr txBox="1"/>
+          <p:nvPr/>
+        </p:nvSpPr>
+        <p:spPr>
+          <a:xfrm>
+            <a:off x="5413248" y="4395216"/>
+            <a:ext cx="6053328" cy="457200"/>
+          </a:xfrm>
+          <a:prstGeom prst="rect">
+            <a:avLst/>
+          </a:prstGeom>
+          <a:noFill/>
+        </p:spPr>
+        <p:txBody>
+          <a:bodyPr wrap="square" lIns="0" rIns="0" tIns="0" bIns="0">
+            <a:spAutoFit/>
+          </a:bodyPr>
+          <a:lstStyle/>
+          <a:p>
+            <a:pPr>
+              <a:lnSpc>
+                <a:spcPct val="124000"/>
+              </a:lnSpc>
+            </a:pPr>
             <a:r>
               <a:rPr sz="1050" b="0">
                 <a:solidFill>
@@ -5036,56 +5280,213 @@
                 </a:solidFill>
                 <a:latin typeface="Helvetica Neue"/>
               </a:rPr>
-              <a:t> la cláusula, pero nunca sustituyen la respuesta.</a:t>
-            </a:r>
-          </a:p>
-        </p:txBody>
-      </p:sp>
-      <p:sp>
-        <p:nvSpPr>
-          <p:cNvPr id="21" name="TextBox 20"/>
-          <p:cNvSpPr txBox="1"/>
-          <p:nvPr/>
-        </p:nvSpPr>
-        <p:spPr>
-          <a:xfrm>
-            <a:off x="566928" y="4999863"/>
-            <a:ext cx="10058400" cy="731520"/>
-          </a:xfrm>
-          <a:prstGeom prst="rect">
-            <a:avLst/>
-          </a:prstGeom>
-          <a:noFill/>
-        </p:spPr>
-        <p:txBody>
-          <a:bodyPr wrap="square" lIns="0" rIns="0" tIns="0" bIns="0">
-            <a:spAutoFit/>
-          </a:bodyPr>
-          <a:lstStyle/>
-          <a:p>
-            <a:pPr>
-              <a:lnSpc>
-                <a:spcPct val="135000"/>
-              </a:lnSpc>
-            </a:pPr>
-            <a:r>
-              <a:rPr sz="1250" b="1">
+              <a:t>Una etiqueta y un &lt;script&gt;; los estilos del anfitrión no lo tocan. WhatsApp queda para Fase 2.</a:t>
+            </a:r>
+          </a:p>
+        </p:txBody>
+      </p:sp>
+      <p:sp>
+        <p:nvSpPr>
+          <p:cNvPr id="34" name="Rectangle 33"/>
+          <p:cNvSpPr/>
+          <p:nvPr/>
+        </p:nvSpPr>
+        <p:spPr>
+          <a:xfrm>
+            <a:off x="566928" y="4797552"/>
+            <a:ext cx="11057839" cy="8890"/>
+          </a:xfrm>
+          <a:prstGeom prst="rect">
+            <a:avLst/>
+          </a:prstGeom>
+          <a:solidFill>
+            <a:srgbClr val="C5CDC7"/>
+          </a:solidFill>
+          <a:ln>
+            <a:noFill/>
+          </a:ln>
+          <a:effectLst/>
+        </p:spPr>
+        <p:style>
+          <a:lnRef idx="1">
+            <a:schemeClr val="accent1"/>
+          </a:lnRef>
+          <a:fillRef idx="3">
+            <a:schemeClr val="accent1"/>
+          </a:fillRef>
+          <a:effectRef idx="2">
+            <a:schemeClr val="accent1"/>
+          </a:effectRef>
+          <a:fontRef idx="minor">
+            <a:schemeClr val="lt1"/>
+          </a:fontRef>
+        </p:style>
+        <p:txBody>
+          <a:bodyPr rtlCol="0" anchor="ctr"/>
+          <a:lstStyle/>
+          <a:p>
+            <a:pPr algn="ctr"/>
+          </a:p>
+        </p:txBody>
+      </p:sp>
+      <p:sp>
+        <p:nvSpPr>
+          <p:cNvPr id="35" name="TextBox 34"/>
+          <p:cNvSpPr txBox="1"/>
+          <p:nvPr/>
+        </p:nvSpPr>
+        <p:spPr>
+          <a:xfrm>
+            <a:off x="566928" y="4925568"/>
+            <a:ext cx="1527048" cy="457200"/>
+          </a:xfrm>
+          <a:prstGeom prst="rect">
+            <a:avLst/>
+          </a:prstGeom>
+          <a:noFill/>
+        </p:spPr>
+        <p:txBody>
+          <a:bodyPr wrap="square" lIns="0" rIns="0" tIns="0" bIns="0">
+            <a:spAutoFit/>
+          </a:bodyPr>
+          <a:lstStyle/>
+          <a:p>
+            <a:pPr>
+              <a:lnSpc>
+                <a:spcPct val="124000"/>
+              </a:lnSpc>
+            </a:pPr>
+            <a:r>
+              <a:rPr sz="1050" b="0">
                 <a:solidFill>
                   <a:srgbClr val="15191A"/>
                 </a:solidFill>
                 <a:latin typeface="Helvetica Neue"/>
               </a:rPr>
-              <a:t>El repositorio no incluye ni un solo documento del cliente.</a:t>
-            </a:r>
-            <a:r>
-              <a:rPr sz="1250" b="0">
-                <a:solidFill>
-                  <a:srgbClr val="5D6663"/>
-                </a:solidFill>
-                <a:latin typeface="Helvetica Neue"/>
-              </a:rPr>
-              <a:t> Viaja con un SGC sintético de 6 documentos que imita la estructura real, para que cualquiera pueda ejecutarlo.</a:t>
-            </a:r>
+              <a:t>Despliegue</a:t>
+            </a:r>
+          </a:p>
+        </p:txBody>
+      </p:sp>
+      <p:sp>
+        <p:nvSpPr>
+          <p:cNvPr id="36" name="TextBox 35"/>
+          <p:cNvSpPr txBox="1"/>
+          <p:nvPr/>
+        </p:nvSpPr>
+        <p:spPr>
+          <a:xfrm>
+            <a:off x="2258568" y="4925568"/>
+            <a:ext cx="2990088" cy="457200"/>
+          </a:xfrm>
+          <a:prstGeom prst="rect">
+            <a:avLst/>
+          </a:prstGeom>
+          <a:noFill/>
+        </p:spPr>
+        <p:txBody>
+          <a:bodyPr wrap="square" lIns="0" rIns="0" tIns="0" bIns="0">
+            <a:spAutoFit/>
+          </a:bodyPr>
+          <a:lstStyle/>
+          <a:p>
+            <a:pPr>
+              <a:lnSpc>
+                <a:spcPct val="124000"/>
+              </a:lnSpc>
+            </a:pPr>
+            <a:r>
+              <a:rPr sz="1050" b="0">
+                <a:solidFill>
+                  <a:srgbClr val="15191A"/>
+                </a:solidFill>
+                <a:latin typeface="Helvetica Neue"/>
+              </a:rPr>
+              <a:t>Docker Compose · uv</a:t>
+            </a:r>
+          </a:p>
+        </p:txBody>
+      </p:sp>
+      <p:sp>
+        <p:nvSpPr>
+          <p:cNvPr id="37" name="TextBox 36"/>
+          <p:cNvSpPr txBox="1"/>
+          <p:nvPr/>
+        </p:nvSpPr>
+        <p:spPr>
+          <a:xfrm>
+            <a:off x="5413248" y="4925568"/>
+            <a:ext cx="6053328" cy="457200"/>
+          </a:xfrm>
+          <a:prstGeom prst="rect">
+            <a:avLst/>
+          </a:prstGeom>
+          <a:noFill/>
+        </p:spPr>
+        <p:txBody>
+          <a:bodyPr wrap="square" lIns="0" rIns="0" tIns="0" bIns="0">
+            <a:spAutoFit/>
+          </a:bodyPr>
+          <a:lstStyle/>
+          <a:p>
+            <a:pPr>
+              <a:lnSpc>
+                <a:spcPct val="124000"/>
+              </a:lnSpc>
+            </a:pPr>
+            <a:r>
+              <a:rPr sz="1050" b="0">
+                <a:solidFill>
+                  <a:srgbClr val="15191A"/>
+                </a:solidFill>
+                <a:latin typeface="Helvetica Neue"/>
+              </a:rPr>
+              <a:t>Local, sin nube: los documentos son internos. Clonar, instalar, configurar .env, ejecutar.</a:t>
+            </a:r>
+          </a:p>
+        </p:txBody>
+      </p:sp>
+      <p:sp>
+        <p:nvSpPr>
+          <p:cNvPr id="38" name="Rectangle 37"/>
+          <p:cNvSpPr/>
+          <p:nvPr/>
+        </p:nvSpPr>
+        <p:spPr>
+          <a:xfrm>
+            <a:off x="566928" y="5327904"/>
+            <a:ext cx="11057839" cy="8890"/>
+          </a:xfrm>
+          <a:prstGeom prst="rect">
+            <a:avLst/>
+          </a:prstGeom>
+          <a:solidFill>
+            <a:srgbClr val="C5CDC7"/>
+          </a:solidFill>
+          <a:ln>
+            <a:noFill/>
+          </a:ln>
+          <a:effectLst/>
+        </p:spPr>
+        <p:style>
+          <a:lnRef idx="1">
+            <a:schemeClr val="accent1"/>
+          </a:lnRef>
+          <a:fillRef idx="3">
+            <a:schemeClr val="accent1"/>
+          </a:fillRef>
+          <a:effectRef idx="2">
+            <a:schemeClr val="accent1"/>
+          </a:effectRef>
+          <a:fontRef idx="minor">
+            <a:schemeClr val="lt1"/>
+          </a:fontRef>
+        </p:style>
+        <p:txBody>
+          <a:bodyPr rtlCol="0" anchor="ctr"/>
+          <a:lstStyle/>
+          <a:p>
+            <a:pPr algn="ctr"/>
           </a:p>
         </p:txBody>
       </p:sp>
@@ -5188,7 +5589,7 @@
                 </a:solidFill>
                 <a:latin typeface="Helvetica Neue"/>
               </a:rPr>
-              <a:t>EN FUNCIONAMIENTO</a:t>
+              <a:t>DATOS</a:t>
             </a:r>
           </a:p>
         </p:txBody>
@@ -5315,7 +5716,7 @@
                 </a:solidFill>
                 <a:latin typeface="Helvetica Neue"/>
               </a:rPr>
-              <a:t>FLUJO FELIZ · FUERA DE ALCANCE</a:t>
+              <a:t>FUENTE · TIPO · VOLUMEN · LIMPIEZA · VALIDACIÓN</a:t>
             </a:r>
           </a:p>
         </p:txBody>
@@ -5354,7 +5755,7 @@
                 </a:solidFill>
                 <a:latin typeface="Courier New"/>
               </a:rPr>
-              <a:t>11 / 12</a:t>
+              <a:t>11 / 13</a:t>
             </a:r>
           </a:p>
         </p:txBody>
@@ -5393,33 +5794,154 @@
                 </a:solidFill>
                 <a:latin typeface="Helvetica Neue"/>
               </a:rPr>
-              <a:t>DEMOSTRACIÓN</a:t>
-            </a:r>
-          </a:p>
-        </p:txBody>
-      </p:sp>
-      <p:sp>
-        <p:nvSpPr>
-          <p:cNvPr id="9" name="Rounded Rectangle 8"/>
+              <a:t>DATOS</a:t>
+            </a:r>
+          </a:p>
+        </p:txBody>
+      </p:sp>
+      <p:sp>
+        <p:nvSpPr>
+          <p:cNvPr id="9" name="TextBox 8"/>
+          <p:cNvSpPr txBox="1"/>
+          <p:nvPr/>
+        </p:nvSpPr>
+        <p:spPr>
+          <a:xfrm>
+            <a:off x="566928" y="1133856"/>
+            <a:ext cx="10241280" cy="914400"/>
+          </a:xfrm>
+          <a:prstGeom prst="rect">
+            <a:avLst/>
+          </a:prstGeom>
+          <a:noFill/>
+        </p:spPr>
+        <p:txBody>
+          <a:bodyPr wrap="square" lIns="0" rIns="0" tIns="0" bIns="0">
+            <a:spAutoFit/>
+          </a:bodyPr>
+          <a:lstStyle/>
+          <a:p>
+            <a:pPr>
+              <a:lnSpc>
+                <a:spcPct val="105000"/>
+              </a:lnSpc>
+            </a:pPr>
+            <a:r>
+              <a:rPr sz="3000" b="1">
+                <a:solidFill>
+                  <a:srgbClr val="15191A"/>
+                </a:solidFill>
+                <a:latin typeface="Helvetica Neue"/>
+              </a:rPr>
+              <a:t>De 132 PDFs a 1043 cláusulas consultables</a:t>
+            </a:r>
+          </a:p>
+        </p:txBody>
+      </p:sp>
+      <p:sp>
+        <p:nvSpPr>
+          <p:cNvPr id="10" name="TextBox 9"/>
+          <p:cNvSpPr txBox="1"/>
+          <p:nvPr/>
+        </p:nvSpPr>
+        <p:spPr>
+          <a:xfrm>
+            <a:off x="566928" y="1798320"/>
+            <a:ext cx="10607040" cy="731520"/>
+          </a:xfrm>
+          <a:prstGeom prst="rect">
+            <a:avLst/>
+          </a:prstGeom>
+          <a:noFill/>
+        </p:spPr>
+        <p:txBody>
+          <a:bodyPr wrap="square" lIns="0" rIns="0" tIns="0" bIns="0">
+            <a:spAutoFit/>
+          </a:bodyPr>
+          <a:lstStyle/>
+          <a:p>
+            <a:pPr>
+              <a:lnSpc>
+                <a:spcPct val="135000"/>
+              </a:lnSpc>
+            </a:pPr>
+            <a:r>
+              <a:rPr sz="1050" b="1">
+                <a:solidFill>
+                  <a:srgbClr val="15191A"/>
+                </a:solidFill>
+                <a:latin typeface="Helvetica Neue"/>
+              </a:rPr>
+              <a:t>Fuente:</a:t>
+            </a:r>
+            <a:r>
+              <a:rPr sz="1050" b="0">
+                <a:solidFill>
+                  <a:srgbClr val="5D6663"/>
+                </a:solidFill>
+                <a:latin typeface="Helvetica Neue"/>
+              </a:rPr>
+              <a:t> el SGC real de una empresa de servicios, en PDFs controlados.   </a:t>
+            </a:r>
+            <a:r>
+              <a:rPr sz="1050" b="1">
+                <a:solidFill>
+                  <a:srgbClr val="15191A"/>
+                </a:solidFill>
+                <a:latin typeface="Helvetica Neue"/>
+              </a:rPr>
+              <a:t>Tipo:</a:t>
+            </a:r>
+            <a:r>
+              <a:rPr sz="1050" b="0">
+                <a:solidFill>
+                  <a:srgbClr val="5D6663"/>
+                </a:solidFill>
+                <a:latin typeface="Helvetica Neue"/>
+              </a:rPr>
+              <a:t> manuales, políticas, procedimientos, instructivos y formatos, en 11 áreas.   </a:t>
+            </a:r>
+            <a:r>
+              <a:rPr sz="1050" b="1">
+                <a:solidFill>
+                  <a:srgbClr val="15191A"/>
+                </a:solidFill>
+                <a:latin typeface="Helvetica Neue"/>
+              </a:rPr>
+              <a:t>Volumen:</a:t>
+            </a:r>
+            <a:r>
+              <a:rPr sz="1050" b="0">
+                <a:solidFill>
+                  <a:srgbClr val="5D6663"/>
+                </a:solidFill>
+                <a:latin typeface="Helvetica Neue"/>
+              </a:rPr>
+              <a:t> 132 documentos → 1043 cláusulas → 730 entradas de FAQ.</a:t>
+            </a:r>
+          </a:p>
+        </p:txBody>
+      </p:sp>
+      <p:sp>
+        <p:nvSpPr>
+          <p:cNvPr id="11" name="Rounded Rectangle 10"/>
           <p:cNvSpPr/>
           <p:nvPr/>
         </p:nvSpPr>
         <p:spPr>
           <a:xfrm>
-            <a:off x="566928" y="1170432"/>
-            <a:ext cx="5336895" cy="4315968"/>
+            <a:off x="566928" y="2549271"/>
+            <a:ext cx="960120" cy="256032"/>
           </a:xfrm>
           <a:prstGeom prst="roundRect">
-            <a:avLst>
-              <a:gd name="adj" fmla="val 3000"/>
-            </a:avLst>
+            <a:avLst/>
           </a:prstGeom>
           <a:solidFill>
-            <a:srgbClr val="FFFFFF"/>
+            <a:srgbClr val="E3EEE8"/>
           </a:solidFill>
           <a:ln w="9525">
             <a:solidFill>
-              <a:srgbClr val="C5CDC7"/>
+              <a:srgbClr val="1D5C3C"/>
             </a:solidFill>
           </a:ln>
           <a:effectLst/>
@@ -5439,47 +5961,36 @@
           </a:fontRef>
         </p:style>
         <p:txBody>
-          <a:bodyPr rtlCol="0" anchor="ctr"/>
-          <a:lstStyle/>
-          <a:p>
-            <a:pPr algn="ctr"/>
-          </a:p>
-        </p:txBody>
-      </p:sp>
-      <p:pic>
-        <p:nvPicPr>
-          <p:cNvPr id="10" name="Picture 9" descr="cita.png"/>
-          <p:cNvPicPr>
-            <a:picLocks noChangeAspect="1"/>
-          </p:cNvPicPr>
-          <p:nvPr/>
-        </p:nvPicPr>
-        <p:blipFill>
-          <a:blip r:embed="rId2"/>
-          <a:stretch>
-            <a:fillRect/>
-          </a:stretch>
-        </p:blipFill>
-        <p:spPr>
-          <a:xfrm>
-            <a:off x="2037838" y="1335024"/>
-            <a:ext cx="2395074" cy="3529584"/>
-          </a:xfrm>
-          <a:prstGeom prst="rect">
-            <a:avLst/>
-          </a:prstGeom>
-        </p:spPr>
-      </p:pic>
-      <p:sp>
-        <p:nvSpPr>
-          <p:cNvPr id="11" name="TextBox 10"/>
-          <p:cNvSpPr txBox="1"/>
-          <p:nvPr/>
-        </p:nvSpPr>
-        <p:spPr>
-          <a:xfrm>
-            <a:off x="786384" y="4992624"/>
-            <a:ext cx="4897983" cy="457200"/>
+          <a:bodyPr rtlCol="0" anchor="ctr" lIns="0" rIns="0"/>
+          <a:lstStyle/>
+          <a:p>
+            <a:pPr algn="ctr">
+              <a:lnSpc>
+                <a:spcPct val="128000"/>
+              </a:lnSpc>
+            </a:pPr>
+            <a:r>
+              <a:rPr sz="900" b="1" spc="130">
+                <a:solidFill>
+                  <a:srgbClr val="1D5C3C"/>
+                </a:solidFill>
+                <a:latin typeface="Helvetica Neue"/>
+              </a:rPr>
+              <a:t>LIMPIEZA</a:t>
+            </a:r>
+          </a:p>
+        </p:txBody>
+      </p:sp>
+      <p:sp>
+        <p:nvSpPr>
+          <p:cNvPr id="12" name="TextBox 11"/>
+          <p:cNvSpPr txBox="1"/>
+          <p:nvPr/>
+        </p:nvSpPr>
+        <p:spPr>
+          <a:xfrm>
+            <a:off x="749808" y="2951607"/>
+            <a:ext cx="5080863" cy="457200"/>
           </a:xfrm>
           <a:prstGeom prst="rect">
             <a:avLst/>
@@ -5498,48 +6009,253 @@
               </a:lnSpc>
             </a:pPr>
             <a:r>
-              <a:rPr sz="950" b="1">
+              <a:rPr sz="1050" b="1">
+                <a:solidFill>
+                  <a:srgbClr val="1D5C3C"/>
+                </a:solidFill>
+                <a:latin typeface="Helvetica Neue"/>
+              </a:rPr>
+              <a:t>— </a:t>
+            </a:r>
+            <a:r>
+              <a:rPr sz="1050" b="1">
                 <a:solidFill>
                   <a:srgbClr val="15191A"/>
                 </a:solidFill>
                 <a:latin typeface="Helvetica Neue"/>
               </a:rPr>
-              <a:t>Flujo feliz.</a:t>
-            </a:r>
-            <a:r>
-              <a:rPr sz="950" b="0">
-                <a:solidFill>
-                  <a:srgbClr val="5D6663"/>
-                </a:solidFill>
-                <a:latin typeface="Helvetica Neue"/>
-              </a:rPr>
-              <a:t> El dato en negrita; debajo, la referencia con el título por delante y el código y la versión como respaldo.</a:t>
-            </a:r>
-          </a:p>
-        </p:txBody>
-      </p:sp>
-      <p:sp>
-        <p:nvSpPr>
-          <p:cNvPr id="12" name="Rounded Rectangle 11"/>
+              <a:t>Troceado por cláusula</a:t>
+            </a:r>
+            <a:r>
+              <a:rPr sz="1050" b="0">
+                <a:solidFill>
+                  <a:srgbClr val="15191A"/>
+                </a:solidFill>
+                <a:latin typeface="Helvetica Neue"/>
+              </a:rPr>
+              <a:t>, no por tamaño fijo: la unidad de sentido es la cláusula.</a:t>
+            </a:r>
+          </a:p>
+        </p:txBody>
+      </p:sp>
+      <p:sp>
+        <p:nvSpPr>
+          <p:cNvPr id="13" name="TextBox 12"/>
+          <p:cNvSpPr txBox="1"/>
+          <p:nvPr/>
+        </p:nvSpPr>
+        <p:spPr>
+          <a:xfrm>
+            <a:off x="749808" y="3399663"/>
+            <a:ext cx="5080863" cy="457200"/>
+          </a:xfrm>
+          <a:prstGeom prst="rect">
+            <a:avLst/>
+          </a:prstGeom>
+          <a:noFill/>
+        </p:spPr>
+        <p:txBody>
+          <a:bodyPr wrap="square" lIns="0" rIns="0" tIns="0" bIns="0">
+            <a:spAutoFit/>
+          </a:bodyPr>
+          <a:lstStyle/>
+          <a:p>
+            <a:pPr>
+              <a:lnSpc>
+                <a:spcPct val="130000"/>
+              </a:lnSpc>
+            </a:pPr>
+            <a:r>
+              <a:rPr sz="1050" b="1">
+                <a:solidFill>
+                  <a:srgbClr val="1D5C3C"/>
+                </a:solidFill>
+                <a:latin typeface="Helvetica Neue"/>
+              </a:rPr>
+              <a:t>— </a:t>
+            </a:r>
+            <a:r>
+              <a:rPr sz="1050" b="0">
+                <a:solidFill>
+                  <a:srgbClr val="15191A"/>
+                </a:solidFill>
+                <a:latin typeface="Helvetica Neue"/>
+              </a:rPr>
+              <a:t>Las tablas se leen respetando qué valor va con qué columna. Sin eso daba el «tiempo de solución» por el «de respuesta».</a:t>
+            </a:r>
+          </a:p>
+        </p:txBody>
+      </p:sp>
+      <p:sp>
+        <p:nvSpPr>
+          <p:cNvPr id="14" name="TextBox 13"/>
+          <p:cNvSpPr txBox="1"/>
+          <p:nvPr/>
+        </p:nvSpPr>
+        <p:spPr>
+          <a:xfrm>
+            <a:off x="749808" y="3847719"/>
+            <a:ext cx="5080863" cy="457200"/>
+          </a:xfrm>
+          <a:prstGeom prst="rect">
+            <a:avLst/>
+          </a:prstGeom>
+          <a:noFill/>
+        </p:spPr>
+        <p:txBody>
+          <a:bodyPr wrap="square" lIns="0" rIns="0" tIns="0" bIns="0">
+            <a:spAutoFit/>
+          </a:bodyPr>
+          <a:lstStyle/>
+          <a:p>
+            <a:pPr>
+              <a:lnSpc>
+                <a:spcPct val="130000"/>
+              </a:lnSpc>
+            </a:pPr>
+            <a:r>
+              <a:rPr sz="1050" b="1">
+                <a:solidFill>
+                  <a:srgbClr val="1D5C3C"/>
+                </a:solidFill>
+                <a:latin typeface="Helvetica Neue"/>
+              </a:rPr>
+              <a:t>— </a:t>
+            </a:r>
+            <a:r>
+              <a:rPr sz="1050" b="0">
+                <a:solidFill>
+                  <a:srgbClr val="15191A"/>
+                </a:solidFill>
+                <a:latin typeface="Helvetica Neue"/>
+              </a:rPr>
+              <a:t>Reparación de saltos del PDF: </a:t>
+            </a:r>
+            <a:r>
+              <a:rPr sz="1050" b="0">
+                <a:solidFill>
+                  <a:srgbClr val="15191A"/>
+                </a:solidFill>
+                <a:latin typeface="Courier New"/>
+              </a:rPr>
+              <a:t>CAL-FO- 09</a:t>
+            </a:r>
+            <a:r>
+              <a:rPr sz="1050" b="0">
+                <a:solidFill>
+                  <a:srgbClr val="15191A"/>
+                </a:solidFill>
+                <a:latin typeface="Helvetica Neue"/>
+              </a:rPr>
+              <a:t> → </a:t>
+            </a:r>
+            <a:r>
+              <a:rPr sz="1050" b="0">
+                <a:solidFill>
+                  <a:srgbClr val="15191A"/>
+                </a:solidFill>
+                <a:latin typeface="Courier New"/>
+              </a:rPr>
+              <a:t>CAL-FO-09</a:t>
+            </a:r>
+            <a:r>
+              <a:rPr sz="1050" b="0">
+                <a:solidFill>
+                  <a:srgbClr val="15191A"/>
+                </a:solidFill>
+                <a:latin typeface="Helvetica Neue"/>
+              </a:rPr>
+              <a:t>.</a:t>
+            </a:r>
+          </a:p>
+        </p:txBody>
+      </p:sp>
+      <p:sp>
+        <p:nvSpPr>
+          <p:cNvPr id="15" name="TextBox 14"/>
+          <p:cNvSpPr txBox="1"/>
+          <p:nvPr/>
+        </p:nvSpPr>
+        <p:spPr>
+          <a:xfrm>
+            <a:off x="749808" y="4122039"/>
+            <a:ext cx="5080863" cy="457200"/>
+          </a:xfrm>
+          <a:prstGeom prst="rect">
+            <a:avLst/>
+          </a:prstGeom>
+          <a:noFill/>
+        </p:spPr>
+        <p:txBody>
+          <a:bodyPr wrap="square" lIns="0" rIns="0" tIns="0" bIns="0">
+            <a:spAutoFit/>
+          </a:bodyPr>
+          <a:lstStyle/>
+          <a:p>
+            <a:pPr>
+              <a:lnSpc>
+                <a:spcPct val="130000"/>
+              </a:lnSpc>
+            </a:pPr>
+            <a:r>
+              <a:rPr sz="1050" b="1">
+                <a:solidFill>
+                  <a:srgbClr val="1D5C3C"/>
+                </a:solidFill>
+                <a:latin typeface="Helvetica Neue"/>
+              </a:rPr>
+              <a:t>— </a:t>
+            </a:r>
+            <a:r>
+              <a:rPr sz="1050" b="0">
+                <a:solidFill>
+                  <a:srgbClr val="15191A"/>
+                </a:solidFill>
+                <a:latin typeface="Helvetica Neue"/>
+              </a:rPr>
+              <a:t>Aviso cuando una cláusula </a:t>
+            </a:r>
+            <a:r>
+              <a:rPr sz="1050" b="1">
+                <a:solidFill>
+                  <a:srgbClr val="15191A"/>
+                </a:solidFill>
+                <a:latin typeface="Helvetica Neue"/>
+              </a:rPr>
+              <a:t>anuncia sin entregar</a:t>
+            </a:r>
+            <a:r>
+              <a:rPr sz="1050" b="0">
+                <a:solidFill>
+                  <a:srgbClr val="15191A"/>
+                </a:solidFill>
+                <a:latin typeface="Helvetica Neue"/>
+              </a:rPr>
+              <a:t>: el contenido está en una imagen.</a:t>
+            </a:r>
+          </a:p>
+        </p:txBody>
+      </p:sp>
+      <p:sp>
+        <p:nvSpPr>
+          <p:cNvPr id="16" name="Rounded Rectangle 15"/>
           <p:cNvSpPr/>
           <p:nvPr/>
         </p:nvSpPr>
         <p:spPr>
           <a:xfrm>
-            <a:off x="6287871" y="1170432"/>
-            <a:ext cx="5336895" cy="4315968"/>
+            <a:off x="6287871" y="2549271"/>
+            <a:ext cx="960120" cy="256032"/>
           </a:xfrm>
           <a:prstGeom prst="roundRect">
-            <a:avLst>
-              <a:gd name="adj" fmla="val 3000"/>
-            </a:avLst>
+            <a:avLst/>
           </a:prstGeom>
           <a:solidFill>
-            <a:srgbClr val="FFFFFF"/>
+            <a:srgbClr val="E3EEE8"/>
           </a:solidFill>
           <a:ln w="9525">
             <a:solidFill>
-              <a:srgbClr val="C5CDC7"/>
+              <a:srgbClr val="1D5C3C"/>
             </a:solidFill>
           </a:ln>
           <a:effectLst/>
@@ -5559,47 +6275,36 @@
           </a:fontRef>
         </p:style>
         <p:txBody>
-          <a:bodyPr rtlCol="0" anchor="ctr"/>
-          <a:lstStyle/>
-          <a:p>
-            <a:pPr algn="ctr"/>
-          </a:p>
-        </p:txBody>
-      </p:sp>
-      <p:pic>
-        <p:nvPicPr>
-          <p:cNvPr id="13" name="Picture 12" descr="guard.png"/>
-          <p:cNvPicPr>
-            <a:picLocks noChangeAspect="1"/>
-          </p:cNvPicPr>
-          <p:nvPr/>
-        </p:nvPicPr>
-        <p:blipFill>
-          <a:blip r:embed="rId3"/>
-          <a:stretch>
-            <a:fillRect/>
-          </a:stretch>
-        </p:blipFill>
-        <p:spPr>
-          <a:xfrm>
-            <a:off x="7758781" y="1335024"/>
-            <a:ext cx="2395074" cy="3529584"/>
-          </a:xfrm>
-          <a:prstGeom prst="rect">
-            <a:avLst/>
-          </a:prstGeom>
-        </p:spPr>
-      </p:pic>
-      <p:sp>
-        <p:nvSpPr>
-          <p:cNvPr id="14" name="TextBox 13"/>
-          <p:cNvSpPr txBox="1"/>
-          <p:nvPr/>
-        </p:nvSpPr>
-        <p:spPr>
-          <a:xfrm>
-            <a:off x="6507327" y="4992624"/>
-            <a:ext cx="4897983" cy="457200"/>
+          <a:bodyPr rtlCol="0" anchor="ctr" lIns="0" rIns="0"/>
+          <a:lstStyle/>
+          <a:p>
+            <a:pPr algn="ctr">
+              <a:lnSpc>
+                <a:spcPct val="128000"/>
+              </a:lnSpc>
+            </a:pPr>
+            <a:r>
+              <a:rPr sz="900" b="1" spc="130">
+                <a:solidFill>
+                  <a:srgbClr val="1D5C3C"/>
+                </a:solidFill>
+                <a:latin typeface="Helvetica Neue"/>
+              </a:rPr>
+              <a:t>VALIDACIÓN</a:t>
+            </a:r>
+          </a:p>
+        </p:txBody>
+      </p:sp>
+      <p:sp>
+        <p:nvSpPr>
+          <p:cNvPr id="17" name="TextBox 16"/>
+          <p:cNvSpPr txBox="1"/>
+          <p:nvPr/>
+        </p:nvSpPr>
+        <p:spPr>
+          <a:xfrm>
+            <a:off x="6470751" y="2951607"/>
+            <a:ext cx="5080863" cy="457200"/>
           </a:xfrm>
           <a:prstGeom prst="rect">
             <a:avLst/>
@@ -5618,22 +6323,286 @@
               </a:lnSpc>
             </a:pPr>
             <a:r>
-              <a:rPr sz="950" b="1">
+              <a:rPr sz="1050" b="1">
+                <a:solidFill>
+                  <a:srgbClr val="1D5C3C"/>
+                </a:solidFill>
+                <a:latin typeface="Helvetica Neue"/>
+              </a:rPr>
+              <a:t>— </a:t>
+            </a:r>
+            <a:r>
+              <a:rPr sz="1050" b="0">
                 <a:solidFill>
                   <a:srgbClr val="15191A"/>
                 </a:solidFill>
                 <a:latin typeface="Helvetica Neue"/>
               </a:rPr>
-              <a:t>Fuera de alcance.</a:t>
-            </a:r>
-            <a:r>
-              <a:rPr sz="950" b="0">
+              <a:t>Cada PDF contrastado contra la </a:t>
+            </a:r>
+            <a:r>
+              <a:rPr sz="1050" b="1">
+                <a:solidFill>
+                  <a:srgbClr val="15191A"/>
+                </a:solidFill>
+                <a:latin typeface="Helvetica Neue"/>
+              </a:rPr>
+              <a:t>Lista Maestra</a:t>
+            </a:r>
+            <a:r>
+              <a:rPr sz="1050" b="0">
+                <a:solidFill>
+                  <a:srgbClr val="15191A"/>
+                </a:solidFill>
+                <a:latin typeface="Helvetica Neue"/>
+              </a:rPr>
+              <a:t>: de ahí salieron los seis hallazgos.</a:t>
+            </a:r>
+          </a:p>
+        </p:txBody>
+      </p:sp>
+      <p:sp>
+        <p:nvSpPr>
+          <p:cNvPr id="18" name="TextBox 17"/>
+          <p:cNvSpPr txBox="1"/>
+          <p:nvPr/>
+        </p:nvSpPr>
+        <p:spPr>
+          <a:xfrm>
+            <a:off x="6470751" y="3399663"/>
+            <a:ext cx="5080863" cy="457200"/>
+          </a:xfrm>
+          <a:prstGeom prst="rect">
+            <a:avLst/>
+          </a:prstGeom>
+          <a:noFill/>
+        </p:spPr>
+        <p:txBody>
+          <a:bodyPr wrap="square" lIns="0" rIns="0" tIns="0" bIns="0">
+            <a:spAutoFit/>
+          </a:bodyPr>
+          <a:lstStyle/>
+          <a:p>
+            <a:pPr>
+              <a:lnSpc>
+                <a:spcPct val="130000"/>
+              </a:lnSpc>
+            </a:pPr>
+            <a:r>
+              <a:rPr sz="1050" b="1">
+                <a:solidFill>
+                  <a:srgbClr val="1D5C3C"/>
+                </a:solidFill>
+                <a:latin typeface="Helvetica Neue"/>
+              </a:rPr>
+              <a:t>— </a:t>
+            </a:r>
+            <a:r>
+              <a:rPr sz="1050" b="0">
+                <a:solidFill>
+                  <a:srgbClr val="15191A"/>
+                </a:solidFill>
+                <a:latin typeface="Helvetica Neue"/>
+              </a:rPr>
+              <a:t>FAQ desde las cláusulas: 489 procesadas → </a:t>
+            </a:r>
+            <a:r>
+              <a:rPr sz="1050" b="1">
+                <a:solidFill>
+                  <a:srgbClr val="15191A"/>
+                </a:solidFill>
+                <a:latin typeface="Helvetica Neue"/>
+              </a:rPr>
+              <a:t>730 entradas</a:t>
+            </a:r>
+            <a:r>
+              <a:rPr sz="1050" b="0">
+                <a:solidFill>
+                  <a:srgbClr val="15191A"/>
+                </a:solidFill>
+                <a:latin typeface="Helvetica Neue"/>
+              </a:rPr>
+              <a:t>, 14 descartadas y 9 duplicadas.</a:t>
+            </a:r>
+          </a:p>
+        </p:txBody>
+      </p:sp>
+      <p:sp>
+        <p:nvSpPr>
+          <p:cNvPr id="19" name="TextBox 18"/>
+          <p:cNvSpPr txBox="1"/>
+          <p:nvPr/>
+        </p:nvSpPr>
+        <p:spPr>
+          <a:xfrm>
+            <a:off x="6470751" y="3847719"/>
+            <a:ext cx="5080863" cy="457200"/>
+          </a:xfrm>
+          <a:prstGeom prst="rect">
+            <a:avLst/>
+          </a:prstGeom>
+          <a:noFill/>
+        </p:spPr>
+        <p:txBody>
+          <a:bodyPr wrap="square" lIns="0" rIns="0" tIns="0" bIns="0">
+            <a:spAutoFit/>
+          </a:bodyPr>
+          <a:lstStyle/>
+          <a:p>
+            <a:pPr>
+              <a:lnSpc>
+                <a:spcPct val="130000"/>
+              </a:lnSpc>
+            </a:pPr>
+            <a:r>
+              <a:rPr sz="1050" b="1">
+                <a:solidFill>
+                  <a:srgbClr val="1D5C3C"/>
+                </a:solidFill>
+                <a:latin typeface="Helvetica Neue"/>
+              </a:rPr>
+              <a:t>— </a:t>
+            </a:r>
+            <a:r>
+              <a:rPr sz="1050" b="0">
+                <a:solidFill>
+                  <a:srgbClr val="15191A"/>
+                </a:solidFill>
+                <a:latin typeface="Helvetica Neue"/>
+              </a:rPr>
+              <a:t>La revisión es con </a:t>
+            </a:r>
+            <a:r>
+              <a:rPr sz="1050" b="1">
+                <a:solidFill>
+                  <a:srgbClr val="15191A"/>
+                </a:solidFill>
+                <a:latin typeface="Helvetica Neue"/>
+              </a:rPr>
+              <a:t>reglas fijas</a:t>
+            </a:r>
+            <a:r>
+              <a:rPr sz="1050" b="0">
+                <a:solidFill>
+                  <a:srgbClr val="15191A"/>
+                </a:solidFill>
+                <a:latin typeface="Helvetica Neue"/>
+              </a:rPr>
+              <a:t>, no pidiéndole a otra IA que juzgue: heredaría los mismos errores.</a:t>
+            </a:r>
+          </a:p>
+        </p:txBody>
+      </p:sp>
+      <p:sp>
+        <p:nvSpPr>
+          <p:cNvPr id="20" name="TextBox 19"/>
+          <p:cNvSpPr txBox="1"/>
+          <p:nvPr/>
+        </p:nvSpPr>
+        <p:spPr>
+          <a:xfrm>
+            <a:off x="6470751" y="4295775"/>
+            <a:ext cx="5080863" cy="457200"/>
+          </a:xfrm>
+          <a:prstGeom prst="rect">
+            <a:avLst/>
+          </a:prstGeom>
+          <a:noFill/>
+        </p:spPr>
+        <p:txBody>
+          <a:bodyPr wrap="square" lIns="0" rIns="0" tIns="0" bIns="0">
+            <a:spAutoFit/>
+          </a:bodyPr>
+          <a:lstStyle/>
+          <a:p>
+            <a:pPr>
+              <a:lnSpc>
+                <a:spcPct val="130000"/>
+              </a:lnSpc>
+            </a:pPr>
+            <a:r>
+              <a:rPr sz="1050" b="1">
+                <a:solidFill>
+                  <a:srgbClr val="1D5C3C"/>
+                </a:solidFill>
+                <a:latin typeface="Helvetica Neue"/>
+              </a:rPr>
+              <a:t>— </a:t>
+            </a:r>
+            <a:r>
+              <a:rPr sz="1050" b="0">
+                <a:solidFill>
+                  <a:srgbClr val="15191A"/>
+                </a:solidFill>
+                <a:latin typeface="Helvetica Neue"/>
+              </a:rPr>
+              <a:t>Las preguntas frecuentes ayudan a </a:t>
+            </a:r>
+            <a:r>
+              <a:rPr sz="1050" b="1">
+                <a:solidFill>
+                  <a:srgbClr val="15191A"/>
+                </a:solidFill>
+                <a:latin typeface="Helvetica Neue"/>
+              </a:rPr>
+              <a:t>encontrar</a:t>
+            </a:r>
+            <a:r>
+              <a:rPr sz="1050" b="0">
+                <a:solidFill>
+                  <a:srgbClr val="15191A"/>
+                </a:solidFill>
+                <a:latin typeface="Helvetica Neue"/>
+              </a:rPr>
+              <a:t> la cláusula, pero nunca sustituyen la respuesta.</a:t>
+            </a:r>
+          </a:p>
+        </p:txBody>
+      </p:sp>
+      <p:sp>
+        <p:nvSpPr>
+          <p:cNvPr id="21" name="TextBox 20"/>
+          <p:cNvSpPr txBox="1"/>
+          <p:nvPr/>
+        </p:nvSpPr>
+        <p:spPr>
+          <a:xfrm>
+            <a:off x="566928" y="4999863"/>
+            <a:ext cx="10058400" cy="731520"/>
+          </a:xfrm>
+          <a:prstGeom prst="rect">
+            <a:avLst/>
+          </a:prstGeom>
+          <a:noFill/>
+        </p:spPr>
+        <p:txBody>
+          <a:bodyPr wrap="square" lIns="0" rIns="0" tIns="0" bIns="0">
+            <a:spAutoFit/>
+          </a:bodyPr>
+          <a:lstStyle/>
+          <a:p>
+            <a:pPr>
+              <a:lnSpc>
+                <a:spcPct val="135000"/>
+              </a:lnSpc>
+            </a:pPr>
+            <a:r>
+              <a:rPr sz="1250" b="1">
+                <a:solidFill>
+                  <a:srgbClr val="15191A"/>
+                </a:solidFill>
+                <a:latin typeface="Helvetica Neue"/>
+              </a:rPr>
+              <a:t>El repositorio no incluye ni un solo documento del cliente.</a:t>
+            </a:r>
+            <a:r>
+              <a:rPr sz="1250" b="0">
                 <a:solidFill>
                   <a:srgbClr val="5D6663"/>
                 </a:solidFill>
                 <a:latin typeface="Helvetica Neue"/>
               </a:rPr>
-              <a:t> Tema ausente del SGC: no inventa, lo dice, deriva a Calidad y marca la respuesta como no verificada.</a:t>
+              <a:t> Viaja con un SGC sintético de 6 documentos que imita la estructura real, para que cualquiera pueda ejecutarlo.</a:t>
             </a:r>
           </a:p>
         </p:txBody>
@@ -5737,7 +6706,7 @@
                 </a:solidFill>
                 <a:latin typeface="Helvetica Neue"/>
               </a:rPr>
-              <a:t>RESULTADOS</a:t>
+              <a:t>EN FUNCIONAMIENTO</a:t>
             </a:r>
           </a:p>
         </p:txBody>
@@ -5864,7 +6833,7 @@
                 </a:solidFill>
                 <a:latin typeface="Helvetica Neue"/>
               </a:rPr>
-              <a:t>GRACIAS</a:t>
+              <a:t>FLUJO FELIZ · FUERA DE ALCANCE</a:t>
             </a:r>
           </a:p>
         </p:txBody>
@@ -5903,7 +6872,556 @@
                 </a:solidFill>
                 <a:latin typeface="Courier New"/>
               </a:rPr>
-              <a:t>12 / 12</a:t>
+              <a:t>12 / 13</a:t>
+            </a:r>
+          </a:p>
+        </p:txBody>
+      </p:sp>
+      <p:sp>
+        <p:nvSpPr>
+          <p:cNvPr id="8" name="TextBox 7"/>
+          <p:cNvSpPr txBox="1"/>
+          <p:nvPr/>
+        </p:nvSpPr>
+        <p:spPr>
+          <a:xfrm>
+            <a:off x="566928" y="822960"/>
+            <a:ext cx="5486400" cy="219456"/>
+          </a:xfrm>
+          <a:prstGeom prst="rect">
+            <a:avLst/>
+          </a:prstGeom>
+          <a:noFill/>
+        </p:spPr>
+        <p:txBody>
+          <a:bodyPr wrap="square" lIns="0" rIns="0" tIns="0" bIns="0">
+            <a:spAutoFit/>
+          </a:bodyPr>
+          <a:lstStyle/>
+          <a:p>
+            <a:pPr>
+              <a:lnSpc>
+                <a:spcPct val="128000"/>
+              </a:lnSpc>
+            </a:pPr>
+            <a:r>
+              <a:rPr sz="900" b="1" spc="170">
+                <a:solidFill>
+                  <a:srgbClr val="1D5C3C"/>
+                </a:solidFill>
+                <a:latin typeface="Helvetica Neue"/>
+              </a:rPr>
+              <a:t>DEMOSTRACIÓN</a:t>
+            </a:r>
+          </a:p>
+        </p:txBody>
+      </p:sp>
+      <p:sp>
+        <p:nvSpPr>
+          <p:cNvPr id="9" name="Rounded Rectangle 8"/>
+          <p:cNvSpPr/>
+          <p:nvPr/>
+        </p:nvSpPr>
+        <p:spPr>
+          <a:xfrm>
+            <a:off x="566928" y="1170432"/>
+            <a:ext cx="5336895" cy="4315968"/>
+          </a:xfrm>
+          <a:prstGeom prst="roundRect">
+            <a:avLst>
+              <a:gd name="adj" fmla="val 3000"/>
+            </a:avLst>
+          </a:prstGeom>
+          <a:solidFill>
+            <a:srgbClr val="FFFFFF"/>
+          </a:solidFill>
+          <a:ln w="9525">
+            <a:solidFill>
+              <a:srgbClr val="C5CDC7"/>
+            </a:solidFill>
+          </a:ln>
+          <a:effectLst/>
+        </p:spPr>
+        <p:style>
+          <a:lnRef idx="1">
+            <a:schemeClr val="accent1"/>
+          </a:lnRef>
+          <a:fillRef idx="3">
+            <a:schemeClr val="accent1"/>
+          </a:fillRef>
+          <a:effectRef idx="2">
+            <a:schemeClr val="accent1"/>
+          </a:effectRef>
+          <a:fontRef idx="minor">
+            <a:schemeClr val="lt1"/>
+          </a:fontRef>
+        </p:style>
+        <p:txBody>
+          <a:bodyPr rtlCol="0" anchor="ctr"/>
+          <a:lstStyle/>
+          <a:p>
+            <a:pPr algn="ctr"/>
+          </a:p>
+        </p:txBody>
+      </p:sp>
+      <p:pic>
+        <p:nvPicPr>
+          <p:cNvPr id="10" name="Picture 9" descr="cita.png"/>
+          <p:cNvPicPr>
+            <a:picLocks noChangeAspect="1"/>
+          </p:cNvPicPr>
+          <p:nvPr/>
+        </p:nvPicPr>
+        <p:blipFill>
+          <a:blip r:embed="rId2"/>
+          <a:stretch>
+            <a:fillRect/>
+          </a:stretch>
+        </p:blipFill>
+        <p:spPr>
+          <a:xfrm>
+            <a:off x="2037838" y="1335024"/>
+            <a:ext cx="2395074" cy="3529584"/>
+          </a:xfrm>
+          <a:prstGeom prst="rect">
+            <a:avLst/>
+          </a:prstGeom>
+        </p:spPr>
+      </p:pic>
+      <p:sp>
+        <p:nvSpPr>
+          <p:cNvPr id="11" name="TextBox 10"/>
+          <p:cNvSpPr txBox="1"/>
+          <p:nvPr/>
+        </p:nvSpPr>
+        <p:spPr>
+          <a:xfrm>
+            <a:off x="786384" y="4992624"/>
+            <a:ext cx="4897983" cy="457200"/>
+          </a:xfrm>
+          <a:prstGeom prst="rect">
+            <a:avLst/>
+          </a:prstGeom>
+          <a:noFill/>
+        </p:spPr>
+        <p:txBody>
+          <a:bodyPr wrap="square" lIns="0" rIns="0" tIns="0" bIns="0">
+            <a:spAutoFit/>
+          </a:bodyPr>
+          <a:lstStyle/>
+          <a:p>
+            <a:pPr>
+              <a:lnSpc>
+                <a:spcPct val="130000"/>
+              </a:lnSpc>
+            </a:pPr>
+            <a:r>
+              <a:rPr sz="950" b="1">
+                <a:solidFill>
+                  <a:srgbClr val="15191A"/>
+                </a:solidFill>
+                <a:latin typeface="Helvetica Neue"/>
+              </a:rPr>
+              <a:t>Flujo feliz.</a:t>
+            </a:r>
+            <a:r>
+              <a:rPr sz="950" b="0">
+                <a:solidFill>
+                  <a:srgbClr val="5D6663"/>
+                </a:solidFill>
+                <a:latin typeface="Helvetica Neue"/>
+              </a:rPr>
+              <a:t> El dato en negrita; debajo, la referencia con el título por delante y el código y la versión como respaldo.</a:t>
+            </a:r>
+          </a:p>
+        </p:txBody>
+      </p:sp>
+      <p:sp>
+        <p:nvSpPr>
+          <p:cNvPr id="12" name="Rounded Rectangle 11"/>
+          <p:cNvSpPr/>
+          <p:nvPr/>
+        </p:nvSpPr>
+        <p:spPr>
+          <a:xfrm>
+            <a:off x="6287871" y="1170432"/>
+            <a:ext cx="5336895" cy="4315968"/>
+          </a:xfrm>
+          <a:prstGeom prst="roundRect">
+            <a:avLst>
+              <a:gd name="adj" fmla="val 3000"/>
+            </a:avLst>
+          </a:prstGeom>
+          <a:solidFill>
+            <a:srgbClr val="FFFFFF"/>
+          </a:solidFill>
+          <a:ln w="9525">
+            <a:solidFill>
+              <a:srgbClr val="C5CDC7"/>
+            </a:solidFill>
+          </a:ln>
+          <a:effectLst/>
+        </p:spPr>
+        <p:style>
+          <a:lnRef idx="1">
+            <a:schemeClr val="accent1"/>
+          </a:lnRef>
+          <a:fillRef idx="3">
+            <a:schemeClr val="accent1"/>
+          </a:fillRef>
+          <a:effectRef idx="2">
+            <a:schemeClr val="accent1"/>
+          </a:effectRef>
+          <a:fontRef idx="minor">
+            <a:schemeClr val="lt1"/>
+          </a:fontRef>
+        </p:style>
+        <p:txBody>
+          <a:bodyPr rtlCol="0" anchor="ctr"/>
+          <a:lstStyle/>
+          <a:p>
+            <a:pPr algn="ctr"/>
+          </a:p>
+        </p:txBody>
+      </p:sp>
+      <p:pic>
+        <p:nvPicPr>
+          <p:cNvPr id="13" name="Picture 12" descr="guard.png"/>
+          <p:cNvPicPr>
+            <a:picLocks noChangeAspect="1"/>
+          </p:cNvPicPr>
+          <p:nvPr/>
+        </p:nvPicPr>
+        <p:blipFill>
+          <a:blip r:embed="rId3"/>
+          <a:stretch>
+            <a:fillRect/>
+          </a:stretch>
+        </p:blipFill>
+        <p:spPr>
+          <a:xfrm>
+            <a:off x="7758781" y="1335024"/>
+            <a:ext cx="2395074" cy="3529584"/>
+          </a:xfrm>
+          <a:prstGeom prst="rect">
+            <a:avLst/>
+          </a:prstGeom>
+        </p:spPr>
+      </p:pic>
+      <p:sp>
+        <p:nvSpPr>
+          <p:cNvPr id="14" name="TextBox 13"/>
+          <p:cNvSpPr txBox="1"/>
+          <p:nvPr/>
+        </p:nvSpPr>
+        <p:spPr>
+          <a:xfrm>
+            <a:off x="6507327" y="4992624"/>
+            <a:ext cx="4897983" cy="457200"/>
+          </a:xfrm>
+          <a:prstGeom prst="rect">
+            <a:avLst/>
+          </a:prstGeom>
+          <a:noFill/>
+        </p:spPr>
+        <p:txBody>
+          <a:bodyPr wrap="square" lIns="0" rIns="0" tIns="0" bIns="0">
+            <a:spAutoFit/>
+          </a:bodyPr>
+          <a:lstStyle/>
+          <a:p>
+            <a:pPr>
+              <a:lnSpc>
+                <a:spcPct val="130000"/>
+              </a:lnSpc>
+            </a:pPr>
+            <a:r>
+              <a:rPr sz="950" b="1">
+                <a:solidFill>
+                  <a:srgbClr val="15191A"/>
+                </a:solidFill>
+                <a:latin typeface="Helvetica Neue"/>
+              </a:rPr>
+              <a:t>Fuera de alcance.</a:t>
+            </a:r>
+            <a:r>
+              <a:rPr sz="950" b="0">
+                <a:solidFill>
+                  <a:srgbClr val="5D6663"/>
+                </a:solidFill>
+                <a:latin typeface="Helvetica Neue"/>
+              </a:rPr>
+              <a:t> Tema ausente del SGC: no inventa, lo dice, deriva a Calidad y marca la respuesta como no verificada.</a:t>
+            </a:r>
+          </a:p>
+        </p:txBody>
+      </p:sp>
+    </p:spTree>
+  </p:cSld>
+  <p:clrMapOvr>
+    <a:masterClrMapping/>
+  </p:clrMapOvr>
+</p:sld>
+</file>
+
+<file path=ppt/slides/slide13.xml><?xml version="1.0" encoding="utf-8"?>
+<p:sld xmlns:a="http://schemas.openxmlformats.org/drawingml/2006/main" xmlns:p="http://schemas.openxmlformats.org/presentationml/2006/main" xmlns:r="http://schemas.openxmlformats.org/officeDocument/2006/relationships">
+  <p:cSld>
+    <p:bg>
+      <p:bgPr>
+        <a:solidFill>
+          <a:srgbClr val="F3F5F3"/>
+        </a:solidFill>
+        <a:effectLst/>
+      </p:bgPr>
+    </p:bg>
+    <p:spTree>
+      <p:nvGrpSpPr>
+        <p:cNvPr id="1" name=""/>
+        <p:cNvGrpSpPr/>
+        <p:nvPr/>
+      </p:nvGrpSpPr>
+      <p:grpSpPr/>
+      <p:sp>
+        <p:nvSpPr>
+          <p:cNvPr id="2" name="TextBox 1"/>
+          <p:cNvSpPr txBox="1"/>
+          <p:nvPr/>
+        </p:nvSpPr>
+        <p:spPr>
+          <a:xfrm>
+            <a:off x="566928" y="365760"/>
+            <a:ext cx="3657600" cy="237744"/>
+          </a:xfrm>
+          <a:prstGeom prst="rect">
+            <a:avLst/>
+          </a:prstGeom>
+          <a:noFill/>
+        </p:spPr>
+        <p:txBody>
+          <a:bodyPr wrap="square" lIns="0" rIns="0" tIns="0" bIns="0">
+            <a:spAutoFit/>
+          </a:bodyPr>
+          <a:lstStyle/>
+          <a:p>
+            <a:pPr>
+              <a:lnSpc>
+                <a:spcPct val="128000"/>
+              </a:lnSpc>
+            </a:pPr>
+            <a:r>
+              <a:rPr sz="950" b="1" spc="140">
+                <a:solidFill>
+                  <a:srgbClr val="1D5C3C"/>
+                </a:solidFill>
+                <a:latin typeface="Courier New"/>
+              </a:rPr>
+              <a:t>NORMIA · 13</a:t>
+            </a:r>
+          </a:p>
+        </p:txBody>
+      </p:sp>
+      <p:sp>
+        <p:nvSpPr>
+          <p:cNvPr id="3" name="TextBox 2"/>
+          <p:cNvSpPr txBox="1"/>
+          <p:nvPr/>
+        </p:nvSpPr>
+        <p:spPr>
+          <a:xfrm>
+            <a:off x="4858207" y="365760"/>
+            <a:ext cx="6766560" cy="237744"/>
+          </a:xfrm>
+          <a:prstGeom prst="rect">
+            <a:avLst/>
+          </a:prstGeom>
+          <a:noFill/>
+        </p:spPr>
+        <p:txBody>
+          <a:bodyPr wrap="square" lIns="0" rIns="0" tIns="0" bIns="0">
+            <a:spAutoFit/>
+          </a:bodyPr>
+          <a:lstStyle/>
+          <a:p>
+            <a:pPr algn="r">
+              <a:lnSpc>
+                <a:spcPct val="128000"/>
+              </a:lnSpc>
+            </a:pPr>
+            <a:r>
+              <a:rPr sz="900" b="0" spc="140">
+                <a:solidFill>
+                  <a:srgbClr val="5D6663"/>
+                </a:solidFill>
+                <a:latin typeface="Helvetica Neue"/>
+              </a:rPr>
+              <a:t>RESULTADOS</a:t>
+            </a:r>
+          </a:p>
+        </p:txBody>
+      </p:sp>
+      <p:sp>
+        <p:nvSpPr>
+          <p:cNvPr id="4" name="Rectangle 3"/>
+          <p:cNvSpPr/>
+          <p:nvPr/>
+        </p:nvSpPr>
+        <p:spPr>
+          <a:xfrm>
+            <a:off x="566928" y="640080"/>
+            <a:ext cx="11057839" cy="17780"/>
+          </a:xfrm>
+          <a:prstGeom prst="rect">
+            <a:avLst/>
+          </a:prstGeom>
+          <a:solidFill>
+            <a:srgbClr val="B6BFB8"/>
+          </a:solidFill>
+          <a:ln>
+            <a:noFill/>
+          </a:ln>
+          <a:effectLst/>
+        </p:spPr>
+        <p:style>
+          <a:lnRef idx="1">
+            <a:schemeClr val="accent1"/>
+          </a:lnRef>
+          <a:fillRef idx="3">
+            <a:schemeClr val="accent1"/>
+          </a:fillRef>
+          <a:effectRef idx="2">
+            <a:schemeClr val="accent1"/>
+          </a:effectRef>
+          <a:fontRef idx="minor">
+            <a:schemeClr val="lt1"/>
+          </a:fontRef>
+        </p:style>
+        <p:txBody>
+          <a:bodyPr rtlCol="0" anchor="ctr"/>
+          <a:lstStyle/>
+          <a:p>
+            <a:pPr algn="ctr"/>
+          </a:p>
+        </p:txBody>
+      </p:sp>
+      <p:sp>
+        <p:nvSpPr>
+          <p:cNvPr id="5" name="Rectangle 4"/>
+          <p:cNvSpPr/>
+          <p:nvPr/>
+        </p:nvSpPr>
+        <p:spPr>
+          <a:xfrm>
+            <a:off x="566928" y="6217920"/>
+            <a:ext cx="11057839" cy="11430"/>
+          </a:xfrm>
+          <a:prstGeom prst="rect">
+            <a:avLst/>
+          </a:prstGeom>
+          <a:solidFill>
+            <a:srgbClr val="C5CDC7"/>
+          </a:solidFill>
+          <a:ln>
+            <a:noFill/>
+          </a:ln>
+          <a:effectLst/>
+        </p:spPr>
+        <p:style>
+          <a:lnRef idx="1">
+            <a:schemeClr val="accent1"/>
+          </a:lnRef>
+          <a:fillRef idx="3">
+            <a:schemeClr val="accent1"/>
+          </a:fillRef>
+          <a:effectRef idx="2">
+            <a:schemeClr val="accent1"/>
+          </a:effectRef>
+          <a:fontRef idx="minor">
+            <a:schemeClr val="lt1"/>
+          </a:fontRef>
+        </p:style>
+        <p:txBody>
+          <a:bodyPr rtlCol="0" anchor="ctr"/>
+          <a:lstStyle/>
+          <a:p>
+            <a:pPr algn="ctr"/>
+          </a:p>
+        </p:txBody>
+      </p:sp>
+      <p:sp>
+        <p:nvSpPr>
+          <p:cNvPr id="6" name="TextBox 5"/>
+          <p:cNvSpPr txBox="1"/>
+          <p:nvPr/>
+        </p:nvSpPr>
+        <p:spPr>
+          <a:xfrm>
+            <a:off x="566928" y="6291072"/>
+            <a:ext cx="7315200" cy="219456"/>
+          </a:xfrm>
+          <a:prstGeom prst="rect">
+            <a:avLst/>
+          </a:prstGeom>
+          <a:noFill/>
+        </p:spPr>
+        <p:txBody>
+          <a:bodyPr wrap="square" lIns="0" rIns="0" tIns="0" bIns="0">
+            <a:spAutoFit/>
+          </a:bodyPr>
+          <a:lstStyle/>
+          <a:p>
+            <a:pPr>
+              <a:lnSpc>
+                <a:spcPct val="128000"/>
+              </a:lnSpc>
+            </a:pPr>
+            <a:r>
+              <a:rPr sz="850" b="0" spc="110">
+                <a:solidFill>
+                  <a:srgbClr val="5D6663"/>
+                </a:solidFill>
+                <a:latin typeface="Helvetica Neue"/>
+              </a:rPr>
+              <a:t>GRACIAS</a:t>
+            </a:r>
+          </a:p>
+        </p:txBody>
+      </p:sp>
+      <p:sp>
+        <p:nvSpPr>
+          <p:cNvPr id="7" name="TextBox 6"/>
+          <p:cNvSpPr txBox="1"/>
+          <p:nvPr/>
+        </p:nvSpPr>
+        <p:spPr>
+          <a:xfrm>
+            <a:off x="9613087" y="6291072"/>
+            <a:ext cx="2011680" cy="219456"/>
+          </a:xfrm>
+          <a:prstGeom prst="rect">
+            <a:avLst/>
+          </a:prstGeom>
+          <a:noFill/>
+        </p:spPr>
+        <p:txBody>
+          <a:bodyPr wrap="square" lIns="0" rIns="0" tIns="0" bIns="0">
+            <a:spAutoFit/>
+          </a:bodyPr>
+          <a:lstStyle/>
+          <a:p>
+            <a:pPr algn="r">
+              <a:lnSpc>
+                <a:spcPct val="128000"/>
+              </a:lnSpc>
+            </a:pPr>
+            <a:r>
+              <a:rPr sz="900" b="0" spc="110">
+                <a:solidFill>
+                  <a:srgbClr val="5D6663"/>
+                </a:solidFill>
+                <a:latin typeface="Courier New"/>
+              </a:rPr>
+              <a:t>13 / 13</a:t>
             </a:r>
           </a:p>
         </p:txBody>
@@ -6853,7 +8371,7 @@
                 </a:solidFill>
                 <a:latin typeface="Courier New"/>
               </a:rPr>
-              <a:t>02 / 12</a:t>
+              <a:t>02 / 13</a:t>
             </a:r>
           </a:p>
         </p:txBody>
@@ -7636,7 +9154,7 @@
                 </a:solidFill>
                 <a:latin typeface="Courier New"/>
               </a:rPr>
-              <a:t>03 / 12</a:t>
+              <a:t>03 / 13</a:t>
             </a:r>
           </a:p>
         </p:txBody>
@@ -9003,7 +10521,7 @@
                 </a:solidFill>
                 <a:latin typeface="Courier New"/>
               </a:rPr>
-              <a:t>04 / 12</a:t>
+              <a:t>04 / 13</a:t>
             </a:r>
           </a:p>
         </p:txBody>
@@ -9763,7 +11281,7 @@
                 </a:solidFill>
                 <a:latin typeface="Courier New"/>
               </a:rPr>
-              <a:t>05 / 12</a:t>
+              <a:t>05 / 13</a:t>
             </a:r>
           </a:p>
         </p:txBody>
@@ -10766,7 +12284,7 @@
                 </a:solidFill>
                 <a:latin typeface="Courier New"/>
               </a:rPr>
-              <a:t>06 / 12</a:t>
+              <a:t>06 / 13</a:t>
             </a:r>
           </a:p>
         </p:txBody>
@@ -11892,7 +13410,7 @@
                 </a:solidFill>
                 <a:latin typeface="Helvetica Neue"/>
               </a:rPr>
-              <a:t>ARQUITECTURA</a:t>
+              <a:t>SOLUCIÓN · DIFERENCIAL</a:t>
             </a:r>
           </a:p>
         </p:txBody>
@@ -12019,7 +13537,7 @@
                 </a:solidFill>
                 <a:latin typeface="Helvetica Neue"/>
               </a:rPr>
-              <a:t>USUARIO → CANAL → BOT → MODELO → RESPUESTA → ALMACENAMIENTO</a:t>
+              <a:t>DOCE CONTROLES EN TOTAL</a:t>
             </a:r>
           </a:p>
         </p:txBody>
@@ -12058,7 +13576,7 @@
                 </a:solidFill>
                 <a:latin typeface="Courier New"/>
               </a:rPr>
-              <a:t>07 / 12</a:t>
+              <a:t>07 / 13</a:t>
             </a:r>
           </a:p>
         </p:txBody>
@@ -12097,34 +13615,171 @@
                 </a:solidFill>
                 <a:latin typeface="Helvetica Neue"/>
               </a:rPr>
-              <a:t>COMPONENTES</a:t>
-            </a:r>
-          </a:p>
-        </p:txBody>
-      </p:sp>
-      <p:sp>
-        <p:nvSpPr>
-          <p:cNvPr id="9" name="Rounded Rectangle 8"/>
+              <a:t>Y LAS CAPAS QUE NO SE VEN</a:t>
+            </a:r>
+          </a:p>
+        </p:txBody>
+      </p:sp>
+      <p:sp>
+        <p:nvSpPr>
+          <p:cNvPr id="9" name="TextBox 8"/>
+          <p:cNvSpPr txBox="1"/>
+          <p:nvPr/>
+        </p:nvSpPr>
+        <p:spPr>
+          <a:xfrm>
+            <a:off x="566928" y="1152144"/>
+            <a:ext cx="10241280" cy="914400"/>
+          </a:xfrm>
+          <a:prstGeom prst="rect">
+            <a:avLst/>
+          </a:prstGeom>
+          <a:noFill/>
+        </p:spPr>
+        <p:txBody>
+          <a:bodyPr wrap="square" lIns="0" rIns="0" tIns="0" bIns="0">
+            <a:spAutoFit/>
+          </a:bodyPr>
+          <a:lstStyle/>
+          <a:p>
+            <a:pPr>
+              <a:lnSpc>
+                <a:spcPct val="105000"/>
+              </a:lnSpc>
+            </a:pPr>
+            <a:r>
+              <a:rPr sz="3000" b="1">
+                <a:solidFill>
+                  <a:srgbClr val="15191A"/>
+                </a:solidFill>
+                <a:latin typeface="Helvetica Neue"/>
+              </a:rPr>
+              <a:t>Los cuatro descartan. Otros ocho evitan llegar ahí</a:t>
+            </a:r>
+          </a:p>
+        </p:txBody>
+      </p:sp>
+      <p:sp>
+        <p:nvSpPr>
+          <p:cNvPr id="10" name="TextBox 9"/>
+          <p:cNvSpPr txBox="1"/>
+          <p:nvPr/>
+        </p:nvSpPr>
+        <p:spPr>
+          <a:xfrm>
+            <a:off x="566928" y="2316480"/>
+            <a:ext cx="11057839" cy="201168"/>
+          </a:xfrm>
+          <a:prstGeom prst="rect">
+            <a:avLst/>
+          </a:prstGeom>
+          <a:noFill/>
+        </p:spPr>
+        <p:txBody>
+          <a:bodyPr wrap="square" lIns="0" rIns="0" tIns="0" bIns="0">
+            <a:spAutoFit/>
+          </a:bodyPr>
+          <a:lstStyle/>
+          <a:p/>
+        </p:txBody>
+      </p:sp>
+      <p:sp>
+        <p:nvSpPr>
+          <p:cNvPr id="11" name="TextBox 10"/>
+          <p:cNvSpPr txBox="1"/>
+          <p:nvPr/>
+        </p:nvSpPr>
+        <p:spPr>
+          <a:xfrm>
+            <a:off x="566928" y="2316480"/>
+            <a:ext cx="2286000" cy="201168"/>
+          </a:xfrm>
+          <a:prstGeom prst="rect">
+            <a:avLst/>
+          </a:prstGeom>
+          <a:noFill/>
+        </p:spPr>
+        <p:txBody>
+          <a:bodyPr wrap="square" lIns="0" rIns="0" tIns="0" bIns="0">
+            <a:spAutoFit/>
+          </a:bodyPr>
+          <a:lstStyle/>
+          <a:p>
+            <a:pPr>
+              <a:lnSpc>
+                <a:spcPct val="128000"/>
+              </a:lnSpc>
+            </a:pPr>
+            <a:r>
+              <a:rPr sz="850" b="1" spc="130">
+                <a:solidFill>
+                  <a:srgbClr val="5D6663"/>
+                </a:solidFill>
+                <a:latin typeface="Helvetica Neue"/>
+              </a:rPr>
+              <a:t>DÓNDE ACTÚA</a:t>
+            </a:r>
+          </a:p>
+        </p:txBody>
+      </p:sp>
+      <p:sp>
+        <p:nvSpPr>
+          <p:cNvPr id="12" name="TextBox 11"/>
+          <p:cNvSpPr txBox="1"/>
+          <p:nvPr/>
+        </p:nvSpPr>
+        <p:spPr>
+          <a:xfrm>
+            <a:off x="2852928" y="2316480"/>
+            <a:ext cx="8778240" cy="201168"/>
+          </a:xfrm>
+          <a:prstGeom prst="rect">
+            <a:avLst/>
+          </a:prstGeom>
+          <a:noFill/>
+        </p:spPr>
+        <p:txBody>
+          <a:bodyPr wrap="square" lIns="0" rIns="0" tIns="0" bIns="0">
+            <a:spAutoFit/>
+          </a:bodyPr>
+          <a:lstStyle/>
+          <a:p>
+            <a:pPr>
+              <a:lnSpc>
+                <a:spcPct val="128000"/>
+              </a:lnSpc>
+            </a:pPr>
+            <a:r>
+              <a:rPr sz="850" b="1" spc="130">
+                <a:solidFill>
+                  <a:srgbClr val="5D6663"/>
+                </a:solidFill>
+                <a:latin typeface="Helvetica Neue"/>
+              </a:rPr>
+              <a:t>QUÉ IMPIDE</a:t>
+            </a:r>
+          </a:p>
+        </p:txBody>
+      </p:sp>
+      <p:sp>
+        <p:nvSpPr>
+          <p:cNvPr id="13" name="Rectangle 12"/>
           <p:cNvSpPr/>
           <p:nvPr/>
         </p:nvSpPr>
         <p:spPr>
           <a:xfrm>
-            <a:off x="566928" y="1188720"/>
-            <a:ext cx="11057839" cy="4818888"/>
-          </a:xfrm>
-          <a:prstGeom prst="roundRect">
-            <a:avLst>
-              <a:gd name="adj" fmla="val 3000"/>
-            </a:avLst>
+            <a:off x="566928" y="2554224"/>
+            <a:ext cx="11057839" cy="16510"/>
+          </a:xfrm>
+          <a:prstGeom prst="rect">
+            <a:avLst/>
           </a:prstGeom>
           <a:solidFill>
-            <a:srgbClr val="FFFFFF"/>
+            <a:srgbClr val="B6BFB8"/>
           </a:solidFill>
-          <a:ln w="9525">
-            <a:solidFill>
-              <a:srgbClr val="C5CDC7"/>
-            </a:solidFill>
+          <a:ln>
+            <a:noFill/>
           </a:ln>
           <a:effectLst/>
         </p:spPr>
@@ -12150,75 +13805,825 @@
           </a:p>
         </p:txBody>
       </p:sp>
-      <p:pic>
-        <p:nvPicPr>
-          <p:cNvPr id="10" name="Picture 9" descr="01-arquitectura.png"/>
-          <p:cNvPicPr>
-            <a:picLocks noChangeAspect="1"/>
-          </p:cNvPicPr>
-          <p:nvPr/>
-        </p:nvPicPr>
-        <p:blipFill>
-          <a:blip r:embed="rId2"/>
-          <a:stretch>
-            <a:fillRect/>
-          </a:stretch>
-        </p:blipFill>
-        <p:spPr>
-          <a:xfrm>
-            <a:off x="3261370" y="1389888"/>
-            <a:ext cx="5668954" cy="4160520"/>
-          </a:xfrm>
-          <a:prstGeom prst="rect">
-            <a:avLst/>
-          </a:prstGeom>
-        </p:spPr>
-      </p:pic>
-      <p:sp>
-        <p:nvSpPr>
-          <p:cNvPr id="11" name="TextBox 10"/>
-          <p:cNvSpPr txBox="1"/>
-          <p:nvPr/>
-        </p:nvSpPr>
-        <p:spPr>
-          <a:xfrm>
-            <a:off x="822960" y="5660136"/>
-            <a:ext cx="10545775" cy="310896"/>
-          </a:xfrm>
-          <a:prstGeom prst="rect">
-            <a:avLst/>
-          </a:prstGeom>
-          <a:noFill/>
-        </p:spPr>
-        <p:txBody>
-          <a:bodyPr wrap="square" lIns="0" rIns="0" tIns="0" bIns="0">
-            <a:spAutoFit/>
-          </a:bodyPr>
-          <a:lstStyle/>
-          <a:p>
-            <a:pPr>
-              <a:lnSpc>
-                <a:spcPct val="130000"/>
-              </a:lnSpc>
-            </a:pPr>
-            <a:r>
-              <a:rPr sz="1000" b="1">
+      <p:sp>
+        <p:nvSpPr>
+          <p:cNvPr id="14" name="TextBox 13"/>
+          <p:cNvSpPr txBox="1"/>
+          <p:nvPr/>
+        </p:nvSpPr>
+        <p:spPr>
+          <a:xfrm>
+            <a:off x="566928" y="2700528"/>
+            <a:ext cx="2121408" cy="502920"/>
+          </a:xfrm>
+          <a:prstGeom prst="rect">
+            <a:avLst/>
+          </a:prstGeom>
+          <a:noFill/>
+        </p:spPr>
+        <p:txBody>
+          <a:bodyPr wrap="square" lIns="0" rIns="0" tIns="0" bIns="0">
+            <a:spAutoFit/>
+          </a:bodyPr>
+          <a:lstStyle/>
+          <a:p>
+            <a:pPr>
+              <a:lnSpc>
+                <a:spcPct val="124000"/>
+              </a:lnSpc>
+            </a:pPr>
+            <a:r>
+              <a:rPr sz="1050" b="1">
                 <a:solidFill>
                   <a:srgbClr val="15191A"/>
                 </a:solidFill>
                 <a:latin typeface="Helvetica Neue"/>
               </a:rPr>
-              <a:t>Nada sale de la máquina.</a:t>
-            </a:r>
-            <a:r>
-              <a:rPr sz="1000" b="0">
-                <a:solidFill>
-                  <a:srgbClr val="5D6663"/>
-                </a:solidFill>
-                <a:latin typeface="Helvetica Neue"/>
-              </a:rPr>
-              <a:t> El modelo corre en Ollama y los embeddings en local; PostgreSQL guarda documentos, cláusulas, conversaciones, hallazgos y la traza de auditoría.</a:t>
-            </a:r>
+              <a:t>Antes de buscar</a:t>
+            </a:r>
+          </a:p>
+        </p:txBody>
+      </p:sp>
+      <p:sp>
+        <p:nvSpPr>
+          <p:cNvPr id="15" name="TextBox 14"/>
+          <p:cNvSpPr txBox="1"/>
+          <p:nvPr/>
+        </p:nvSpPr>
+        <p:spPr>
+          <a:xfrm>
+            <a:off x="2852928" y="2700528"/>
+            <a:ext cx="8613648" cy="502920"/>
+          </a:xfrm>
+          <a:prstGeom prst="rect">
+            <a:avLst/>
+          </a:prstGeom>
+          <a:noFill/>
+        </p:spPr>
+        <p:txBody>
+          <a:bodyPr wrap="square" lIns="0" rIns="0" tIns="0" bIns="0">
+            <a:spAutoFit/>
+          </a:bodyPr>
+          <a:lstStyle/>
+          <a:p>
+            <a:pPr>
+              <a:lnSpc>
+                <a:spcPct val="124000"/>
+              </a:lnSpc>
+            </a:pPr>
+            <a:r>
+              <a:rPr sz="1050" b="0">
+                <a:solidFill>
+                  <a:srgbClr val="15191A"/>
+                </a:solidFill>
+                <a:latin typeface="Helvetica Neue"/>
+              </a:rPr>
+              <a:t>La consulta SQL filtra por </a:t>
+            </a:r>
+            <a:r>
+              <a:rPr sz="1050" b="1">
+                <a:solidFill>
+                  <a:srgbClr val="15191A"/>
+                </a:solidFill>
+                <a:latin typeface="Helvetica Neue"/>
+              </a:rPr>
+              <a:t>documento vigente</a:t>
+            </a:r>
+            <a:r>
+              <a:rPr sz="1050" b="0">
+                <a:solidFill>
+                  <a:srgbClr val="15191A"/>
+                </a:solidFill>
+                <a:latin typeface="Helvetica Neue"/>
+              </a:rPr>
+              <a:t>. Un documento obsoleto no puede aparecer aunque sea el más parecido: es el control más barato y el que más importa en auditoría.</a:t>
+            </a:r>
+          </a:p>
+        </p:txBody>
+      </p:sp>
+      <p:sp>
+        <p:nvSpPr>
+          <p:cNvPr id="16" name="Rectangle 15"/>
+          <p:cNvSpPr/>
+          <p:nvPr/>
+        </p:nvSpPr>
+        <p:spPr>
+          <a:xfrm>
+            <a:off x="566928" y="3148584"/>
+            <a:ext cx="11057839" cy="8890"/>
+          </a:xfrm>
+          <a:prstGeom prst="rect">
+            <a:avLst/>
+          </a:prstGeom>
+          <a:solidFill>
+            <a:srgbClr val="C5CDC7"/>
+          </a:solidFill>
+          <a:ln>
+            <a:noFill/>
+          </a:ln>
+          <a:effectLst/>
+        </p:spPr>
+        <p:style>
+          <a:lnRef idx="1">
+            <a:schemeClr val="accent1"/>
+          </a:lnRef>
+          <a:fillRef idx="3">
+            <a:schemeClr val="accent1"/>
+          </a:fillRef>
+          <a:effectRef idx="2">
+            <a:schemeClr val="accent1"/>
+          </a:effectRef>
+          <a:fontRef idx="minor">
+            <a:schemeClr val="lt1"/>
+          </a:fontRef>
+        </p:style>
+        <p:txBody>
+          <a:bodyPr rtlCol="0" anchor="ctr"/>
+          <a:lstStyle/>
+          <a:p>
+            <a:pPr algn="ctr"/>
+          </a:p>
+        </p:txBody>
+      </p:sp>
+      <p:sp>
+        <p:nvSpPr>
+          <p:cNvPr id="17" name="TextBox 16"/>
+          <p:cNvSpPr txBox="1"/>
+          <p:nvPr/>
+        </p:nvSpPr>
+        <p:spPr>
+          <a:xfrm>
+            <a:off x="566928" y="3276600"/>
+            <a:ext cx="2121408" cy="502920"/>
+          </a:xfrm>
+          <a:prstGeom prst="rect">
+            <a:avLst/>
+          </a:prstGeom>
+          <a:noFill/>
+        </p:spPr>
+        <p:txBody>
+          <a:bodyPr wrap="square" lIns="0" rIns="0" tIns="0" bIns="0">
+            <a:spAutoFit/>
+          </a:bodyPr>
+          <a:lstStyle/>
+          <a:p>
+            <a:pPr>
+              <a:lnSpc>
+                <a:spcPct val="124000"/>
+              </a:lnSpc>
+            </a:pPr>
+            <a:r>
+              <a:rPr sz="1050" b="1">
+                <a:solidFill>
+                  <a:srgbClr val="15191A"/>
+                </a:solidFill>
+                <a:latin typeface="Helvetica Neue"/>
+              </a:rPr>
+              <a:t>Al recuperar</a:t>
+            </a:r>
+          </a:p>
+        </p:txBody>
+      </p:sp>
+      <p:sp>
+        <p:nvSpPr>
+          <p:cNvPr id="18" name="TextBox 17"/>
+          <p:cNvSpPr txBox="1"/>
+          <p:nvPr/>
+        </p:nvSpPr>
+        <p:spPr>
+          <a:xfrm>
+            <a:off x="2852928" y="3276600"/>
+            <a:ext cx="8613648" cy="502920"/>
+          </a:xfrm>
+          <a:prstGeom prst="rect">
+            <a:avLst/>
+          </a:prstGeom>
+          <a:noFill/>
+        </p:spPr>
+        <p:txBody>
+          <a:bodyPr wrap="square" lIns="0" rIns="0" tIns="0" bIns="0">
+            <a:spAutoFit/>
+          </a:bodyPr>
+          <a:lstStyle/>
+          <a:p>
+            <a:pPr>
+              <a:lnSpc>
+                <a:spcPct val="124000"/>
+              </a:lnSpc>
+            </a:pPr>
+            <a:r>
+              <a:rPr sz="1050" b="0">
+                <a:solidFill>
+                  <a:srgbClr val="15191A"/>
+                </a:solidFill>
+                <a:latin typeface="Helvetica Neue"/>
+              </a:rPr>
+              <a:t>Umbral propio y más estricto para las preguntas frecuentes. Y penalización a las cláusulas de trámite —Objetivo, Alcance, Responsabilidades— que existen en todos los documentos y ganarían siempre.</a:t>
+            </a:r>
+          </a:p>
+        </p:txBody>
+      </p:sp>
+      <p:sp>
+        <p:nvSpPr>
+          <p:cNvPr id="19" name="Rectangle 18"/>
+          <p:cNvSpPr/>
+          <p:nvPr/>
+        </p:nvSpPr>
+        <p:spPr>
+          <a:xfrm>
+            <a:off x="566928" y="3724656"/>
+            <a:ext cx="11057839" cy="8890"/>
+          </a:xfrm>
+          <a:prstGeom prst="rect">
+            <a:avLst/>
+          </a:prstGeom>
+          <a:solidFill>
+            <a:srgbClr val="C5CDC7"/>
+          </a:solidFill>
+          <a:ln>
+            <a:noFill/>
+          </a:ln>
+          <a:effectLst/>
+        </p:spPr>
+        <p:style>
+          <a:lnRef idx="1">
+            <a:schemeClr val="accent1"/>
+          </a:lnRef>
+          <a:fillRef idx="3">
+            <a:schemeClr val="accent1"/>
+          </a:fillRef>
+          <a:effectRef idx="2">
+            <a:schemeClr val="accent1"/>
+          </a:effectRef>
+          <a:fontRef idx="minor">
+            <a:schemeClr val="lt1"/>
+          </a:fontRef>
+        </p:style>
+        <p:txBody>
+          <a:bodyPr rtlCol="0" anchor="ctr"/>
+          <a:lstStyle/>
+          <a:p>
+            <a:pPr algn="ctr"/>
+          </a:p>
+        </p:txBody>
+      </p:sp>
+      <p:sp>
+        <p:nvSpPr>
+          <p:cNvPr id="20" name="TextBox 19"/>
+          <p:cNvSpPr txBox="1"/>
+          <p:nvPr/>
+        </p:nvSpPr>
+        <p:spPr>
+          <a:xfrm>
+            <a:off x="566928" y="3852672"/>
+            <a:ext cx="2121408" cy="502920"/>
+          </a:xfrm>
+          <a:prstGeom prst="rect">
+            <a:avLst/>
+          </a:prstGeom>
+          <a:noFill/>
+        </p:spPr>
+        <p:txBody>
+          <a:bodyPr wrap="square" lIns="0" rIns="0" tIns="0" bIns="0">
+            <a:spAutoFit/>
+          </a:bodyPr>
+          <a:lstStyle/>
+          <a:p>
+            <a:pPr>
+              <a:lnSpc>
+                <a:spcPct val="124000"/>
+              </a:lnSpc>
+            </a:pPr>
+            <a:r>
+              <a:rPr sz="1050" b="1">
+                <a:solidFill>
+                  <a:srgbClr val="15191A"/>
+                </a:solidFill>
+                <a:latin typeface="Helvetica Neue"/>
+              </a:rPr>
+              <a:t>Sobre lo que escribe</a:t>
+            </a:r>
+          </a:p>
+        </p:txBody>
+      </p:sp>
+      <p:sp>
+        <p:nvSpPr>
+          <p:cNvPr id="21" name="TextBox 20"/>
+          <p:cNvSpPr txBox="1"/>
+          <p:nvPr/>
+        </p:nvSpPr>
+        <p:spPr>
+          <a:xfrm>
+            <a:off x="2852928" y="3852672"/>
+            <a:ext cx="8613648" cy="502920"/>
+          </a:xfrm>
+          <a:prstGeom prst="rect">
+            <a:avLst/>
+          </a:prstGeom>
+          <a:noFill/>
+        </p:spPr>
+        <p:txBody>
+          <a:bodyPr wrap="square" lIns="0" rIns="0" tIns="0" bIns="0">
+            <a:spAutoFit/>
+          </a:bodyPr>
+          <a:lstStyle/>
+          <a:p>
+            <a:pPr>
+              <a:lnSpc>
+                <a:spcPct val="124000"/>
+              </a:lnSpc>
+            </a:pPr>
+            <a:r>
+              <a:rPr sz="1050" b="0">
+                <a:solidFill>
+                  <a:srgbClr val="15191A"/>
+                </a:solidFill>
+                <a:latin typeface="Helvetica Neue"/>
+              </a:rPr>
+              <a:t>Se detecta cuando el modelo </a:t>
+            </a:r>
+            <a:r>
+              <a:rPr sz="1050" b="1">
+                <a:solidFill>
+                  <a:srgbClr val="15191A"/>
+                </a:solidFill>
+                <a:latin typeface="Helvetica Neue"/>
+              </a:rPr>
+              <a:t>repite sus propias instrucciones</a:t>
+            </a:r>
+            <a:r>
+              <a:rPr sz="1050" b="0">
+                <a:solidFill>
+                  <a:srgbClr val="15191A"/>
+                </a:solidFill>
+                <a:latin typeface="Helvetica Neue"/>
+              </a:rPr>
+              <a:t> en vez de responder, y cuando escribe la llamada a una herramienta dentro del texto. Ambas cosas pasaron; ninguna llega al usuario.</a:t>
+            </a:r>
+          </a:p>
+        </p:txBody>
+      </p:sp>
+      <p:sp>
+        <p:nvSpPr>
+          <p:cNvPr id="22" name="Rectangle 21"/>
+          <p:cNvSpPr/>
+          <p:nvPr/>
+        </p:nvSpPr>
+        <p:spPr>
+          <a:xfrm>
+            <a:off x="566928" y="4300728"/>
+            <a:ext cx="11057839" cy="8890"/>
+          </a:xfrm>
+          <a:prstGeom prst="rect">
+            <a:avLst/>
+          </a:prstGeom>
+          <a:solidFill>
+            <a:srgbClr val="C5CDC7"/>
+          </a:solidFill>
+          <a:ln>
+            <a:noFill/>
+          </a:ln>
+          <a:effectLst/>
+        </p:spPr>
+        <p:style>
+          <a:lnRef idx="1">
+            <a:schemeClr val="accent1"/>
+          </a:lnRef>
+          <a:fillRef idx="3">
+            <a:schemeClr val="accent1"/>
+          </a:fillRef>
+          <a:effectRef idx="2">
+            <a:schemeClr val="accent1"/>
+          </a:effectRef>
+          <a:fontRef idx="minor">
+            <a:schemeClr val="lt1"/>
+          </a:fontRef>
+        </p:style>
+        <p:txBody>
+          <a:bodyPr rtlCol="0" anchor="ctr"/>
+          <a:lstStyle/>
+          <a:p>
+            <a:pPr algn="ctr"/>
+          </a:p>
+        </p:txBody>
+      </p:sp>
+      <p:sp>
+        <p:nvSpPr>
+          <p:cNvPr id="23" name="TextBox 22"/>
+          <p:cNvSpPr txBox="1"/>
+          <p:nvPr/>
+        </p:nvSpPr>
+        <p:spPr>
+          <a:xfrm>
+            <a:off x="566928" y="4428744"/>
+            <a:ext cx="2121408" cy="502920"/>
+          </a:xfrm>
+          <a:prstGeom prst="rect">
+            <a:avLst/>
+          </a:prstGeom>
+          <a:noFill/>
+        </p:spPr>
+        <p:txBody>
+          <a:bodyPr wrap="square" lIns="0" rIns="0" tIns="0" bIns="0">
+            <a:spAutoFit/>
+          </a:bodyPr>
+          <a:lstStyle/>
+          <a:p>
+            <a:pPr>
+              <a:lnSpc>
+                <a:spcPct val="124000"/>
+              </a:lnSpc>
+            </a:pPr>
+            <a:r>
+              <a:rPr sz="1050" b="1">
+                <a:solidFill>
+                  <a:srgbClr val="15191A"/>
+                </a:solidFill>
+                <a:latin typeface="Helvetica Neue"/>
+              </a:rPr>
+              <a:t>Correr ≠ encontrar</a:t>
+            </a:r>
+          </a:p>
+        </p:txBody>
+      </p:sp>
+      <p:sp>
+        <p:nvSpPr>
+          <p:cNvPr id="24" name="TextBox 23"/>
+          <p:cNvSpPr txBox="1"/>
+          <p:nvPr/>
+        </p:nvSpPr>
+        <p:spPr>
+          <a:xfrm>
+            <a:off x="2852928" y="4428744"/>
+            <a:ext cx="8613648" cy="502920"/>
+          </a:xfrm>
+          <a:prstGeom prst="rect">
+            <a:avLst/>
+          </a:prstGeom>
+          <a:noFill/>
+        </p:spPr>
+        <p:txBody>
+          <a:bodyPr wrap="square" lIns="0" rIns="0" tIns="0" bIns="0">
+            <a:spAutoFit/>
+          </a:bodyPr>
+          <a:lstStyle/>
+          <a:p>
+            <a:pPr>
+              <a:lnSpc>
+                <a:spcPct val="124000"/>
+              </a:lnSpc>
+            </a:pPr>
+            <a:r>
+              <a:rPr sz="1050" b="0">
+                <a:solidFill>
+                  <a:srgbClr val="15191A"/>
+                </a:solidFill>
+                <a:latin typeface="Helvetica Neue"/>
+              </a:rPr>
+              <a:t>Una herramienta que devuelve lista vacía </a:t>
+            </a:r>
+            <a:r>
+              <a:rPr sz="1050" b="1">
+                <a:solidFill>
+                  <a:srgbClr val="15191A"/>
+                </a:solidFill>
+                <a:latin typeface="Helvetica Neue"/>
+              </a:rPr>
+              <a:t>no cuenta como respaldo</a:t>
+            </a:r>
+            <a:r>
+              <a:rPr sz="1050" b="0">
+                <a:solidFill>
+                  <a:srgbClr val="15191A"/>
+                </a:solidFill>
+                <a:latin typeface="Helvetica Neue"/>
+              </a:rPr>
+              <a:t>. Sin esto, buscar un tema inexistente desactivaba el control de fundamentación y el bot prometía derivar a Calidad sin registrar nada.</a:t>
+            </a:r>
+          </a:p>
+        </p:txBody>
+      </p:sp>
+      <p:sp>
+        <p:nvSpPr>
+          <p:cNvPr id="25" name="Rectangle 24"/>
+          <p:cNvSpPr/>
+          <p:nvPr/>
+        </p:nvSpPr>
+        <p:spPr>
+          <a:xfrm>
+            <a:off x="566928" y="4876800"/>
+            <a:ext cx="11057839" cy="8890"/>
+          </a:xfrm>
+          <a:prstGeom prst="rect">
+            <a:avLst/>
+          </a:prstGeom>
+          <a:solidFill>
+            <a:srgbClr val="C5CDC7"/>
+          </a:solidFill>
+          <a:ln>
+            <a:noFill/>
+          </a:ln>
+          <a:effectLst/>
+        </p:spPr>
+        <p:style>
+          <a:lnRef idx="1">
+            <a:schemeClr val="accent1"/>
+          </a:lnRef>
+          <a:fillRef idx="3">
+            <a:schemeClr val="accent1"/>
+          </a:fillRef>
+          <a:effectRef idx="2">
+            <a:schemeClr val="accent1"/>
+          </a:effectRef>
+          <a:fontRef idx="minor">
+            <a:schemeClr val="lt1"/>
+          </a:fontRef>
+        </p:style>
+        <p:txBody>
+          <a:bodyPr rtlCol="0" anchor="ctr"/>
+          <a:lstStyle/>
+          <a:p>
+            <a:pPr algn="ctr"/>
+          </a:p>
+        </p:txBody>
+      </p:sp>
+      <p:sp>
+        <p:nvSpPr>
+          <p:cNvPr id="26" name="TextBox 25"/>
+          <p:cNvSpPr txBox="1"/>
+          <p:nvPr/>
+        </p:nvSpPr>
+        <p:spPr>
+          <a:xfrm>
+            <a:off x="566928" y="5004816"/>
+            <a:ext cx="2121408" cy="502920"/>
+          </a:xfrm>
+          <a:prstGeom prst="rect">
+            <a:avLst/>
+          </a:prstGeom>
+          <a:noFill/>
+        </p:spPr>
+        <p:txBody>
+          <a:bodyPr wrap="square" lIns="0" rIns="0" tIns="0" bIns="0">
+            <a:spAutoFit/>
+          </a:bodyPr>
+          <a:lstStyle/>
+          <a:p>
+            <a:pPr>
+              <a:lnSpc>
+                <a:spcPct val="124000"/>
+              </a:lnSpc>
+            </a:pPr>
+            <a:r>
+              <a:rPr sz="1050" b="1">
+                <a:solidFill>
+                  <a:srgbClr val="15191A"/>
+                </a:solidFill>
+                <a:latin typeface="Helvetica Neue"/>
+              </a:rPr>
+              <a:t>Sobre los datos</a:t>
+            </a:r>
+          </a:p>
+        </p:txBody>
+      </p:sp>
+      <p:sp>
+        <p:nvSpPr>
+          <p:cNvPr id="27" name="TextBox 26"/>
+          <p:cNvSpPr txBox="1"/>
+          <p:nvPr/>
+        </p:nvSpPr>
+        <p:spPr>
+          <a:xfrm>
+            <a:off x="2852928" y="5004816"/>
+            <a:ext cx="8613648" cy="502920"/>
+          </a:xfrm>
+          <a:prstGeom prst="rect">
+            <a:avLst/>
+          </a:prstGeom>
+          <a:noFill/>
+        </p:spPr>
+        <p:txBody>
+          <a:bodyPr wrap="square" lIns="0" rIns="0" tIns="0" bIns="0">
+            <a:spAutoFit/>
+          </a:bodyPr>
+          <a:lstStyle/>
+          <a:p>
+            <a:pPr>
+              <a:lnSpc>
+                <a:spcPct val="124000"/>
+              </a:lnSpc>
+            </a:pPr>
+            <a:r>
+              <a:rPr sz="1050" b="0">
+                <a:solidFill>
+                  <a:srgbClr val="15191A"/>
+                </a:solidFill>
+                <a:latin typeface="Helvetica Neue"/>
+              </a:rPr>
+              <a:t>El FAQ se valida con </a:t>
+            </a:r>
+            <a:r>
+              <a:rPr sz="1050" b="1">
+                <a:solidFill>
+                  <a:srgbClr val="15191A"/>
+                </a:solidFill>
+                <a:latin typeface="Helvetica Neue"/>
+              </a:rPr>
+              <a:t>reglas fijas</a:t>
+            </a:r>
+            <a:r>
+              <a:rPr sz="1050" b="0">
+                <a:solidFill>
+                  <a:srgbClr val="15191A"/>
+                </a:solidFill>
+                <a:latin typeface="Helvetica Neue"/>
+              </a:rPr>
+              <a:t>: se rechaza toda cifra o código que no esté literalmente en la cláusula. Y ampliar un hallazgo no crea uno nuevo, para no duplicar no conformidades.</a:t>
+            </a:r>
+          </a:p>
+        </p:txBody>
+      </p:sp>
+      <p:sp>
+        <p:nvSpPr>
+          <p:cNvPr id="28" name="Rectangle 27"/>
+          <p:cNvSpPr/>
+          <p:nvPr/>
+        </p:nvSpPr>
+        <p:spPr>
+          <a:xfrm>
+            <a:off x="566928" y="5452872"/>
+            <a:ext cx="11057839" cy="8890"/>
+          </a:xfrm>
+          <a:prstGeom prst="rect">
+            <a:avLst/>
+          </a:prstGeom>
+          <a:solidFill>
+            <a:srgbClr val="C5CDC7"/>
+          </a:solidFill>
+          <a:ln>
+            <a:noFill/>
+          </a:ln>
+          <a:effectLst/>
+        </p:spPr>
+        <p:style>
+          <a:lnRef idx="1">
+            <a:schemeClr val="accent1"/>
+          </a:lnRef>
+          <a:fillRef idx="3">
+            <a:schemeClr val="accent1"/>
+          </a:fillRef>
+          <a:effectRef idx="2">
+            <a:schemeClr val="accent1"/>
+          </a:effectRef>
+          <a:fontRef idx="minor">
+            <a:schemeClr val="lt1"/>
+          </a:fontRef>
+        </p:style>
+        <p:txBody>
+          <a:bodyPr rtlCol="0" anchor="ctr"/>
+          <a:lstStyle/>
+          <a:p>
+            <a:pPr algn="ctr"/>
+          </a:p>
+        </p:txBody>
+      </p:sp>
+      <p:sp>
+        <p:nvSpPr>
+          <p:cNvPr id="29" name="TextBox 28"/>
+          <p:cNvSpPr txBox="1"/>
+          <p:nvPr/>
+        </p:nvSpPr>
+        <p:spPr>
+          <a:xfrm>
+            <a:off x="566928" y="5580888"/>
+            <a:ext cx="2121408" cy="502920"/>
+          </a:xfrm>
+          <a:prstGeom prst="rect">
+            <a:avLst/>
+          </a:prstGeom>
+          <a:noFill/>
+        </p:spPr>
+        <p:txBody>
+          <a:bodyPr wrap="square" lIns="0" rIns="0" tIns="0" bIns="0">
+            <a:spAutoFit/>
+          </a:bodyPr>
+          <a:lstStyle/>
+          <a:p>
+            <a:pPr>
+              <a:lnSpc>
+                <a:spcPct val="124000"/>
+              </a:lnSpc>
+            </a:pPr>
+            <a:r>
+              <a:rPr sz="1050" b="1">
+                <a:solidFill>
+                  <a:srgbClr val="15191A"/>
+                </a:solidFill>
+                <a:latin typeface="Helvetica Neue"/>
+              </a:rPr>
+              <a:t>Sobre el servicio</a:t>
+            </a:r>
+          </a:p>
+        </p:txBody>
+      </p:sp>
+      <p:sp>
+        <p:nvSpPr>
+          <p:cNvPr id="30" name="TextBox 29"/>
+          <p:cNvSpPr txBox="1"/>
+          <p:nvPr/>
+        </p:nvSpPr>
+        <p:spPr>
+          <a:xfrm>
+            <a:off x="2852928" y="5580888"/>
+            <a:ext cx="8613648" cy="502920"/>
+          </a:xfrm>
+          <a:prstGeom prst="rect">
+            <a:avLst/>
+          </a:prstGeom>
+          <a:noFill/>
+        </p:spPr>
+        <p:txBody>
+          <a:bodyPr wrap="square" lIns="0" rIns="0" tIns="0" bIns="0">
+            <a:spAutoFit/>
+          </a:bodyPr>
+          <a:lstStyle/>
+          <a:p>
+            <a:pPr>
+              <a:lnSpc>
+                <a:spcPct val="124000"/>
+              </a:lnSpc>
+            </a:pPr>
+            <a:r>
+              <a:rPr sz="1050" b="0">
+                <a:solidFill>
+                  <a:srgbClr val="15191A"/>
+                </a:solidFill>
+                <a:latin typeface="Helvetica Neue"/>
+              </a:rPr>
+              <a:t>Los tiempos de espera </a:t>
+            </a:r>
+            <a:r>
+              <a:rPr sz="1050" b="1">
+                <a:solidFill>
+                  <a:srgbClr val="15191A"/>
+                </a:solidFill>
+                <a:latin typeface="Helvetica Neue"/>
+              </a:rPr>
+              <a:t>no se reintentan</a:t>
+            </a:r>
+            <a:r>
+              <a:rPr sz="1050" b="0">
+                <a:solidFill>
+                  <a:srgbClr val="15191A"/>
+                </a:solidFill>
+                <a:latin typeface="Helvetica Neue"/>
+              </a:rPr>
+              <a:t> —si colgó 45 s, volverá a colgar— y tras tres fallos seguidos se falla de inmediato durante un minuto en vez de que cada usuario pague la espera completa.</a:t>
+            </a:r>
+          </a:p>
+        </p:txBody>
+      </p:sp>
+      <p:sp>
+        <p:nvSpPr>
+          <p:cNvPr id="31" name="Rectangle 30"/>
+          <p:cNvSpPr/>
+          <p:nvPr/>
+        </p:nvSpPr>
+        <p:spPr>
+          <a:xfrm>
+            <a:off x="566928" y="6028944"/>
+            <a:ext cx="11057839" cy="8890"/>
+          </a:xfrm>
+          <a:prstGeom prst="rect">
+            <a:avLst/>
+          </a:prstGeom>
+          <a:solidFill>
+            <a:srgbClr val="C5CDC7"/>
+          </a:solidFill>
+          <a:ln>
+            <a:noFill/>
+          </a:ln>
+          <a:effectLst/>
+        </p:spPr>
+        <p:style>
+          <a:lnRef idx="1">
+            <a:schemeClr val="accent1"/>
+          </a:lnRef>
+          <a:fillRef idx="3">
+            <a:schemeClr val="accent1"/>
+          </a:fillRef>
+          <a:effectRef idx="2">
+            <a:schemeClr val="accent1"/>
+          </a:effectRef>
+          <a:fontRef idx="minor">
+            <a:schemeClr val="lt1"/>
+          </a:fontRef>
+        </p:style>
+        <p:txBody>
+          <a:bodyPr rtlCol="0" anchor="ctr"/>
+          <a:lstStyle/>
+          <a:p>
+            <a:pPr algn="ctr"/>
           </a:p>
         </p:txBody>
       </p:sp>
@@ -12321,7 +14726,7 @@
                 </a:solidFill>
                 <a:latin typeface="Helvetica Neue"/>
               </a:rPr>
-              <a:t>ARQUITECTURA · FLUJO</a:t>
+              <a:t>ARQUITECTURA</a:t>
             </a:r>
           </a:p>
         </p:txBody>
@@ -12448,7 +14853,7 @@
                 </a:solidFill>
                 <a:latin typeface="Helvetica Neue"/>
               </a:rPr>
-              <a:t>ROJO: ESCALA · VERDE: RESPONDE</a:t>
+              <a:t>USUARIO → CANAL → BOT → MODELO → RESPUESTA → ALMACENAMIENTO</a:t>
             </a:r>
           </a:p>
         </p:txBody>
@@ -12487,7 +14892,7 @@
                 </a:solidFill>
                 <a:latin typeface="Courier New"/>
               </a:rPr>
-              <a:t>08 / 12</a:t>
+              <a:t>08 / 13</a:t>
             </a:r>
           </a:p>
         </p:txBody>
@@ -12500,7 +14905,7 @@
         </p:nvSpPr>
         <p:spPr>
           <a:xfrm>
-            <a:off x="566928" y="1234440"/>
+            <a:off x="566928" y="841248"/>
             <a:ext cx="5486400" cy="219456"/>
           </a:xfrm>
           <a:prstGeom prst="rect">
@@ -12526,7 +14931,7 @@
                 </a:solidFill>
                 <a:latin typeface="Helvetica Neue"/>
               </a:rPr>
-              <a:t>FLUJO DE UNA CONSULTA</a:t>
+              <a:t>COMPONENTES</a:t>
             </a:r>
           </a:p>
         </p:txBody>
@@ -12539,8 +14944,8 @@
         </p:nvSpPr>
         <p:spPr>
           <a:xfrm>
-            <a:off x="566928" y="1728216"/>
-            <a:ext cx="11057839" cy="2438944"/>
+            <a:off x="566928" y="1188720"/>
+            <a:ext cx="11057839" cy="4818888"/>
           </a:xfrm>
           <a:prstGeom prst="roundRect">
             <a:avLst>
@@ -12581,7 +14986,7 @@
       </p:sp>
       <p:pic>
         <p:nvPicPr>
-          <p:cNvPr id="10" name="Picture 9" descr="02-flujo-consulta-horizontal.png"/>
+          <p:cNvPr id="10" name="Picture 9" descr="01-arquitectura.png"/>
           <p:cNvPicPr>
             <a:picLocks noChangeAspect="1"/>
           </p:cNvPicPr>
@@ -12595,8 +15000,8 @@
         </p:blipFill>
         <p:spPr>
           <a:xfrm>
-            <a:off x="795528" y="1929384"/>
-            <a:ext cx="10600639" cy="1780576"/>
+            <a:off x="3261370" y="1389888"/>
+            <a:ext cx="5668954" cy="4160520"/>
           </a:xfrm>
           <a:prstGeom prst="rect">
             <a:avLst/>
@@ -12611,7 +15016,7 @@
         </p:nvSpPr>
         <p:spPr>
           <a:xfrm>
-            <a:off x="822960" y="3819688"/>
+            <a:off x="822960" y="5660136"/>
             <a:ext cx="10545775" cy="310896"/>
           </a:xfrm>
           <a:prstGeom prst="rect">
@@ -12631,31 +15036,22 @@
               </a:lnSpc>
             </a:pPr>
             <a:r>
+              <a:rPr sz="1000" b="1">
+                <a:solidFill>
+                  <a:srgbClr val="15191A"/>
+                </a:solidFill>
+                <a:latin typeface="Helvetica Neue"/>
+              </a:rPr>
+              <a:t>Nada sale de la máquina.</a:t>
+            </a:r>
+            <a:r>
               <a:rPr sz="1000" b="0">
                 <a:solidFill>
                   <a:srgbClr val="5D6663"/>
                 </a:solidFill>
                 <a:latin typeface="Helvetica Neue"/>
               </a:rPr>
-              <a:t>La pregunta se compara </a:t>
-            </a:r>
-            <a:r>
-              <a:rPr sz="1000" b="1">
-                <a:solidFill>
-                  <a:srgbClr val="15191A"/>
-                </a:solidFill>
-                <a:latin typeface="Helvetica Neue"/>
-              </a:rPr>
-              <a:t>a la vez</a:t>
-            </a:r>
-            <a:r>
-              <a:rPr sz="1000" b="0">
-                <a:solidFill>
-                  <a:srgbClr val="5D6663"/>
-                </a:solidFill>
-                <a:latin typeface="Helvetica Neue"/>
-              </a:rPr>
-              <a:t> con las preguntas frecuentes y con las cláusulas vigentes. Después, cuatro puntos de control: en cualquiera de ellos la respuesta se descarta y la consulta pasa a la cola de Calidad.</a:t>
+              <a:t> El modelo corre en Ollama y los embeddings en local; PostgreSQL guarda documentos, cláusulas, conversaciones, hallazgos y la traza de auditoría.</a:t>
             </a:r>
           </a:p>
         </p:txBody>
@@ -12759,7 +15155,7 @@
                 </a:solidFill>
                 <a:latin typeface="Helvetica Neue"/>
               </a:rPr>
-              <a:t>HERRAMIENTAS</a:t>
+              <a:t>ARQUITECTURA · FLUJO</a:t>
             </a:r>
           </a:p>
         </p:txBody>
@@ -12886,7 +15282,7 @@
                 </a:solidFill>
                 <a:latin typeface="Helvetica Neue"/>
               </a:rPr>
-              <a:t>HERRAMIENTAS Y DESPLIEGUE</a:t>
+              <a:t>ROJO: ESCALA · VERDE: RESPONDE</a:t>
             </a:r>
           </a:p>
         </p:txBody>
@@ -12925,7 +15321,7 @@
                 </a:solidFill>
                 <a:latin typeface="Courier New"/>
               </a:rPr>
-              <a:t>09 / 12</a:t>
+              <a:t>09 / 13</a:t>
             </a:r>
           </a:p>
         </p:txBody>
@@ -12938,7 +15334,7 @@
         </p:nvSpPr>
         <p:spPr>
           <a:xfrm>
-            <a:off x="566928" y="841248"/>
+            <a:off x="566928" y="1234440"/>
             <a:ext cx="5486400" cy="219456"/>
           </a:xfrm>
           <a:prstGeom prst="rect">
@@ -12964,210 +15360,34 @@
                 </a:solidFill>
                 <a:latin typeface="Helvetica Neue"/>
               </a:rPr>
-              <a:t>CON QUÉ ESTÁ HECHO</a:t>
-            </a:r>
-          </a:p>
-        </p:txBody>
-      </p:sp>
-      <p:sp>
-        <p:nvSpPr>
-          <p:cNvPr id="9" name="TextBox 8"/>
-          <p:cNvSpPr txBox="1"/>
-          <p:nvPr/>
-        </p:nvSpPr>
-        <p:spPr>
-          <a:xfrm>
-            <a:off x="566928" y="1152144"/>
-            <a:ext cx="10241280" cy="914400"/>
-          </a:xfrm>
-          <a:prstGeom prst="rect">
-            <a:avLst/>
-          </a:prstGeom>
-          <a:noFill/>
-        </p:spPr>
-        <p:txBody>
-          <a:bodyPr wrap="square" lIns="0" rIns="0" tIns="0" bIns="0">
-            <a:spAutoFit/>
-          </a:bodyPr>
-          <a:lstStyle/>
-          <a:p>
-            <a:pPr>
-              <a:lnSpc>
-                <a:spcPct val="105000"/>
-              </a:lnSpc>
-            </a:pPr>
-            <a:r>
-              <a:rPr sz="3000" b="1">
-                <a:solidFill>
-                  <a:srgbClr val="15191A"/>
-                </a:solidFill>
-                <a:latin typeface="Helvetica Neue"/>
-              </a:rPr>
-              <a:t>Todo local, todo reproducible</a:t>
-            </a:r>
-          </a:p>
-        </p:txBody>
-      </p:sp>
-      <p:sp>
-        <p:nvSpPr>
-          <p:cNvPr id="10" name="TextBox 9"/>
-          <p:cNvSpPr txBox="1"/>
-          <p:nvPr/>
-        </p:nvSpPr>
-        <p:spPr>
-          <a:xfrm>
-            <a:off x="566928" y="1889760"/>
-            <a:ext cx="11057839" cy="201168"/>
-          </a:xfrm>
-          <a:prstGeom prst="rect">
-            <a:avLst/>
-          </a:prstGeom>
-          <a:noFill/>
-        </p:spPr>
-        <p:txBody>
-          <a:bodyPr wrap="square" lIns="0" rIns="0" tIns="0" bIns="0">
-            <a:spAutoFit/>
-          </a:bodyPr>
-          <a:lstStyle/>
-          <a:p/>
-        </p:txBody>
-      </p:sp>
-      <p:sp>
-        <p:nvSpPr>
-          <p:cNvPr id="11" name="TextBox 10"/>
-          <p:cNvSpPr txBox="1"/>
-          <p:nvPr/>
-        </p:nvSpPr>
-        <p:spPr>
-          <a:xfrm>
-            <a:off x="566928" y="1889760"/>
-            <a:ext cx="1691640" cy="201168"/>
-          </a:xfrm>
-          <a:prstGeom prst="rect">
-            <a:avLst/>
-          </a:prstGeom>
-          <a:noFill/>
-        </p:spPr>
-        <p:txBody>
-          <a:bodyPr wrap="square" lIns="0" rIns="0" tIns="0" bIns="0">
-            <a:spAutoFit/>
-          </a:bodyPr>
-          <a:lstStyle/>
-          <a:p>
-            <a:pPr>
-              <a:lnSpc>
-                <a:spcPct val="128000"/>
-              </a:lnSpc>
-            </a:pPr>
-            <a:r>
-              <a:rPr sz="850" b="1" spc="130">
-                <a:solidFill>
-                  <a:srgbClr val="5D6663"/>
-                </a:solidFill>
-                <a:latin typeface="Helvetica Neue"/>
-              </a:rPr>
-              <a:t>CAPA</a:t>
-            </a:r>
-          </a:p>
-        </p:txBody>
-      </p:sp>
-      <p:sp>
-        <p:nvSpPr>
-          <p:cNvPr id="12" name="TextBox 11"/>
-          <p:cNvSpPr txBox="1"/>
-          <p:nvPr/>
-        </p:nvSpPr>
-        <p:spPr>
-          <a:xfrm>
-            <a:off x="2258568" y="1889760"/>
-            <a:ext cx="3154680" cy="201168"/>
-          </a:xfrm>
-          <a:prstGeom prst="rect">
-            <a:avLst/>
-          </a:prstGeom>
-          <a:noFill/>
-        </p:spPr>
-        <p:txBody>
-          <a:bodyPr wrap="square" lIns="0" rIns="0" tIns="0" bIns="0">
-            <a:spAutoFit/>
-          </a:bodyPr>
-          <a:lstStyle/>
-          <a:p>
-            <a:pPr>
-              <a:lnSpc>
-                <a:spcPct val="128000"/>
-              </a:lnSpc>
-            </a:pPr>
-            <a:r>
-              <a:rPr sz="850" b="1" spc="130">
-                <a:solidFill>
-                  <a:srgbClr val="5D6663"/>
-                </a:solidFill>
-                <a:latin typeface="Helvetica Neue"/>
-              </a:rPr>
-              <a:t>ELECCIÓN</a:t>
-            </a:r>
-          </a:p>
-        </p:txBody>
-      </p:sp>
-      <p:sp>
-        <p:nvSpPr>
-          <p:cNvPr id="13" name="TextBox 12"/>
-          <p:cNvSpPr txBox="1"/>
-          <p:nvPr/>
-        </p:nvSpPr>
-        <p:spPr>
-          <a:xfrm>
-            <a:off x="5413248" y="1889760"/>
-            <a:ext cx="6217920" cy="201168"/>
-          </a:xfrm>
-          <a:prstGeom prst="rect">
-            <a:avLst/>
-          </a:prstGeom>
-          <a:noFill/>
-        </p:spPr>
-        <p:txBody>
-          <a:bodyPr wrap="square" lIns="0" rIns="0" tIns="0" bIns="0">
-            <a:spAutoFit/>
-          </a:bodyPr>
-          <a:lstStyle/>
-          <a:p>
-            <a:pPr>
-              <a:lnSpc>
-                <a:spcPct val="128000"/>
-              </a:lnSpc>
-            </a:pPr>
-            <a:r>
-              <a:rPr sz="850" b="1" spc="130">
-                <a:solidFill>
-                  <a:srgbClr val="5D6663"/>
-                </a:solidFill>
-                <a:latin typeface="Helvetica Neue"/>
-              </a:rPr>
-              <a:t>POR QUÉ ESA</a:t>
-            </a:r>
-          </a:p>
-        </p:txBody>
-      </p:sp>
-      <p:sp>
-        <p:nvSpPr>
-          <p:cNvPr id="14" name="Rectangle 13"/>
+              <a:t>FLUJO DE UNA CONSULTA</a:t>
+            </a:r>
+          </a:p>
+        </p:txBody>
+      </p:sp>
+      <p:sp>
+        <p:nvSpPr>
+          <p:cNvPr id="9" name="Rounded Rectangle 8"/>
           <p:cNvSpPr/>
           <p:nvPr/>
         </p:nvSpPr>
         <p:spPr>
           <a:xfrm>
-            <a:off x="566928" y="2127504"/>
-            <a:ext cx="11057839" cy="16510"/>
-          </a:xfrm>
-          <a:prstGeom prst="rect">
-            <a:avLst/>
+            <a:off x="566928" y="1728216"/>
+            <a:ext cx="11057839" cy="2438944"/>
+          </a:xfrm>
+          <a:prstGeom prst="roundRect">
+            <a:avLst>
+              <a:gd name="adj" fmla="val 3000"/>
+            </a:avLst>
           </a:prstGeom>
           <a:solidFill>
-            <a:srgbClr val="B6BFB8"/>
+            <a:srgbClr val="FFFFFF"/>
           </a:solidFill>
-          <a:ln>
-            <a:noFill/>
+          <a:ln w="9525">
+            <a:solidFill>
+              <a:srgbClr val="C5CDC7"/>
+            </a:solidFill>
           </a:ln>
           <a:effectLst/>
         </p:spPr>
@@ -13193,987 +15413,84 @@
           </a:p>
         </p:txBody>
       </p:sp>
-      <p:sp>
-        <p:nvSpPr>
-          <p:cNvPr id="15" name="TextBox 14"/>
-          <p:cNvSpPr txBox="1"/>
-          <p:nvPr/>
-        </p:nvSpPr>
-        <p:spPr>
-          <a:xfrm>
-            <a:off x="566928" y="2273808"/>
-            <a:ext cx="1527048" cy="457200"/>
-          </a:xfrm>
-          <a:prstGeom prst="rect">
-            <a:avLst/>
-          </a:prstGeom>
-          <a:noFill/>
-        </p:spPr>
-        <p:txBody>
-          <a:bodyPr wrap="square" lIns="0" rIns="0" tIns="0" bIns="0">
-            <a:spAutoFit/>
-          </a:bodyPr>
-          <a:lstStyle/>
-          <a:p>
-            <a:pPr>
-              <a:lnSpc>
-                <a:spcPct val="124000"/>
-              </a:lnSpc>
-            </a:pPr>
-            <a:r>
-              <a:rPr sz="1050" b="0">
+      <p:pic>
+        <p:nvPicPr>
+          <p:cNvPr id="10" name="Picture 9" descr="02-flujo-consulta-horizontal.png"/>
+          <p:cNvPicPr>
+            <a:picLocks noChangeAspect="1"/>
+          </p:cNvPicPr>
+          <p:nvPr/>
+        </p:nvPicPr>
+        <p:blipFill>
+          <a:blip r:embed="rId2"/>
+          <a:stretch>
+            <a:fillRect/>
+          </a:stretch>
+        </p:blipFill>
+        <p:spPr>
+          <a:xfrm>
+            <a:off x="795528" y="1929384"/>
+            <a:ext cx="10600639" cy="1780576"/>
+          </a:xfrm>
+          <a:prstGeom prst="rect">
+            <a:avLst/>
+          </a:prstGeom>
+        </p:spPr>
+      </p:pic>
+      <p:sp>
+        <p:nvSpPr>
+          <p:cNvPr id="11" name="TextBox 10"/>
+          <p:cNvSpPr txBox="1"/>
+          <p:nvPr/>
+        </p:nvSpPr>
+        <p:spPr>
+          <a:xfrm>
+            <a:off x="822960" y="3819688"/>
+            <a:ext cx="10545775" cy="310896"/>
+          </a:xfrm>
+          <a:prstGeom prst="rect">
+            <a:avLst/>
+          </a:prstGeom>
+          <a:noFill/>
+        </p:spPr>
+        <p:txBody>
+          <a:bodyPr wrap="square" lIns="0" rIns="0" tIns="0" bIns="0">
+            <a:spAutoFit/>
+          </a:bodyPr>
+          <a:lstStyle/>
+          <a:p>
+            <a:pPr>
+              <a:lnSpc>
+                <a:spcPct val="130000"/>
+              </a:lnSpc>
+            </a:pPr>
+            <a:r>
+              <a:rPr sz="1000" b="0">
+                <a:solidFill>
+                  <a:srgbClr val="5D6663"/>
+                </a:solidFill>
+                <a:latin typeface="Helvetica Neue"/>
+              </a:rPr>
+              <a:t>La pregunta se compara </a:t>
+            </a:r>
+            <a:r>
+              <a:rPr sz="1000" b="1">
                 <a:solidFill>
                   <a:srgbClr val="15191A"/>
                 </a:solidFill>
                 <a:latin typeface="Helvetica Neue"/>
               </a:rPr>
-              <a:t>Framework de IA</a:t>
-            </a:r>
-          </a:p>
-        </p:txBody>
-      </p:sp>
-      <p:sp>
-        <p:nvSpPr>
-          <p:cNvPr id="16" name="TextBox 15"/>
-          <p:cNvSpPr txBox="1"/>
-          <p:nvPr/>
-        </p:nvSpPr>
-        <p:spPr>
-          <a:xfrm>
-            <a:off x="2258568" y="2273808"/>
-            <a:ext cx="2990088" cy="457200"/>
-          </a:xfrm>
-          <a:prstGeom prst="rect">
-            <a:avLst/>
-          </a:prstGeom>
-          <a:noFill/>
-        </p:spPr>
-        <p:txBody>
-          <a:bodyPr wrap="square" lIns="0" rIns="0" tIns="0" bIns="0">
-            <a:spAutoFit/>
-          </a:bodyPr>
-          <a:lstStyle/>
-          <a:p>
-            <a:pPr>
-              <a:lnSpc>
-                <a:spcPct val="124000"/>
-              </a:lnSpc>
-            </a:pPr>
-            <a:r>
-              <a:rPr sz="1050" b="0">
-                <a:solidFill>
-                  <a:srgbClr val="15191A"/>
-                </a:solidFill>
-                <a:latin typeface="Helvetica Neue"/>
-              </a:rPr>
-              <a:t>RAG propio · FastAPI · Python 3.12</a:t>
-            </a:r>
-          </a:p>
-        </p:txBody>
-      </p:sp>
-      <p:sp>
-        <p:nvSpPr>
-          <p:cNvPr id="17" name="TextBox 16"/>
-          <p:cNvSpPr txBox="1"/>
-          <p:nvPr/>
-        </p:nvSpPr>
-        <p:spPr>
-          <a:xfrm>
-            <a:off x="5413248" y="2273808"/>
-            <a:ext cx="6053328" cy="457200"/>
-          </a:xfrm>
-          <a:prstGeom prst="rect">
-            <a:avLst/>
-          </a:prstGeom>
-          <a:noFill/>
-        </p:spPr>
-        <p:txBody>
-          <a:bodyPr wrap="square" lIns="0" rIns="0" tIns="0" bIns="0">
-            <a:spAutoFit/>
-          </a:bodyPr>
-          <a:lstStyle/>
-          <a:p>
-            <a:pPr>
-              <a:lnSpc>
-                <a:spcPct val="124000"/>
-              </a:lnSpc>
-            </a:pPr>
-            <a:r>
-              <a:rPr sz="1050" b="1">
-                <a:solidFill>
-                  <a:srgbClr val="15191A"/>
-                </a:solidFill>
-                <a:latin typeface="Helvetica Neue"/>
-              </a:rPr>
-              <a:t>Sin LangChain ni LlamaIndex.</a:t>
-            </a:r>
-            <a:r>
-              <a:rPr sz="1050" b="0">
-                <a:solidFill>
-                  <a:srgbClr val="15191A"/>
-                </a:solidFill>
-                <a:latin typeface="Helvetica Neue"/>
-              </a:rPr>
-              <a:t> Cada paso —troceado, umbral, guardrails— es código legible y comprobable; un framework habría escondido justo la parte que aporta el valor. 29 módulos, 177 tests.</a:t>
-            </a:r>
-          </a:p>
-        </p:txBody>
-      </p:sp>
-      <p:sp>
-        <p:nvSpPr>
-          <p:cNvPr id="18" name="Rectangle 17"/>
-          <p:cNvSpPr/>
-          <p:nvPr/>
-        </p:nvSpPr>
-        <p:spPr>
-          <a:xfrm>
-            <a:off x="566928" y="2676144"/>
-            <a:ext cx="11057839" cy="8890"/>
-          </a:xfrm>
-          <a:prstGeom prst="rect">
-            <a:avLst/>
-          </a:prstGeom>
-          <a:solidFill>
-            <a:srgbClr val="C5CDC7"/>
-          </a:solidFill>
-          <a:ln>
-            <a:noFill/>
-          </a:ln>
-          <a:effectLst/>
-        </p:spPr>
-        <p:style>
-          <a:lnRef idx="1">
-            <a:schemeClr val="accent1"/>
-          </a:lnRef>
-          <a:fillRef idx="3">
-            <a:schemeClr val="accent1"/>
-          </a:fillRef>
-          <a:effectRef idx="2">
-            <a:schemeClr val="accent1"/>
-          </a:effectRef>
-          <a:fontRef idx="minor">
-            <a:schemeClr val="lt1"/>
-          </a:fontRef>
-        </p:style>
-        <p:txBody>
-          <a:bodyPr rtlCol="0" anchor="ctr"/>
-          <a:lstStyle/>
-          <a:p>
-            <a:pPr algn="ctr"/>
-          </a:p>
-        </p:txBody>
-      </p:sp>
-      <p:sp>
-        <p:nvSpPr>
-          <p:cNvPr id="19" name="TextBox 18"/>
-          <p:cNvSpPr txBox="1"/>
-          <p:nvPr/>
-        </p:nvSpPr>
-        <p:spPr>
-          <a:xfrm>
-            <a:off x="566928" y="2804160"/>
-            <a:ext cx="1527048" cy="457200"/>
-          </a:xfrm>
-          <a:prstGeom prst="rect">
-            <a:avLst/>
-          </a:prstGeom>
-          <a:noFill/>
-        </p:spPr>
-        <p:txBody>
-          <a:bodyPr wrap="square" lIns="0" rIns="0" tIns="0" bIns="0">
-            <a:spAutoFit/>
-          </a:bodyPr>
-          <a:lstStyle/>
-          <a:p>
-            <a:pPr>
-              <a:lnSpc>
-                <a:spcPct val="124000"/>
-              </a:lnSpc>
-            </a:pPr>
-            <a:r>
-              <a:rPr sz="1050" b="0">
-                <a:solidFill>
-                  <a:srgbClr val="15191A"/>
-                </a:solidFill>
-                <a:latin typeface="Helvetica Neue"/>
-              </a:rPr>
-              <a:t>Modelo</a:t>
-            </a:r>
-          </a:p>
-        </p:txBody>
-      </p:sp>
-      <p:sp>
-        <p:nvSpPr>
-          <p:cNvPr id="20" name="TextBox 19"/>
-          <p:cNvSpPr txBox="1"/>
-          <p:nvPr/>
-        </p:nvSpPr>
-        <p:spPr>
-          <a:xfrm>
-            <a:off x="2258568" y="2804160"/>
-            <a:ext cx="2990088" cy="457200"/>
-          </a:xfrm>
-          <a:prstGeom prst="rect">
-            <a:avLst/>
-          </a:prstGeom>
-          <a:noFill/>
-        </p:spPr>
-        <p:txBody>
-          <a:bodyPr wrap="square" lIns="0" rIns="0" tIns="0" bIns="0">
-            <a:spAutoFit/>
-          </a:bodyPr>
-          <a:lstStyle/>
-          <a:p>
-            <a:pPr>
-              <a:lnSpc>
-                <a:spcPct val="124000"/>
-              </a:lnSpc>
-            </a:pPr>
-            <a:r>
-              <a:rPr sz="950" b="0">
-                <a:solidFill>
-                  <a:srgbClr val="15191A"/>
-                </a:solidFill>
-                <a:latin typeface="Courier New"/>
-              </a:rPr>
-              <a:t>qwen3.8:27b-mlx</a:t>
-            </a:r>
-            <a:r>
-              <a:rPr sz="1050" b="0">
-                <a:solidFill>
-                  <a:srgbClr val="15191A"/>
-                </a:solidFill>
-                <a:latin typeface="Helvetica Neue"/>
-              </a:rPr>
-              <a:t> vía Ollama</a:t>
-            </a:r>
-          </a:p>
-        </p:txBody>
-      </p:sp>
-      <p:sp>
-        <p:nvSpPr>
-          <p:cNvPr id="21" name="TextBox 20"/>
-          <p:cNvSpPr txBox="1"/>
-          <p:nvPr/>
-        </p:nvSpPr>
-        <p:spPr>
-          <a:xfrm>
-            <a:off x="5413248" y="2804160"/>
-            <a:ext cx="6053328" cy="457200"/>
-          </a:xfrm>
-          <a:prstGeom prst="rect">
-            <a:avLst/>
-          </a:prstGeom>
-          <a:noFill/>
-        </p:spPr>
-        <p:txBody>
-          <a:bodyPr wrap="square" lIns="0" rIns="0" tIns="0" bIns="0">
-            <a:spAutoFit/>
-          </a:bodyPr>
-          <a:lstStyle/>
-          <a:p>
-            <a:pPr>
-              <a:lnSpc>
-                <a:spcPct val="124000"/>
-              </a:lnSpc>
-            </a:pPr>
-            <a:r>
-              <a:rPr sz="1050" b="0">
-                <a:solidFill>
-                  <a:srgbClr val="15191A"/>
-                </a:solidFill>
-                <a:latin typeface="Helvetica Neue"/>
-              </a:rPr>
-              <a:t>Elegido por medición: acertó cláusula, sección, herramienta y escalación en el banco de pruebas.</a:t>
-            </a:r>
-          </a:p>
-        </p:txBody>
-      </p:sp>
-      <p:sp>
-        <p:nvSpPr>
-          <p:cNvPr id="22" name="Rectangle 21"/>
-          <p:cNvSpPr/>
-          <p:nvPr/>
-        </p:nvSpPr>
-        <p:spPr>
-          <a:xfrm>
-            <a:off x="566928" y="3206496"/>
-            <a:ext cx="11057839" cy="8890"/>
-          </a:xfrm>
-          <a:prstGeom prst="rect">
-            <a:avLst/>
-          </a:prstGeom>
-          <a:solidFill>
-            <a:srgbClr val="C5CDC7"/>
-          </a:solidFill>
-          <a:ln>
-            <a:noFill/>
-          </a:ln>
-          <a:effectLst/>
-        </p:spPr>
-        <p:style>
-          <a:lnRef idx="1">
-            <a:schemeClr val="accent1"/>
-          </a:lnRef>
-          <a:fillRef idx="3">
-            <a:schemeClr val="accent1"/>
-          </a:fillRef>
-          <a:effectRef idx="2">
-            <a:schemeClr val="accent1"/>
-          </a:effectRef>
-          <a:fontRef idx="minor">
-            <a:schemeClr val="lt1"/>
-          </a:fontRef>
-        </p:style>
-        <p:txBody>
-          <a:bodyPr rtlCol="0" anchor="ctr"/>
-          <a:lstStyle/>
-          <a:p>
-            <a:pPr algn="ctr"/>
-          </a:p>
-        </p:txBody>
-      </p:sp>
-      <p:sp>
-        <p:nvSpPr>
-          <p:cNvPr id="23" name="TextBox 22"/>
-          <p:cNvSpPr txBox="1"/>
-          <p:nvPr/>
-        </p:nvSpPr>
-        <p:spPr>
-          <a:xfrm>
-            <a:off x="566928" y="3334512"/>
-            <a:ext cx="1527048" cy="457200"/>
-          </a:xfrm>
-          <a:prstGeom prst="rect">
-            <a:avLst/>
-          </a:prstGeom>
-          <a:noFill/>
-        </p:spPr>
-        <p:txBody>
-          <a:bodyPr wrap="square" lIns="0" rIns="0" tIns="0" bIns="0">
-            <a:spAutoFit/>
-          </a:bodyPr>
-          <a:lstStyle/>
-          <a:p>
-            <a:pPr>
-              <a:lnSpc>
-                <a:spcPct val="124000"/>
-              </a:lnSpc>
-            </a:pPr>
-            <a:r>
-              <a:rPr sz="1050" b="0">
-                <a:solidFill>
-                  <a:srgbClr val="15191A"/>
-                </a:solidFill>
-                <a:latin typeface="Helvetica Neue"/>
-              </a:rPr>
-              <a:t>Comprensión del texto</a:t>
-            </a:r>
-          </a:p>
-        </p:txBody>
-      </p:sp>
-      <p:sp>
-        <p:nvSpPr>
-          <p:cNvPr id="24" name="TextBox 23"/>
-          <p:cNvSpPr txBox="1"/>
-          <p:nvPr/>
-        </p:nvSpPr>
-        <p:spPr>
-          <a:xfrm>
-            <a:off x="2258568" y="3334512"/>
-            <a:ext cx="2990088" cy="457200"/>
-          </a:xfrm>
-          <a:prstGeom prst="rect">
-            <a:avLst/>
-          </a:prstGeom>
-          <a:noFill/>
-        </p:spPr>
-        <p:txBody>
-          <a:bodyPr wrap="square" lIns="0" rIns="0" tIns="0" bIns="0">
-            <a:spAutoFit/>
-          </a:bodyPr>
-          <a:lstStyle/>
-          <a:p>
-            <a:pPr>
-              <a:lnSpc>
-                <a:spcPct val="124000"/>
-              </a:lnSpc>
-            </a:pPr>
-            <a:r>
-              <a:rPr sz="950" b="0">
-                <a:solidFill>
-                  <a:srgbClr val="15191A"/>
-                </a:solidFill>
-                <a:latin typeface="Courier New"/>
-              </a:rPr>
-              <a:t>BAAI/bge-m3</a:t>
-            </a:r>
-          </a:p>
-        </p:txBody>
-      </p:sp>
-      <p:sp>
-        <p:nvSpPr>
-          <p:cNvPr id="25" name="TextBox 24"/>
-          <p:cNvSpPr txBox="1"/>
-          <p:nvPr/>
-        </p:nvSpPr>
-        <p:spPr>
-          <a:xfrm>
-            <a:off x="5413248" y="3334512"/>
-            <a:ext cx="6053328" cy="457200"/>
-          </a:xfrm>
-          <a:prstGeom prst="rect">
-            <a:avLst/>
-          </a:prstGeom>
-          <a:noFill/>
-        </p:spPr>
-        <p:txBody>
-          <a:bodyPr wrap="square" lIns="0" rIns="0" tIns="0" bIns="0">
-            <a:spAutoFit/>
-          </a:bodyPr>
-          <a:lstStyle/>
-          <a:p>
-            <a:pPr>
-              <a:lnSpc>
-                <a:spcPct val="124000"/>
-              </a:lnSpc>
-            </a:pPr>
-            <a:r>
-              <a:rPr sz="1050" b="0">
-                <a:solidFill>
-                  <a:srgbClr val="15191A"/>
-                </a:solidFill>
-                <a:latin typeface="Helvetica Neue"/>
-              </a:rPr>
-              <a:t>Convierte cada cláusula en una huella numérica de su significado: es lo que permite buscar por sentido y no por palabras exactas.</a:t>
-            </a:r>
-          </a:p>
-        </p:txBody>
-      </p:sp>
-      <p:sp>
-        <p:nvSpPr>
-          <p:cNvPr id="26" name="Rectangle 25"/>
-          <p:cNvSpPr/>
-          <p:nvPr/>
-        </p:nvSpPr>
-        <p:spPr>
-          <a:xfrm>
-            <a:off x="566928" y="3736848"/>
-            <a:ext cx="11057839" cy="8890"/>
-          </a:xfrm>
-          <a:prstGeom prst="rect">
-            <a:avLst/>
-          </a:prstGeom>
-          <a:solidFill>
-            <a:srgbClr val="C5CDC7"/>
-          </a:solidFill>
-          <a:ln>
-            <a:noFill/>
-          </a:ln>
-          <a:effectLst/>
-        </p:spPr>
-        <p:style>
-          <a:lnRef idx="1">
-            <a:schemeClr val="accent1"/>
-          </a:lnRef>
-          <a:fillRef idx="3">
-            <a:schemeClr val="accent1"/>
-          </a:fillRef>
-          <a:effectRef idx="2">
-            <a:schemeClr val="accent1"/>
-          </a:effectRef>
-          <a:fontRef idx="minor">
-            <a:schemeClr val="lt1"/>
-          </a:fontRef>
-        </p:style>
-        <p:txBody>
-          <a:bodyPr rtlCol="0" anchor="ctr"/>
-          <a:lstStyle/>
-          <a:p>
-            <a:pPr algn="ctr"/>
-          </a:p>
-        </p:txBody>
-      </p:sp>
-      <p:sp>
-        <p:nvSpPr>
-          <p:cNvPr id="27" name="TextBox 26"/>
-          <p:cNvSpPr txBox="1"/>
-          <p:nvPr/>
-        </p:nvSpPr>
-        <p:spPr>
-          <a:xfrm>
-            <a:off x="566928" y="3864864"/>
-            <a:ext cx="1527048" cy="457200"/>
-          </a:xfrm>
-          <a:prstGeom prst="rect">
-            <a:avLst/>
-          </a:prstGeom>
-          <a:noFill/>
-        </p:spPr>
-        <p:txBody>
-          <a:bodyPr wrap="square" lIns="0" rIns="0" tIns="0" bIns="0">
-            <a:spAutoFit/>
-          </a:bodyPr>
-          <a:lstStyle/>
-          <a:p>
-            <a:pPr>
-              <a:lnSpc>
-                <a:spcPct val="124000"/>
-              </a:lnSpc>
-            </a:pPr>
-            <a:r>
-              <a:rPr sz="1050" b="0">
-                <a:solidFill>
-                  <a:srgbClr val="15191A"/>
-                </a:solidFill>
-                <a:latin typeface="Helvetica Neue"/>
-              </a:rPr>
-              <a:t>Base de datos</a:t>
-            </a:r>
-          </a:p>
-        </p:txBody>
-      </p:sp>
-      <p:sp>
-        <p:nvSpPr>
-          <p:cNvPr id="28" name="TextBox 27"/>
-          <p:cNvSpPr txBox="1"/>
-          <p:nvPr/>
-        </p:nvSpPr>
-        <p:spPr>
-          <a:xfrm>
-            <a:off x="2258568" y="3864864"/>
-            <a:ext cx="2990088" cy="457200"/>
-          </a:xfrm>
-          <a:prstGeom prst="rect">
-            <a:avLst/>
-          </a:prstGeom>
-          <a:noFill/>
-        </p:spPr>
-        <p:txBody>
-          <a:bodyPr wrap="square" lIns="0" rIns="0" tIns="0" bIns="0">
-            <a:spAutoFit/>
-          </a:bodyPr>
-          <a:lstStyle/>
-          <a:p>
-            <a:pPr>
-              <a:lnSpc>
-                <a:spcPct val="124000"/>
-              </a:lnSpc>
-            </a:pPr>
-            <a:r>
-              <a:rPr sz="1050" b="0">
-                <a:solidFill>
-                  <a:srgbClr val="15191A"/>
-                </a:solidFill>
-                <a:latin typeface="Helvetica Neue"/>
-              </a:rPr>
-              <a:t>PostgreSQL 16 · pgvector · unaccent</a:t>
-            </a:r>
-          </a:p>
-        </p:txBody>
-      </p:sp>
-      <p:sp>
-        <p:nvSpPr>
-          <p:cNvPr id="29" name="TextBox 28"/>
-          <p:cNvSpPr txBox="1"/>
-          <p:nvPr/>
-        </p:nvSpPr>
-        <p:spPr>
-          <a:xfrm>
-            <a:off x="5413248" y="3864864"/>
-            <a:ext cx="6053328" cy="457200"/>
-          </a:xfrm>
-          <a:prstGeom prst="rect">
-            <a:avLst/>
-          </a:prstGeom>
-          <a:noFill/>
-        </p:spPr>
-        <p:txBody>
-          <a:bodyPr wrap="square" lIns="0" rIns="0" tIns="0" bIns="0">
-            <a:spAutoFit/>
-          </a:bodyPr>
-          <a:lstStyle/>
-          <a:p>
-            <a:pPr>
-              <a:lnSpc>
-                <a:spcPct val="124000"/>
-              </a:lnSpc>
-            </a:pPr>
-            <a:r>
-              <a:rPr sz="1050" b="0">
-                <a:solidFill>
-                  <a:srgbClr val="15191A"/>
-                </a:solidFill>
-                <a:latin typeface="Helvetica Neue"/>
-              </a:rPr>
-              <a:t>Guarda documentos, conversaciones y la traza de auditoría, y busca por significado. También ignora los acentos: sin eso, «auditoria» no encontraba «auditoría».</a:t>
-            </a:r>
-          </a:p>
-        </p:txBody>
-      </p:sp>
-      <p:sp>
-        <p:nvSpPr>
-          <p:cNvPr id="30" name="Rectangle 29"/>
-          <p:cNvSpPr/>
-          <p:nvPr/>
-        </p:nvSpPr>
-        <p:spPr>
-          <a:xfrm>
-            <a:off x="566928" y="4267200"/>
-            <a:ext cx="11057839" cy="8890"/>
-          </a:xfrm>
-          <a:prstGeom prst="rect">
-            <a:avLst/>
-          </a:prstGeom>
-          <a:solidFill>
-            <a:srgbClr val="C5CDC7"/>
-          </a:solidFill>
-          <a:ln>
-            <a:noFill/>
-          </a:ln>
-          <a:effectLst/>
-        </p:spPr>
-        <p:style>
-          <a:lnRef idx="1">
-            <a:schemeClr val="accent1"/>
-          </a:lnRef>
-          <a:fillRef idx="3">
-            <a:schemeClr val="accent1"/>
-          </a:fillRef>
-          <a:effectRef idx="2">
-            <a:schemeClr val="accent1"/>
-          </a:effectRef>
-          <a:fontRef idx="minor">
-            <a:schemeClr val="lt1"/>
-          </a:fontRef>
-        </p:style>
-        <p:txBody>
-          <a:bodyPr rtlCol="0" anchor="ctr"/>
-          <a:lstStyle/>
-          <a:p>
-            <a:pPr algn="ctr"/>
-          </a:p>
-        </p:txBody>
-      </p:sp>
-      <p:sp>
-        <p:nvSpPr>
-          <p:cNvPr id="31" name="TextBox 30"/>
-          <p:cNvSpPr txBox="1"/>
-          <p:nvPr/>
-        </p:nvSpPr>
-        <p:spPr>
-          <a:xfrm>
-            <a:off x="566928" y="4395216"/>
-            <a:ext cx="1527048" cy="457200"/>
-          </a:xfrm>
-          <a:prstGeom prst="rect">
-            <a:avLst/>
-          </a:prstGeom>
-          <a:noFill/>
-        </p:spPr>
-        <p:txBody>
-          <a:bodyPr wrap="square" lIns="0" rIns="0" tIns="0" bIns="0">
-            <a:spAutoFit/>
-          </a:bodyPr>
-          <a:lstStyle/>
-          <a:p>
-            <a:pPr>
-              <a:lnSpc>
-                <a:spcPct val="124000"/>
-              </a:lnSpc>
-            </a:pPr>
-            <a:r>
-              <a:rPr sz="1050" b="0">
-                <a:solidFill>
-                  <a:srgbClr val="15191A"/>
-                </a:solidFill>
-                <a:latin typeface="Helvetica Neue"/>
-              </a:rPr>
-              <a:t>Mensajería</a:t>
-            </a:r>
-          </a:p>
-        </p:txBody>
-      </p:sp>
-      <p:sp>
-        <p:nvSpPr>
-          <p:cNvPr id="32" name="TextBox 31"/>
-          <p:cNvSpPr txBox="1"/>
-          <p:nvPr/>
-        </p:nvSpPr>
-        <p:spPr>
-          <a:xfrm>
-            <a:off x="2258568" y="4395216"/>
-            <a:ext cx="2990088" cy="457200"/>
-          </a:xfrm>
-          <a:prstGeom prst="rect">
-            <a:avLst/>
-          </a:prstGeom>
-          <a:noFill/>
-        </p:spPr>
-        <p:txBody>
-          <a:bodyPr wrap="square" lIns="0" rIns="0" tIns="0" bIns="0">
-            <a:spAutoFit/>
-          </a:bodyPr>
-          <a:lstStyle/>
-          <a:p>
-            <a:pPr>
-              <a:lnSpc>
-                <a:spcPct val="124000"/>
-              </a:lnSpc>
-            </a:pPr>
-            <a:r>
-              <a:rPr sz="1050" b="0">
-                <a:solidFill>
-                  <a:srgbClr val="15191A"/>
-                </a:solidFill>
-                <a:latin typeface="Helvetica Neue"/>
-              </a:rPr>
-              <a:t>Widget web · Web Component + Shadow DOM</a:t>
-            </a:r>
-          </a:p>
-        </p:txBody>
-      </p:sp>
-      <p:sp>
-        <p:nvSpPr>
-          <p:cNvPr id="33" name="TextBox 32"/>
-          <p:cNvSpPr txBox="1"/>
-          <p:nvPr/>
-        </p:nvSpPr>
-        <p:spPr>
-          <a:xfrm>
-            <a:off x="5413248" y="4395216"/>
-            <a:ext cx="6053328" cy="457200"/>
-          </a:xfrm>
-          <a:prstGeom prst="rect">
-            <a:avLst/>
-          </a:prstGeom>
-          <a:noFill/>
-        </p:spPr>
-        <p:txBody>
-          <a:bodyPr wrap="square" lIns="0" rIns="0" tIns="0" bIns="0">
-            <a:spAutoFit/>
-          </a:bodyPr>
-          <a:lstStyle/>
-          <a:p>
-            <a:pPr>
-              <a:lnSpc>
-                <a:spcPct val="124000"/>
-              </a:lnSpc>
-            </a:pPr>
-            <a:r>
-              <a:rPr sz="1050" b="0">
-                <a:solidFill>
-                  <a:srgbClr val="15191A"/>
-                </a:solidFill>
-                <a:latin typeface="Helvetica Neue"/>
-              </a:rPr>
-              <a:t>Una etiqueta y un &lt;script&gt;; los estilos del anfitrión no lo tocan. WhatsApp queda para Fase 2.</a:t>
-            </a:r>
-          </a:p>
-        </p:txBody>
-      </p:sp>
-      <p:sp>
-        <p:nvSpPr>
-          <p:cNvPr id="34" name="Rectangle 33"/>
-          <p:cNvSpPr/>
-          <p:nvPr/>
-        </p:nvSpPr>
-        <p:spPr>
-          <a:xfrm>
-            <a:off x="566928" y="4797552"/>
-            <a:ext cx="11057839" cy="8890"/>
-          </a:xfrm>
-          <a:prstGeom prst="rect">
-            <a:avLst/>
-          </a:prstGeom>
-          <a:solidFill>
-            <a:srgbClr val="C5CDC7"/>
-          </a:solidFill>
-          <a:ln>
-            <a:noFill/>
-          </a:ln>
-          <a:effectLst/>
-        </p:spPr>
-        <p:style>
-          <a:lnRef idx="1">
-            <a:schemeClr val="accent1"/>
-          </a:lnRef>
-          <a:fillRef idx="3">
-            <a:schemeClr val="accent1"/>
-          </a:fillRef>
-          <a:effectRef idx="2">
-            <a:schemeClr val="accent1"/>
-          </a:effectRef>
-          <a:fontRef idx="minor">
-            <a:schemeClr val="lt1"/>
-          </a:fontRef>
-        </p:style>
-        <p:txBody>
-          <a:bodyPr rtlCol="0" anchor="ctr"/>
-          <a:lstStyle/>
-          <a:p>
-            <a:pPr algn="ctr"/>
-          </a:p>
-        </p:txBody>
-      </p:sp>
-      <p:sp>
-        <p:nvSpPr>
-          <p:cNvPr id="35" name="TextBox 34"/>
-          <p:cNvSpPr txBox="1"/>
-          <p:nvPr/>
-        </p:nvSpPr>
-        <p:spPr>
-          <a:xfrm>
-            <a:off x="566928" y="4925568"/>
-            <a:ext cx="1527048" cy="457200"/>
-          </a:xfrm>
-          <a:prstGeom prst="rect">
-            <a:avLst/>
-          </a:prstGeom>
-          <a:noFill/>
-        </p:spPr>
-        <p:txBody>
-          <a:bodyPr wrap="square" lIns="0" rIns="0" tIns="0" bIns="0">
-            <a:spAutoFit/>
-          </a:bodyPr>
-          <a:lstStyle/>
-          <a:p>
-            <a:pPr>
-              <a:lnSpc>
-                <a:spcPct val="124000"/>
-              </a:lnSpc>
-            </a:pPr>
-            <a:r>
-              <a:rPr sz="1050" b="0">
-                <a:solidFill>
-                  <a:srgbClr val="15191A"/>
-                </a:solidFill>
-                <a:latin typeface="Helvetica Neue"/>
-              </a:rPr>
-              <a:t>Despliegue</a:t>
-            </a:r>
-          </a:p>
-        </p:txBody>
-      </p:sp>
-      <p:sp>
-        <p:nvSpPr>
-          <p:cNvPr id="36" name="TextBox 35"/>
-          <p:cNvSpPr txBox="1"/>
-          <p:nvPr/>
-        </p:nvSpPr>
-        <p:spPr>
-          <a:xfrm>
-            <a:off x="2258568" y="4925568"/>
-            <a:ext cx="2990088" cy="457200"/>
-          </a:xfrm>
-          <a:prstGeom prst="rect">
-            <a:avLst/>
-          </a:prstGeom>
-          <a:noFill/>
-        </p:spPr>
-        <p:txBody>
-          <a:bodyPr wrap="square" lIns="0" rIns="0" tIns="0" bIns="0">
-            <a:spAutoFit/>
-          </a:bodyPr>
-          <a:lstStyle/>
-          <a:p>
-            <a:pPr>
-              <a:lnSpc>
-                <a:spcPct val="124000"/>
-              </a:lnSpc>
-            </a:pPr>
-            <a:r>
-              <a:rPr sz="1050" b="0">
-                <a:solidFill>
-                  <a:srgbClr val="15191A"/>
-                </a:solidFill>
-                <a:latin typeface="Helvetica Neue"/>
-              </a:rPr>
-              <a:t>Docker Compose · uv</a:t>
-            </a:r>
-          </a:p>
-        </p:txBody>
-      </p:sp>
-      <p:sp>
-        <p:nvSpPr>
-          <p:cNvPr id="37" name="TextBox 36"/>
-          <p:cNvSpPr txBox="1"/>
-          <p:nvPr/>
-        </p:nvSpPr>
-        <p:spPr>
-          <a:xfrm>
-            <a:off x="5413248" y="4925568"/>
-            <a:ext cx="6053328" cy="457200"/>
-          </a:xfrm>
-          <a:prstGeom prst="rect">
-            <a:avLst/>
-          </a:prstGeom>
-          <a:noFill/>
-        </p:spPr>
-        <p:txBody>
-          <a:bodyPr wrap="square" lIns="0" rIns="0" tIns="0" bIns="0">
-            <a:spAutoFit/>
-          </a:bodyPr>
-          <a:lstStyle/>
-          <a:p>
-            <a:pPr>
-              <a:lnSpc>
-                <a:spcPct val="124000"/>
-              </a:lnSpc>
-            </a:pPr>
-            <a:r>
-              <a:rPr sz="1050" b="0">
-                <a:solidFill>
-                  <a:srgbClr val="15191A"/>
-                </a:solidFill>
-                <a:latin typeface="Helvetica Neue"/>
-              </a:rPr>
-              <a:t>Local, sin nube: los documentos son internos. Clonar, instalar, configurar .env, ejecutar.</a:t>
-            </a:r>
-          </a:p>
-        </p:txBody>
-      </p:sp>
-      <p:sp>
-        <p:nvSpPr>
-          <p:cNvPr id="38" name="Rectangle 37"/>
-          <p:cNvSpPr/>
-          <p:nvPr/>
-        </p:nvSpPr>
-        <p:spPr>
-          <a:xfrm>
-            <a:off x="566928" y="5327904"/>
-            <a:ext cx="11057839" cy="8890"/>
-          </a:xfrm>
-          <a:prstGeom prst="rect">
-            <a:avLst/>
-          </a:prstGeom>
-          <a:solidFill>
-            <a:srgbClr val="C5CDC7"/>
-          </a:solidFill>
-          <a:ln>
-            <a:noFill/>
-          </a:ln>
-          <a:effectLst/>
-        </p:spPr>
-        <p:style>
-          <a:lnRef idx="1">
-            <a:schemeClr val="accent1"/>
-          </a:lnRef>
-          <a:fillRef idx="3">
-            <a:schemeClr val="accent1"/>
-          </a:fillRef>
-          <a:effectRef idx="2">
-            <a:schemeClr val="accent1"/>
-          </a:effectRef>
-          <a:fontRef idx="minor">
-            <a:schemeClr val="lt1"/>
-          </a:fontRef>
-        </p:style>
-        <p:txBody>
-          <a:bodyPr rtlCol="0" anchor="ctr"/>
-          <a:lstStyle/>
-          <a:p>
-            <a:pPr algn="ctr"/>
+              <a:t>a la vez</a:t>
+            </a:r>
+            <a:r>
+              <a:rPr sz="1000" b="0">
+                <a:solidFill>
+                  <a:srgbClr val="5D6663"/>
+                </a:solidFill>
+                <a:latin typeface="Helvetica Neue"/>
+              </a:rPr>
+              <a:t> con las preguntas frecuentes y con las cláusulas vigentes. Después, cuatro puntos de control: en cualquiera de ellos la respuesta se descarta y la consulta pasa a la cola de Calidad.</a:t>
+            </a:r>
           </a:p>
         </p:txBody>
       </p:sp>

--- a/docs/NormIA.pptx
+++ b/docs/NormIA.pptx
@@ -4627,7 +4627,7 @@
                 </a:solidFill>
                 <a:latin typeface="Helvetica Neue"/>
               </a:rPr>
-              <a:t> Cada paso —troceado, umbral, guardrails— es código legible y comprobable; un framework habría escondido justo la parte que aporta el valor. 29 módulos, 177 tests.</a:t>
+              <a:t> Cada paso —troceado, umbral, guardrails— es código legible y comprobable; un framework habría escondido justo la parte que aporta el valor. 30 módulos, 195 tests.</a:t>
             </a:r>
           </a:p>
         </p:txBody>
@@ -4743,22 +4743,13 @@
               </a:lnSpc>
             </a:pPr>
             <a:r>
-              <a:rPr sz="950" b="0">
+              <a:rPr sz="1050" b="0">
                 <a:solidFill>
                   <a:srgbClr val="15191A"/>
                 </a:solidFill>
-                <a:latin typeface="Courier New"/>
-              </a:rPr>
-              <a:t>qwen3.8:27b-mlx</a:t>
-            </a:r>
-            <a:r>
-              <a:rPr sz="1050" b="0">
-                <a:solidFill>
-                  <a:srgbClr val="15191A"/>
-                </a:solidFill>
-                <a:latin typeface="Helvetica Neue"/>
-              </a:rPr>
-              <a:t> vía Ollama</a:t>
+                <a:latin typeface="Helvetica Neue"/>
+              </a:rPr>
+              <a:t>Qwen3.5 27B · FP4 · vía Ollama</a:t>
             </a:r>
           </a:p>
         </p:txBody>
@@ -15000,8 +14991,8 @@
         </p:blipFill>
         <p:spPr>
           <a:xfrm>
-            <a:off x="3261370" y="1389888"/>
-            <a:ext cx="5668954" cy="4160520"/>
+            <a:off x="3236722" y="1389888"/>
+            <a:ext cx="5718250" cy="4160520"/>
           </a:xfrm>
           <a:prstGeom prst="rect">
             <a:avLst/>

--- a/docs/NormIA.pptx
+++ b/docs/NormIA.pptx
@@ -4749,7 +4749,7 @@
                 </a:solidFill>
                 <a:latin typeface="Helvetica Neue"/>
               </a:rPr>
-              <a:t>Qwen3.5 27B · FP4 · vía Ollama</a:t>
+              <a:t>Qwen3.8 27B · FP4 · vía Ollama</a:t>
             </a:r>
           </a:p>
         </p:txBody>
@@ -6024,7 +6024,7 @@
                 </a:solidFill>
                 <a:latin typeface="Helvetica Neue"/>
               </a:rPr>
-              <a:t>, no por tamaño fijo: la unidad de sentido es la cláusula.</a:t>
+              <a:t>, no por tamaño fijo: se detecta el encabezado numerado (hasta cuatro niveles) y cada cláusula es un fragmento.</a:t>
             </a:r>
           </a:p>
         </p:txBody>
@@ -6037,7 +6037,7 @@
         </p:nvSpPr>
         <p:spPr>
           <a:xfrm>
-            <a:off x="749808" y="3399663"/>
+            <a:off x="749808" y="3573399"/>
             <a:ext cx="5080863" cy="457200"/>
           </a:xfrm>
           <a:prstGeom prst="rect">
@@ -6085,7 +6085,7 @@
         </p:nvSpPr>
         <p:spPr>
           <a:xfrm>
-            <a:off x="749808" y="3847719"/>
+            <a:off x="749808" y="4021455"/>
             <a:ext cx="5080863" cy="457200"/>
           </a:xfrm>
           <a:prstGeom prst="rect">
@@ -6169,7 +6169,7 @@
         </p:nvSpPr>
         <p:spPr>
           <a:xfrm>
-            <a:off x="749808" y="4122039"/>
+            <a:off x="749808" y="4295775"/>
             <a:ext cx="5080863" cy="457200"/>
           </a:xfrm>
           <a:prstGeom prst="rect">
@@ -6204,7 +6204,7 @@
                 </a:solidFill>
                 <a:latin typeface="Helvetica Neue"/>
               </a:rPr>
-              <a:t>Aviso cuando una cláusula </a:t>
+              <a:t>Una cláusula larga se parte por párrafo, tope de 3000 caracteres y </a:t>
             </a:r>
             <a:r>
               <a:rPr sz="1050" b="1">
@@ -6213,7 +6213,7 @@
                 </a:solidFill>
                 <a:latin typeface="Helvetica Neue"/>
               </a:rPr>
-              <a:t>anuncia sin entregar</a:t>
+              <a:t>conservando su número de sección</a:t>
             </a:r>
             <a:r>
               <a:rPr sz="1050" b="0">
@@ -6222,7 +6222,7 @@
                 </a:solidFill>
                 <a:latin typeface="Helvetica Neue"/>
               </a:rPr>
-              <a:t>: el contenido está en una imagen.</a:t>
+              <a:t>. Sin solapamiento: el corte ya cae en una frontera con sentido.</a:t>
             </a:r>
           </a:p>
         </p:txBody>

--- a/docs/NormIA.pptx
+++ b/docs/NormIA.pptx
@@ -4612,13 +4612,22 @@
               </a:lnSpc>
             </a:pPr>
             <a:r>
+              <a:rPr sz="1050" b="0">
+                <a:solidFill>
+                  <a:srgbClr val="15191A"/>
+                </a:solidFill>
+                <a:latin typeface="Helvetica Neue"/>
+              </a:rPr>
+              <a:t>Cada paso —troceado, umbral, guardrails— es </a:t>
+            </a:r>
+            <a:r>
               <a:rPr sz="1050" b="1">
                 <a:solidFill>
                   <a:srgbClr val="15191A"/>
                 </a:solidFill>
                 <a:latin typeface="Helvetica Neue"/>
               </a:rPr>
-              <a:t>Sin LangChain ni LlamaIndex.</a:t>
+              <a:t>código legible y comprobable</a:t>
             </a:r>
             <a:r>
               <a:rPr sz="1050" b="0">
@@ -4627,7 +4636,7 @@
                 </a:solidFill>
                 <a:latin typeface="Helvetica Neue"/>
               </a:rPr>
-              <a:t> Cada paso —troceado, umbral, guardrails— es código legible y comprobable; un framework habría escondido justo la parte que aporta el valor. 30 módulos, 195 tests.</a:t>
+              <a:t>, no una caja negra: se puede explicar por qué el umbral vale lo que vale. 30 módulos y 195 tests.</a:t>
             </a:r>
           </a:p>
         </p:txBody>
